--- a/pitch/Sandchemy_CIP_Spark_Pitch_Deck.pptx
+++ b/pitch/Sandchemy_CIP_Spark_Pitch_Deck.pptx
@@ -16,9 +16,10 @@
     <p:sldId id="264" r:id="rId10"/>
     <p:sldId id="265" r:id="rId11"/>
     <p:sldId id="266" r:id="rId12"/>
+    <p:sldId id="267" r:id="rId13"/>
   </p:sldIdLst>
   <p:notesMasterIdLst>
-    <p:notesMasterId r:id="rId13"/>
+    <p:notesMasterId r:id="rId14"/>
   </p:notesMasterIdLst>
   <p:sldSz cx="12191695" cy="6858000"/>
   <p:notesSz cx="6858000" cy="12191695"/>
@@ -712,6 +713,94 @@
             <a:fld id="{F7021451-1387-4CA6-816F-3879F97B5CBC}" type="slidenum">
               <a:rPr lang="en-US"/>
               <a:t>11</a:t>
+            </a:fld>
+            <a:endParaRPr lang="en-US"/>
+          </a:p>
+        </p:txBody>
+      </p:sp>
+    </p:spTree>
+    <p:extLst>
+      <p:ext uri="{BB962C8B-B14F-4D97-AF65-F5344CB8AC3E}">
+        <p14:creationId xmlns:p14="http://schemas.microsoft.com/office/powerpoint/2010/main" val="1024086991"/>
+      </p:ext>
+    </p:extLst>
+  </p:cSld>
+  <p:clrMapOvr>
+    <a:masterClrMapping/>
+  </p:clrMapOvr>
+</p:notes>
+</file>
+
+<file path=ppt/notesSlides/notesSlide12.xml><?xml version="1.0" encoding="utf-8"?>
+<p:notes xmlns:a="http://schemas.openxmlformats.org/drawingml/2006/main" xmlns:r="http://schemas.openxmlformats.org/officeDocument/2006/relationships" xmlns:p="http://schemas.openxmlformats.org/presentationml/2006/main">
+  <p:cSld>
+    <p:spTree>
+      <p:nvGrpSpPr>
+        <p:cNvPr id="1" name=""/>
+        <p:cNvGrpSpPr/>
+        <p:nvPr/>
+      </p:nvGrpSpPr>
+      <p:grpSpPr>
+        <a:xfrm>
+          <a:off x="0" y="0"/>
+          <a:ext cx="0" cy="0"/>
+          <a:chOff x="0" y="0"/>
+          <a:chExt cx="0" cy="0"/>
+        </a:xfrm>
+      </p:grpSpPr>
+      <p:sp>
+        <p:nvSpPr>
+          <p:cNvPr id="2" name="Slide Image Placeholder 1"/>
+          <p:cNvSpPr>
+            <a:spLocks noGrp="1" noRot="1" noChangeAspect="1"/>
+          </p:cNvSpPr>
+          <p:nvPr>
+            <p:ph type="sldImg"/>
+          </p:nvPr>
+        </p:nvSpPr>
+        <p:spPr/>
+      </p:sp>
+      <p:sp>
+        <p:nvSpPr>
+          <p:cNvPr id="3" name="Notes Placeholder 2"/>
+          <p:cNvSpPr>
+            <a:spLocks noGrp="1"/>
+          </p:cNvSpPr>
+          <p:nvPr>
+            <p:ph type="body" idx="1"/>
+          </p:nvPr>
+        </p:nvSpPr>
+        <p:spPr/>
+        <p:txBody>
+          <a:bodyPr/>
+          <a:lstStyle/>
+          <a:p>
+            <a:r>
+              <a:rPr lang="en-US" dirty="0"/>
+              <a:t/>
+            </a:r>
+            <a:endParaRPr lang="en-US" dirty="0"/>
+          </a:p>
+        </p:txBody>
+      </p:sp>
+      <p:sp>
+        <p:nvSpPr>
+          <p:cNvPr id="4" name="Slide Number Placeholder 3"/>
+          <p:cNvSpPr>
+            <a:spLocks noGrp="1"/>
+          </p:cNvSpPr>
+          <p:nvPr>
+            <p:ph type="sldNum" sz="quarter" idx="10"/>
+          </p:nvPr>
+        </p:nvSpPr>
+        <p:spPr/>
+        <p:txBody>
+          <a:bodyPr/>
+          <a:lstStyle/>
+          <a:p>
+            <a:fld id="{F7021451-1387-4CA6-816F-3879F97B5CBC}" type="slidenum">
+              <a:rPr lang="en-US"/>
+              <a:t>12</a:t>
             </a:fld>
             <a:endParaRPr lang="en-US"/>
           </a:p>
@@ -2070,6 +2159,926 @@
     <p:bg>
       <p:bgPr>
         <a:solidFill>
+          <a:srgbClr val="0D0F1A"/>
+        </a:solidFill>
+      </p:bgPr>
+    </p:bg>
+    <p:spTree>
+      <p:nvGrpSpPr>
+        <p:cNvPr id="1" name=""/>
+        <p:cNvGrpSpPr/>
+        <p:nvPr/>
+      </p:nvGrpSpPr>
+      <p:grpSpPr>
+        <a:xfrm>
+          <a:off x="0" y="0"/>
+          <a:ext cx="0" cy="0"/>
+          <a:chOff x="0" y="0"/>
+          <a:chExt cx="0" cy="0"/>
+        </a:xfrm>
+      </p:grpSpPr>
+      <p:sp>
+        <p:nvSpPr>
+          <p:cNvPr id="2" name="Text 0"/>
+          <p:cNvSpPr/>
+          <p:nvPr/>
+        </p:nvSpPr>
+        <p:spPr>
+          <a:xfrm>
+            <a:off x="548640" y="411480"/>
+            <a:ext cx="5486400" cy="365760"/>
+          </a:xfrm>
+          <a:prstGeom prst="rect">
+            <a:avLst/>
+          </a:prstGeom>
+          <a:noFill/>
+          <a:ln/>
+        </p:spPr>
+        <p:txBody>
+          <a:bodyPr wrap="square" lIns="0" tIns="0" rIns="0" bIns="0" rtlCol="0" anchor="ctr"/>
+          <a:lstStyle/>
+          <a:p>
+            <a:pPr indent="0" marL="0">
+              <a:buNone/>
+            </a:pPr>
+            <a:r>
+              <a:rPr lang="en-US" sz="1300" b="1" spc="200" kern="0" dirty="0">
+                <a:solidFill>
+                  <a:srgbClr val="FFD76B"/>
+                </a:solidFill>
+                <a:latin typeface="Calibri" pitchFamily="34" charset="0"/>
+                <a:ea typeface="Calibri" pitchFamily="34" charset="-122"/>
+                <a:cs typeface="Calibri" pitchFamily="34" charset="-120"/>
+              </a:rPr>
+              <a:t>THE ASK</a:t>
+            </a:r>
+            <a:endParaRPr lang="en-US" sz="1300" dirty="0"/>
+          </a:p>
+        </p:txBody>
+      </p:sp>
+      <p:sp>
+        <p:nvSpPr>
+          <p:cNvPr id="3" name="Text 1"/>
+          <p:cNvSpPr/>
+          <p:nvPr/>
+        </p:nvSpPr>
+        <p:spPr>
+          <a:xfrm>
+            <a:off x="548640" y="777240"/>
+            <a:ext cx="10972800" cy="822960"/>
+          </a:xfrm>
+          <a:prstGeom prst="rect">
+            <a:avLst/>
+          </a:prstGeom>
+          <a:noFill/>
+          <a:ln/>
+        </p:spPr>
+        <p:txBody>
+          <a:bodyPr wrap="square" lIns="0" tIns="0" rIns="0" bIns="0" rtlCol="0" anchor="ctr"/>
+          <a:lstStyle/>
+          <a:p>
+            <a:pPr indent="0" marL="0">
+              <a:buNone/>
+            </a:pPr>
+            <a:r>
+              <a:rPr lang="en-US" sz="3200" b="1" dirty="0">
+                <a:solidFill>
+                  <a:srgbClr val="FFFFFF"/>
+                </a:solidFill>
+                <a:latin typeface="Cambria" pitchFamily="34" charset="0"/>
+                <a:ea typeface="Cambria" pitchFamily="34" charset="-122"/>
+                <a:cs typeface="Cambria" pitchFamily="34" charset="-120"/>
+              </a:rPr>
+              <a:t>RM150,000 — CIP Spark, pre-seed</a:t>
+            </a:r>
+            <a:endParaRPr lang="en-US" sz="3200" dirty="0"/>
+          </a:p>
+        </p:txBody>
+      </p:sp>
+      <p:sp>
+        <p:nvSpPr>
+          <p:cNvPr id="4" name="Text 2"/>
+          <p:cNvSpPr/>
+          <p:nvPr/>
+        </p:nvSpPr>
+        <p:spPr>
+          <a:xfrm>
+            <a:off x="548640" y="1463040"/>
+            <a:ext cx="10515600" cy="365760"/>
+          </a:xfrm>
+          <a:prstGeom prst="rect">
+            <a:avLst/>
+          </a:prstGeom>
+          <a:noFill/>
+          <a:ln/>
+        </p:spPr>
+        <p:txBody>
+          <a:bodyPr wrap="square" lIns="0" tIns="0" rIns="0" bIns="0" rtlCol="0" anchor="ctr"/>
+          <a:lstStyle/>
+          <a:p>
+            <a:pPr indent="0" marL="0">
+              <a:buNone/>
+            </a:pPr>
+            <a:r>
+              <a:rPr lang="en-US" sz="1250" i="1" dirty="0">
+                <a:solidFill>
+                  <a:srgbClr val="9AA2BD"/>
+                </a:solidFill>
+                <a:latin typeface="Calibri" pitchFamily="34" charset="0"/>
+                <a:ea typeface="Calibri" pitchFamily="34" charset="-122"/>
+                <a:cs typeface="Calibri" pitchFamily="34" charset="-120"/>
+              </a:rPr>
+              <a:t>Full pre-seed cap requested, split per CIP Spark's own 60/40 developmental-vs-commercialisation rule.</a:t>
+            </a:r>
+            <a:endParaRPr lang="en-US" sz="1250" dirty="0"/>
+          </a:p>
+        </p:txBody>
+      </p:sp>
+      <p:sp>
+        <p:nvSpPr>
+          <p:cNvPr id="5" name="Shape 3"/>
+          <p:cNvSpPr/>
+          <p:nvPr/>
+        </p:nvSpPr>
+        <p:spPr>
+          <a:xfrm>
+            <a:off x="548640" y="2011680"/>
+            <a:ext cx="6492240" cy="960120"/>
+          </a:xfrm>
+          <a:prstGeom prst="roundRect">
+            <a:avLst>
+              <a:gd name="adj" fmla="val 11429"/>
+            </a:avLst>
+          </a:prstGeom>
+          <a:solidFill>
+            <a:srgbClr val="241B00"/>
+          </a:solidFill>
+          <a:ln w="12700">
+            <a:solidFill>
+              <a:srgbClr val="FFD76B"/>
+            </a:solidFill>
+            <a:prstDash val="solid"/>
+          </a:ln>
+          <a:effectLst>
+            <a:outerShdw sx="100000" sy="100000" kx="0" ky="0" algn="bl" rotWithShape="0" blurRad="127000" dist="38100" dir="5400000">
+              <a:srgbClr val="000000">
+                <a:alpha val="35000"/>
+              </a:srgbClr>
+            </a:outerShdw>
+          </a:effectLst>
+        </p:spPr>
+      </p:sp>
+      <p:sp>
+        <p:nvSpPr>
+          <p:cNvPr id="6" name="Text 4"/>
+          <p:cNvSpPr/>
+          <p:nvPr/>
+        </p:nvSpPr>
+        <p:spPr>
+          <a:xfrm>
+            <a:off x="822960" y="2011680"/>
+            <a:ext cx="2377440" cy="960120"/>
+          </a:xfrm>
+          <a:prstGeom prst="rect">
+            <a:avLst/>
+          </a:prstGeom>
+          <a:noFill/>
+          <a:ln/>
+        </p:spPr>
+        <p:txBody>
+          <a:bodyPr wrap="square" lIns="0" tIns="0" rIns="0" bIns="0" rtlCol="0" anchor="ctr"/>
+          <a:lstStyle/>
+          <a:p>
+            <a:pPr indent="0" marL="0">
+              <a:buNone/>
+            </a:pPr>
+            <a:r>
+              <a:rPr lang="en-US" sz="2200" b="1" dirty="0">
+                <a:solidFill>
+                  <a:srgbClr val="FFD76B"/>
+                </a:solidFill>
+                <a:latin typeface="Cambria" pitchFamily="34" charset="0"/>
+                <a:ea typeface="Cambria" pitchFamily="34" charset="-122"/>
+                <a:cs typeface="Cambria" pitchFamily="34" charset="-120"/>
+              </a:rPr>
+              <a:t>60%  ·  RM90,000</a:t>
+            </a:r>
+            <a:endParaRPr lang="en-US" sz="2200" dirty="0"/>
+          </a:p>
+        </p:txBody>
+      </p:sp>
+      <p:sp>
+        <p:nvSpPr>
+          <p:cNvPr id="7" name="Text 5"/>
+          <p:cNvSpPr/>
+          <p:nvPr/>
+        </p:nvSpPr>
+        <p:spPr>
+          <a:xfrm>
+            <a:off x="3291840" y="2011680"/>
+            <a:ext cx="3657600" cy="960120"/>
+          </a:xfrm>
+          <a:prstGeom prst="rect">
+            <a:avLst/>
+          </a:prstGeom>
+          <a:noFill/>
+          <a:ln/>
+        </p:spPr>
+        <p:txBody>
+          <a:bodyPr wrap="square" lIns="0" tIns="0" rIns="0" bIns="0" rtlCol="0" anchor="ctr"/>
+          <a:lstStyle/>
+          <a:p>
+            <a:pPr indent="0" marL="0">
+              <a:lnSpc>
+                <a:spcPct val="120000"/>
+              </a:lnSpc>
+              <a:buNone/>
+            </a:pPr>
+            <a:r>
+              <a:rPr lang="en-US" sz="1050" dirty="0">
+                <a:solidFill>
+                  <a:srgbClr val="F2F2F2"/>
+                </a:solidFill>
+                <a:latin typeface="Calibri" pitchFamily="34" charset="0"/>
+                <a:ea typeface="Calibri" pitchFamily="34" charset="-122"/>
+                <a:cs typeface="Calibri" pitchFamily="34" charset="-120"/>
+              </a:rPr>
+              <a:t>Development — mobile app wrapper, teacher dashboard, curriculum content pipeline, new element/reaction batches</a:t>
+            </a:r>
+            <a:endParaRPr lang="en-US" sz="1050" dirty="0"/>
+          </a:p>
+        </p:txBody>
+      </p:sp>
+      <p:sp>
+        <p:nvSpPr>
+          <p:cNvPr id="8" name="Shape 6"/>
+          <p:cNvSpPr/>
+          <p:nvPr/>
+        </p:nvSpPr>
+        <p:spPr>
+          <a:xfrm>
+            <a:off x="548640" y="3108960"/>
+            <a:ext cx="6492240" cy="960120"/>
+          </a:xfrm>
+          <a:prstGeom prst="roundRect">
+            <a:avLst>
+              <a:gd name="adj" fmla="val 11429"/>
+            </a:avLst>
+          </a:prstGeom>
+          <a:solidFill>
+            <a:srgbClr val="0E2A2E"/>
+          </a:solidFill>
+          <a:ln w="12700">
+            <a:solidFill>
+              <a:srgbClr val="7EE3FF"/>
+            </a:solidFill>
+            <a:prstDash val="solid"/>
+          </a:ln>
+          <a:effectLst>
+            <a:outerShdw sx="100000" sy="100000" kx="0" ky="0" algn="bl" rotWithShape="0" blurRad="127000" dist="38100" dir="5400000">
+              <a:srgbClr val="000000">
+                <a:alpha val="35000"/>
+              </a:srgbClr>
+            </a:outerShdw>
+          </a:effectLst>
+        </p:spPr>
+      </p:sp>
+      <p:sp>
+        <p:nvSpPr>
+          <p:cNvPr id="9" name="Text 7"/>
+          <p:cNvSpPr/>
+          <p:nvPr/>
+        </p:nvSpPr>
+        <p:spPr>
+          <a:xfrm>
+            <a:off x="822960" y="3108960"/>
+            <a:ext cx="2377440" cy="960120"/>
+          </a:xfrm>
+          <a:prstGeom prst="rect">
+            <a:avLst/>
+          </a:prstGeom>
+          <a:noFill/>
+          <a:ln/>
+        </p:spPr>
+        <p:txBody>
+          <a:bodyPr wrap="square" lIns="0" tIns="0" rIns="0" bIns="0" rtlCol="0" anchor="ctr"/>
+          <a:lstStyle/>
+          <a:p>
+            <a:pPr indent="0" marL="0">
+              <a:buNone/>
+            </a:pPr>
+            <a:r>
+              <a:rPr lang="en-US" sz="2200" b="1" dirty="0">
+                <a:solidFill>
+                  <a:srgbClr val="7EE3FF"/>
+                </a:solidFill>
+                <a:latin typeface="Cambria" pitchFamily="34" charset="0"/>
+                <a:ea typeface="Cambria" pitchFamily="34" charset="-122"/>
+                <a:cs typeface="Cambria" pitchFamily="34" charset="-120"/>
+              </a:rPr>
+              <a:t>40%  ·  RM60,000</a:t>
+            </a:r>
+            <a:endParaRPr lang="en-US" sz="2200" dirty="0"/>
+          </a:p>
+        </p:txBody>
+      </p:sp>
+      <p:sp>
+        <p:nvSpPr>
+          <p:cNvPr id="10" name="Text 8"/>
+          <p:cNvSpPr/>
+          <p:nvPr/>
+        </p:nvSpPr>
+        <p:spPr>
+          <a:xfrm>
+            <a:off x="3291840" y="3108960"/>
+            <a:ext cx="3657600" cy="960120"/>
+          </a:xfrm>
+          <a:prstGeom prst="rect">
+            <a:avLst/>
+          </a:prstGeom>
+          <a:noFill/>
+          <a:ln/>
+        </p:spPr>
+        <p:txBody>
+          <a:bodyPr wrap="square" lIns="0" tIns="0" rIns="0" bIns="0" rtlCol="0" anchor="ctr"/>
+          <a:lstStyle/>
+          <a:p>
+            <a:pPr indent="0" marL="0">
+              <a:lnSpc>
+                <a:spcPct val="120000"/>
+              </a:lnSpc>
+              <a:buNone/>
+            </a:pPr>
+            <a:r>
+              <a:rPr lang="en-US" sz="1050" dirty="0">
+                <a:solidFill>
+                  <a:srgbClr val="F2F2F2"/>
+                </a:solidFill>
+                <a:latin typeface="Calibri" pitchFamily="34" charset="0"/>
+                <a:ea typeface="Calibri" pitchFamily="34" charset="-122"/>
+                <a:cs typeface="Calibri" pitchFamily="34" charset="-120"/>
+              </a:rPr>
+              <a:t>Commercialisation — school pilot rollouts, teacher training materials, IP/legal setup, marketing for launch</a:t>
+            </a:r>
+            <a:endParaRPr lang="en-US" sz="1050" dirty="0"/>
+          </a:p>
+        </p:txBody>
+      </p:sp>
+      <p:sp>
+        <p:nvSpPr>
+          <p:cNvPr id="11" name="Shape 9"/>
+          <p:cNvSpPr/>
+          <p:nvPr/>
+        </p:nvSpPr>
+        <p:spPr>
+          <a:xfrm>
+            <a:off x="7315200" y="2011680"/>
+            <a:ext cx="4343400" cy="4023360"/>
+          </a:xfrm>
+          <a:prstGeom prst="roundRect">
+            <a:avLst>
+              <a:gd name="adj" fmla="val 2727"/>
+            </a:avLst>
+          </a:prstGeom>
+          <a:solidFill>
+            <a:srgbClr val="181C33"/>
+          </a:solidFill>
+          <a:ln w="12700">
+            <a:solidFill>
+              <a:srgbClr val="2C3252"/>
+            </a:solidFill>
+            <a:prstDash val="solid"/>
+          </a:ln>
+          <a:effectLst>
+            <a:outerShdw sx="100000" sy="100000" kx="0" ky="0" algn="bl" rotWithShape="0" blurRad="127000" dist="38100" dir="5400000">
+              <a:srgbClr val="000000">
+                <a:alpha val="35000"/>
+              </a:srgbClr>
+            </a:outerShdw>
+          </a:effectLst>
+        </p:spPr>
+      </p:sp>
+      <p:sp>
+        <p:nvSpPr>
+          <p:cNvPr id="12" name="Text 10"/>
+          <p:cNvSpPr/>
+          <p:nvPr/>
+        </p:nvSpPr>
+        <p:spPr>
+          <a:xfrm>
+            <a:off x="7589520" y="2194560"/>
+            <a:ext cx="3840480" cy="365760"/>
+          </a:xfrm>
+          <a:prstGeom prst="rect">
+            <a:avLst/>
+          </a:prstGeom>
+          <a:noFill/>
+          <a:ln/>
+        </p:spPr>
+        <p:txBody>
+          <a:bodyPr wrap="square" lIns="0" tIns="0" rIns="0" bIns="0" rtlCol="0" anchor="ctr"/>
+          <a:lstStyle/>
+          <a:p>
+            <a:pPr indent="0" marL="0">
+              <a:buNone/>
+            </a:pPr>
+            <a:r>
+              <a:rPr lang="en-US" sz="1300" b="1" dirty="0">
+                <a:solidFill>
+                  <a:srgbClr val="FFFFFF"/>
+                </a:solidFill>
+                <a:latin typeface="Calibri" pitchFamily="34" charset="0"/>
+                <a:ea typeface="Calibri" pitchFamily="34" charset="-122"/>
+                <a:cs typeface="Calibri" pitchFamily="34" charset="-120"/>
+              </a:rPr>
+              <a:t>Milestones this funds</a:t>
+            </a:r>
+            <a:endParaRPr lang="en-US" sz="1300" dirty="0"/>
+          </a:p>
+        </p:txBody>
+      </p:sp>
+      <p:sp>
+        <p:nvSpPr>
+          <p:cNvPr id="13" name="Text 11"/>
+          <p:cNvSpPr/>
+          <p:nvPr/>
+        </p:nvSpPr>
+        <p:spPr>
+          <a:xfrm>
+            <a:off x="7589520" y="2651760"/>
+            <a:ext cx="274320" cy="365760"/>
+          </a:xfrm>
+          <a:prstGeom prst="rect">
+            <a:avLst/>
+          </a:prstGeom>
+          <a:noFill/>
+          <a:ln/>
+        </p:spPr>
+        <p:txBody>
+          <a:bodyPr wrap="square" lIns="0" tIns="0" rIns="0" bIns="0" rtlCol="0" anchor="ctr"/>
+          <a:lstStyle/>
+          <a:p>
+            <a:pPr indent="0" marL="0">
+              <a:buNone/>
+            </a:pPr>
+            <a:r>
+              <a:rPr lang="en-US" sz="1200" b="1" dirty="0">
+                <a:solidFill>
+                  <a:srgbClr val="FFD76B"/>
+                </a:solidFill>
+              </a:rPr>
+              <a:t>→</a:t>
+            </a:r>
+            <a:endParaRPr lang="en-US" sz="1200" dirty="0"/>
+          </a:p>
+        </p:txBody>
+      </p:sp>
+      <p:sp>
+        <p:nvSpPr>
+          <p:cNvPr id="14" name="Text 12"/>
+          <p:cNvSpPr/>
+          <p:nvPr/>
+        </p:nvSpPr>
+        <p:spPr>
+          <a:xfrm>
+            <a:off x="7909560" y="2651760"/>
+            <a:ext cx="3566160" cy="502920"/>
+          </a:xfrm>
+          <a:prstGeom prst="rect">
+            <a:avLst/>
+          </a:prstGeom>
+          <a:noFill/>
+          <a:ln/>
+        </p:spPr>
+        <p:txBody>
+          <a:bodyPr wrap="square" lIns="0" tIns="0" rIns="0" bIns="0" rtlCol="0" anchor="ctr"/>
+          <a:lstStyle/>
+          <a:p>
+            <a:pPr indent="0" marL="0">
+              <a:lnSpc>
+                <a:spcPct val="115000"/>
+              </a:lnSpc>
+              <a:buNone/>
+            </a:pPr>
+            <a:r>
+              <a:rPr lang="en-US" sz="1100" dirty="0">
+                <a:solidFill>
+                  <a:srgbClr val="9AA2BD"/>
+                </a:solidFill>
+                <a:latin typeface="Calibri" pitchFamily="34" charset="0"/>
+                <a:ea typeface="Calibri" pitchFamily="34" charset="-122"/>
+                <a:cs typeface="Calibri" pitchFamily="34" charset="-120"/>
+              </a:rPr>
+              <a:t>3 signed school pilots</a:t>
+            </a:r>
+            <a:endParaRPr lang="en-US" sz="1100" dirty="0"/>
+          </a:p>
+        </p:txBody>
+      </p:sp>
+      <p:sp>
+        <p:nvSpPr>
+          <p:cNvPr id="15" name="Text 13"/>
+          <p:cNvSpPr/>
+          <p:nvPr/>
+        </p:nvSpPr>
+        <p:spPr>
+          <a:xfrm>
+            <a:off x="7589520" y="3310128"/>
+            <a:ext cx="274320" cy="365760"/>
+          </a:xfrm>
+          <a:prstGeom prst="rect">
+            <a:avLst/>
+          </a:prstGeom>
+          <a:noFill/>
+          <a:ln/>
+        </p:spPr>
+        <p:txBody>
+          <a:bodyPr wrap="square" lIns="0" tIns="0" rIns="0" bIns="0" rtlCol="0" anchor="ctr"/>
+          <a:lstStyle/>
+          <a:p>
+            <a:pPr indent="0" marL="0">
+              <a:buNone/>
+            </a:pPr>
+            <a:r>
+              <a:rPr lang="en-US" sz="1200" b="1" dirty="0">
+                <a:solidFill>
+                  <a:srgbClr val="FFD76B"/>
+                </a:solidFill>
+              </a:rPr>
+              <a:t>→</a:t>
+            </a:r>
+            <a:endParaRPr lang="en-US" sz="1200" dirty="0"/>
+          </a:p>
+        </p:txBody>
+      </p:sp>
+      <p:sp>
+        <p:nvSpPr>
+          <p:cNvPr id="16" name="Text 14"/>
+          <p:cNvSpPr/>
+          <p:nvPr/>
+        </p:nvSpPr>
+        <p:spPr>
+          <a:xfrm>
+            <a:off x="7909560" y="3310128"/>
+            <a:ext cx="3566160" cy="502920"/>
+          </a:xfrm>
+          <a:prstGeom prst="rect">
+            <a:avLst/>
+          </a:prstGeom>
+          <a:noFill/>
+          <a:ln/>
+        </p:spPr>
+        <p:txBody>
+          <a:bodyPr wrap="square" lIns="0" tIns="0" rIns="0" bIns="0" rtlCol="0" anchor="ctr"/>
+          <a:lstStyle/>
+          <a:p>
+            <a:pPr indent="0" marL="0">
+              <a:lnSpc>
+                <a:spcPct val="115000"/>
+              </a:lnSpc>
+              <a:buNone/>
+            </a:pPr>
+            <a:r>
+              <a:rPr lang="en-US" sz="1100" dirty="0">
+                <a:solidFill>
+                  <a:srgbClr val="9AA2BD"/>
+                </a:solidFill>
+                <a:latin typeface="Calibri" pitchFamily="34" charset="0"/>
+                <a:ea typeface="Calibri" pitchFamily="34" charset="-122"/>
+                <a:cs typeface="Calibri" pitchFamily="34" charset="-120"/>
+              </a:rPr>
+              <a:t>Ask Pluto (AI tutor) MVP shipped</a:t>
+            </a:r>
+            <a:endParaRPr lang="en-US" sz="1100" dirty="0"/>
+          </a:p>
+        </p:txBody>
+      </p:sp>
+      <p:sp>
+        <p:nvSpPr>
+          <p:cNvPr id="17" name="Text 15"/>
+          <p:cNvSpPr/>
+          <p:nvPr/>
+        </p:nvSpPr>
+        <p:spPr>
+          <a:xfrm>
+            <a:off x="7589520" y="3968496"/>
+            <a:ext cx="274320" cy="365760"/>
+          </a:xfrm>
+          <a:prstGeom prst="rect">
+            <a:avLst/>
+          </a:prstGeom>
+          <a:noFill/>
+          <a:ln/>
+        </p:spPr>
+        <p:txBody>
+          <a:bodyPr wrap="square" lIns="0" tIns="0" rIns="0" bIns="0" rtlCol="0" anchor="ctr"/>
+          <a:lstStyle/>
+          <a:p>
+            <a:pPr indent="0" marL="0">
+              <a:buNone/>
+            </a:pPr>
+            <a:r>
+              <a:rPr lang="en-US" sz="1200" b="1" dirty="0">
+                <a:solidFill>
+                  <a:srgbClr val="FFD76B"/>
+                </a:solidFill>
+              </a:rPr>
+              <a:t>→</a:t>
+            </a:r>
+            <a:endParaRPr lang="en-US" sz="1200" dirty="0"/>
+          </a:p>
+        </p:txBody>
+      </p:sp>
+      <p:sp>
+        <p:nvSpPr>
+          <p:cNvPr id="18" name="Text 16"/>
+          <p:cNvSpPr/>
+          <p:nvPr/>
+        </p:nvSpPr>
+        <p:spPr>
+          <a:xfrm>
+            <a:off x="7909560" y="3968496"/>
+            <a:ext cx="3566160" cy="502920"/>
+          </a:xfrm>
+          <a:prstGeom prst="rect">
+            <a:avLst/>
+          </a:prstGeom>
+          <a:noFill/>
+          <a:ln/>
+        </p:spPr>
+        <p:txBody>
+          <a:bodyPr wrap="square" lIns="0" tIns="0" rIns="0" bIns="0" rtlCol="0" anchor="ctr"/>
+          <a:lstStyle/>
+          <a:p>
+            <a:pPr indent="0" marL="0">
+              <a:lnSpc>
+                <a:spcPct val="115000"/>
+              </a:lnSpc>
+              <a:buNone/>
+            </a:pPr>
+            <a:r>
+              <a:rPr lang="en-US" sz="1100" dirty="0">
+                <a:solidFill>
+                  <a:srgbClr val="9AA2BD"/>
+                </a:solidFill>
+                <a:latin typeface="Calibri" pitchFamily="34" charset="0"/>
+                <a:ea typeface="Calibri" pitchFamily="34" charset="-122"/>
+                <a:cs typeface="Calibri" pitchFamily="34" charset="-120"/>
+              </a:rPr>
+              <a:t>Teacher dashboard MVP live</a:t>
+            </a:r>
+            <a:endParaRPr lang="en-US" sz="1100" dirty="0"/>
+          </a:p>
+        </p:txBody>
+      </p:sp>
+      <p:sp>
+        <p:nvSpPr>
+          <p:cNvPr id="19" name="Text 17"/>
+          <p:cNvSpPr/>
+          <p:nvPr/>
+        </p:nvSpPr>
+        <p:spPr>
+          <a:xfrm>
+            <a:off x="7589520" y="4626864"/>
+            <a:ext cx="274320" cy="365760"/>
+          </a:xfrm>
+          <a:prstGeom prst="rect">
+            <a:avLst/>
+          </a:prstGeom>
+          <a:noFill/>
+          <a:ln/>
+        </p:spPr>
+        <p:txBody>
+          <a:bodyPr wrap="square" lIns="0" tIns="0" rIns="0" bIns="0" rtlCol="0" anchor="ctr"/>
+          <a:lstStyle/>
+          <a:p>
+            <a:pPr indent="0" marL="0">
+              <a:buNone/>
+            </a:pPr>
+            <a:r>
+              <a:rPr lang="en-US" sz="1200" b="1" dirty="0">
+                <a:solidFill>
+                  <a:srgbClr val="FFD76B"/>
+                </a:solidFill>
+              </a:rPr>
+              <a:t>→</a:t>
+            </a:r>
+            <a:endParaRPr lang="en-US" sz="1200" dirty="0"/>
+          </a:p>
+        </p:txBody>
+      </p:sp>
+      <p:sp>
+        <p:nvSpPr>
+          <p:cNvPr id="20" name="Text 18"/>
+          <p:cNvSpPr/>
+          <p:nvPr/>
+        </p:nvSpPr>
+        <p:spPr>
+          <a:xfrm>
+            <a:off x="7909560" y="4626864"/>
+            <a:ext cx="3566160" cy="502920"/>
+          </a:xfrm>
+          <a:prstGeom prst="rect">
+            <a:avLst/>
+          </a:prstGeom>
+          <a:noFill/>
+          <a:ln/>
+        </p:spPr>
+        <p:txBody>
+          <a:bodyPr wrap="square" lIns="0" tIns="0" rIns="0" bIns="0" rtlCol="0" anchor="ctr"/>
+          <a:lstStyle/>
+          <a:p>
+            <a:pPr indent="0" marL="0">
+              <a:lnSpc>
+                <a:spcPct val="115000"/>
+              </a:lnSpc>
+              <a:buNone/>
+            </a:pPr>
+            <a:r>
+              <a:rPr lang="en-US" sz="1100" dirty="0">
+                <a:solidFill>
+                  <a:srgbClr val="9AA2BD"/>
+                </a:solidFill>
+                <a:latin typeface="Calibri" pitchFamily="34" charset="0"/>
+                <a:ea typeface="Calibri" pitchFamily="34" charset="-122"/>
+                <a:cs typeface="Calibri" pitchFamily="34" charset="-120"/>
+              </a:rPr>
+              <a:t>Chosen business model validated with real paying users</a:t>
+            </a:r>
+            <a:endParaRPr lang="en-US" sz="1100" dirty="0"/>
+          </a:p>
+        </p:txBody>
+      </p:sp>
+      <p:sp>
+        <p:nvSpPr>
+          <p:cNvPr id="21" name="Text 19"/>
+          <p:cNvSpPr/>
+          <p:nvPr/>
+        </p:nvSpPr>
+        <p:spPr>
+          <a:xfrm>
+            <a:off x="7589520" y="5285232"/>
+            <a:ext cx="274320" cy="365760"/>
+          </a:xfrm>
+          <a:prstGeom prst="rect">
+            <a:avLst/>
+          </a:prstGeom>
+          <a:noFill/>
+          <a:ln/>
+        </p:spPr>
+        <p:txBody>
+          <a:bodyPr wrap="square" lIns="0" tIns="0" rIns="0" bIns="0" rtlCol="0" anchor="ctr"/>
+          <a:lstStyle/>
+          <a:p>
+            <a:pPr indent="0" marL="0">
+              <a:buNone/>
+            </a:pPr>
+            <a:r>
+              <a:rPr lang="en-US" sz="1200" b="1" dirty="0">
+                <a:solidFill>
+                  <a:srgbClr val="FFD76B"/>
+                </a:solidFill>
+              </a:rPr>
+              <a:t>→</a:t>
+            </a:r>
+            <a:endParaRPr lang="en-US" sz="1200" dirty="0"/>
+          </a:p>
+        </p:txBody>
+      </p:sp>
+      <p:sp>
+        <p:nvSpPr>
+          <p:cNvPr id="22" name="Text 20"/>
+          <p:cNvSpPr/>
+          <p:nvPr/>
+        </p:nvSpPr>
+        <p:spPr>
+          <a:xfrm>
+            <a:off x="7909560" y="5285232"/>
+            <a:ext cx="3566160" cy="502920"/>
+          </a:xfrm>
+          <a:prstGeom prst="rect">
+            <a:avLst/>
+          </a:prstGeom>
+          <a:noFill/>
+          <a:ln/>
+        </p:spPr>
+        <p:txBody>
+          <a:bodyPr wrap="square" lIns="0" tIns="0" rIns="0" bIns="0" rtlCol="0" anchor="ctr"/>
+          <a:lstStyle/>
+          <a:p>
+            <a:pPr indent="0" marL="0">
+              <a:lnSpc>
+                <a:spcPct val="115000"/>
+              </a:lnSpc>
+              <a:buNone/>
+            </a:pPr>
+            <a:r>
+              <a:rPr lang="en-US" sz="1100" dirty="0">
+                <a:solidFill>
+                  <a:srgbClr val="9AA2BD"/>
+                </a:solidFill>
+                <a:latin typeface="Calibri" pitchFamily="34" charset="0"/>
+                <a:ea typeface="Calibri" pitchFamily="34" charset="-122"/>
+                <a:cs typeface="Calibri" pitchFamily="34" charset="-120"/>
+              </a:rPr>
+              <a:t>Ready for CIP Sprint (seed) follow-on</a:t>
+            </a:r>
+            <a:endParaRPr lang="en-US" sz="1100" dirty="0"/>
+          </a:p>
+        </p:txBody>
+      </p:sp>
+      <p:sp>
+        <p:nvSpPr>
+          <p:cNvPr id="23" name="Text 21"/>
+          <p:cNvSpPr/>
+          <p:nvPr/>
+        </p:nvSpPr>
+        <p:spPr>
+          <a:xfrm>
+            <a:off x="11430000" y="6446520"/>
+            <a:ext cx="548640" cy="274320"/>
+          </a:xfrm>
+          <a:prstGeom prst="rect">
+            <a:avLst/>
+          </a:prstGeom>
+          <a:noFill/>
+          <a:ln/>
+        </p:spPr>
+        <p:txBody>
+          <a:bodyPr wrap="square" lIns="0" tIns="0" rIns="0" bIns="0" rtlCol="0" anchor="ctr"/>
+          <a:lstStyle/>
+          <a:p>
+            <a:pPr algn="r" indent="0" marL="0">
+              <a:buNone/>
+            </a:pPr>
+            <a:r>
+              <a:rPr lang="en-US" sz="1000" dirty="0">
+                <a:solidFill>
+                  <a:srgbClr val="9AA2BD"/>
+                </a:solidFill>
+                <a:latin typeface="Calibri" pitchFamily="34" charset="0"/>
+                <a:ea typeface="Calibri" pitchFamily="34" charset="-122"/>
+                <a:cs typeface="Calibri" pitchFamily="34" charset="-120"/>
+              </a:rPr>
+              <a:t>10</a:t>
+            </a:r>
+            <a:endParaRPr lang="en-US" sz="1000" dirty="0"/>
+          </a:p>
+        </p:txBody>
+      </p:sp>
+      <p:sp>
+        <p:nvSpPr>
+          <p:cNvPr id="24" name="Text 22"/>
+          <p:cNvSpPr/>
+          <p:nvPr/>
+        </p:nvSpPr>
+        <p:spPr>
+          <a:xfrm>
+            <a:off x="548640" y="6446520"/>
+            <a:ext cx="2743200" cy="274320"/>
+          </a:xfrm>
+          <a:prstGeom prst="rect">
+            <a:avLst/>
+          </a:prstGeom>
+          <a:noFill/>
+          <a:ln/>
+        </p:spPr>
+        <p:txBody>
+          <a:bodyPr wrap="square" lIns="0" tIns="0" rIns="0" bIns="0" rtlCol="0" anchor="ctr"/>
+          <a:lstStyle/>
+          <a:p>
+            <a:pPr indent="0" marL="0">
+              <a:buNone/>
+            </a:pPr>
+            <a:r>
+              <a:rPr lang="en-US" sz="1000" spc="100" kern="0" dirty="0">
+                <a:solidFill>
+                  <a:srgbClr val="9AA2BD"/>
+                </a:solidFill>
+                <a:latin typeface="Calibri" pitchFamily="34" charset="0"/>
+                <a:ea typeface="Calibri" pitchFamily="34" charset="-122"/>
+                <a:cs typeface="Calibri" pitchFamily="34" charset="-120"/>
+              </a:rPr>
+              <a:t>SANDCHEMY</a:t>
+            </a:r>
+            <a:endParaRPr lang="en-US" sz="1000" dirty="0"/>
+          </a:p>
+        </p:txBody>
+      </p:sp>
+    </p:spTree>
+  </p:cSld>
+  <p:clrMapOvr>
+    <a:masterClrMapping/>
+  </p:clrMapOvr>
+</p:sld>
+</file>
+
+<file path=ppt/slides/slide11.xml><?xml version="1.0" encoding="utf-8"?>
+<p:sld xmlns:a="http://schemas.openxmlformats.org/drawingml/2006/main" xmlns:r="http://schemas.openxmlformats.org/officeDocument/2006/relationships" xmlns:p="http://schemas.openxmlformats.org/presentationml/2006/main">
+  <p:cSld name="Slide 11">
+    <p:bg>
+      <p:bgPr>
+        <a:solidFill>
           <a:srgbClr val="14172A"/>
         </a:solidFill>
       </p:bgPr>
@@ -2803,7 +3812,7 @@
                 <a:ea typeface="Calibri" pitchFamily="34" charset="-122"/>
                 <a:cs typeface="Calibri" pitchFamily="34" charset="-120"/>
               </a:rPr>
-              <a:t>10</a:t>
+              <a:t>11</a:t>
             </a:r>
             <a:endParaRPr lang="en-US" sz="1000" dirty="0"/>
           </a:p>
@@ -2856,9 +3865,9 @@
 </p:sld>
 </file>
 
-<file path=ppt/slides/slide11.xml><?xml version="1.0" encoding="utf-8"?>
+<file path=ppt/slides/slide12.xml><?xml version="1.0" encoding="utf-8"?>
 <p:sld xmlns:a="http://schemas.openxmlformats.org/drawingml/2006/main" xmlns:r="http://schemas.openxmlformats.org/officeDocument/2006/relationships" xmlns:p="http://schemas.openxmlformats.org/presentationml/2006/main">
-  <p:cSld name="Slide 11">
+  <p:cSld name="Slide 12">
     <p:bg>
       <p:bgPr>
         <a:solidFill>
@@ -5900,7 +6909,7 @@
                 <a:ea typeface="Calibri" pitchFamily="34" charset="-122"/>
                 <a:cs typeface="Calibri" pitchFamily="34" charset="-120"/>
               </a:rPr>
-              <a:t>MARKET</a:t>
+              <a:t>PRODUCT ROADMAP</a:t>
             </a:r>
             <a:endParaRPr lang="en-US" sz="1300" dirty="0"/>
           </a:p>
@@ -5939,7 +6948,7 @@
                 <a:ea typeface="Cambria" pitchFamily="34" charset="-122"/>
                 <a:cs typeface="Cambria" pitchFamily="34" charset="-120"/>
               </a:rPr>
-              <a:t>Riding Malaysia's EdTech growth curve</a:t>
+              <a:t>Introducing Pluto — an AI science orchestrator</a:t>
             </a:r>
             <a:endParaRPr lang="en-US" sz="3200" dirty="0"/>
           </a:p>
@@ -5953,12 +6962,120 @@
         </p:nvSpPr>
         <p:spPr>
           <a:xfrm>
-            <a:off x="548640" y="1828800"/>
-            <a:ext cx="3520440" cy="1417320"/>
+            <a:off x="566928" y="1481328"/>
+            <a:ext cx="2880360" cy="365760"/>
           </a:xfrm>
           <a:prstGeom prst="roundRect">
             <a:avLst>
-              <a:gd name="adj" fmla="val 7742"/>
+              <a:gd name="adj" fmla="val 50000"/>
+            </a:avLst>
+          </a:prstGeom>
+          <a:solidFill>
+            <a:srgbClr val="241B00"/>
+          </a:solidFill>
+          <a:ln w="12700">
+            <a:solidFill>
+              <a:srgbClr val="FFD76B"/>
+            </a:solidFill>
+            <a:prstDash val="solid"/>
+          </a:ln>
+        </p:spPr>
+      </p:sp>
+      <p:sp>
+        <p:nvSpPr>
+          <p:cNvPr id="5" name="Text 3"/>
+          <p:cNvSpPr/>
+          <p:nvPr/>
+        </p:nvSpPr>
+        <p:spPr>
+          <a:xfrm>
+            <a:off x="566928" y="1481328"/>
+            <a:ext cx="2880360" cy="365760"/>
+          </a:xfrm>
+          <a:prstGeom prst="rect">
+            <a:avLst/>
+          </a:prstGeom>
+          <a:noFill/>
+          <a:ln/>
+        </p:spPr>
+        <p:txBody>
+          <a:bodyPr wrap="square" lIns="0" tIns="0" rIns="0" bIns="0" rtlCol="0" anchor="ctr"/>
+          <a:lstStyle/>
+          <a:p>
+            <a:pPr algn="ctr" indent="0" marL="0">
+              <a:buNone/>
+            </a:pPr>
+            <a:r>
+              <a:rPr lang="en-US" sz="1000" b="1" spc="100" kern="0" dirty="0">
+                <a:solidFill>
+                  <a:srgbClr val="FFD76B"/>
+                </a:solidFill>
+                <a:latin typeface="Calibri" pitchFamily="34" charset="0"/>
+                <a:ea typeface="Calibri" pitchFamily="34" charset="-122"/>
+                <a:cs typeface="Calibri" pitchFamily="34" charset="-120"/>
+              </a:rPr>
+              <a:t>SCOPED — NOT YET BUILT</a:t>
+            </a:r>
+            <a:endParaRPr lang="en-US" sz="1000" dirty="0"/>
+          </a:p>
+        </p:txBody>
+      </p:sp>
+      <p:sp>
+        <p:nvSpPr>
+          <p:cNvPr id="6" name="Text 4"/>
+          <p:cNvSpPr/>
+          <p:nvPr/>
+        </p:nvSpPr>
+        <p:spPr>
+          <a:xfrm>
+            <a:off x="548640" y="1965960"/>
+            <a:ext cx="10607040" cy="685800"/>
+          </a:xfrm>
+          <a:prstGeom prst="rect">
+            <a:avLst/>
+          </a:prstGeom>
+          <a:noFill/>
+          <a:ln/>
+        </p:spPr>
+        <p:txBody>
+          <a:bodyPr wrap="square" lIns="0" tIns="0" rIns="0" bIns="0" rtlCol="0" anchor="ctr"/>
+          <a:lstStyle/>
+          <a:p>
+            <a:pPr indent="0" marL="0">
+              <a:lnSpc>
+                <a:spcPct val="130000"/>
+              </a:lnSpc>
+              <a:buNone/>
+            </a:pPr>
+            <a:r>
+              <a:rPr lang="en-US" sz="1300" dirty="0">
+                <a:solidFill>
+                  <a:srgbClr val="9AA2BD"/>
+                </a:solidFill>
+                <a:latin typeface="Calibri" pitchFamily="34" charset="0"/>
+                <a:ea typeface="Calibri" pitchFamily="34" charset="-122"/>
+                <a:cs typeface="Calibri" pitchFamily="34" charset="-120"/>
+              </a:rPr>
+              <a:t>Named for the demoted planet. Pluto is an AI layer on top of Sandchemy's own already-sourced science — not an open-web crawl — that adjusts explanation depth for students, teachers, and professors, and shows its sources rather than asserting blanket truth.</a:t>
+            </a:r>
+            <a:endParaRPr lang="en-US" sz="1300" dirty="0"/>
+          </a:p>
+        </p:txBody>
+      </p:sp>
+      <p:sp>
+        <p:nvSpPr>
+          <p:cNvPr id="7" name="Shape 5"/>
+          <p:cNvSpPr/>
+          <p:nvPr/>
+        </p:nvSpPr>
+        <p:spPr>
+          <a:xfrm>
+            <a:off x="548640" y="2880360"/>
+            <a:ext cx="3611880" cy="2880360"/>
+          </a:xfrm>
+          <a:prstGeom prst="roundRect">
+            <a:avLst>
+              <a:gd name="adj" fmla="val 3810"/>
             </a:avLst>
           </a:prstGeom>
           <a:solidFill>
@@ -5981,65 +7098,117 @@
       </p:sp>
       <p:sp>
         <p:nvSpPr>
-          <p:cNvPr id="5" name="Text 3"/>
-          <p:cNvSpPr/>
-          <p:nvPr/>
-        </p:nvSpPr>
-        <p:spPr>
-          <a:xfrm>
-            <a:off x="548640" y="1965960"/>
-            <a:ext cx="3520440" cy="685800"/>
-          </a:xfrm>
-          <a:prstGeom prst="rect">
-            <a:avLst/>
-          </a:prstGeom>
-          <a:noFill/>
-          <a:ln/>
-        </p:spPr>
-        <p:txBody>
-          <a:bodyPr wrap="square" lIns="0" tIns="0" rIns="0" bIns="0" rtlCol="0" anchor="ctr"/>
-          <a:lstStyle/>
-          <a:p>
-            <a:pPr algn="ctr" indent="0" marL="0">
-              <a:buNone/>
-            </a:pPr>
-            <a:r>
-              <a:rPr lang="en-US" sz="3200" b="1" dirty="0">
-                <a:solidFill>
-                  <a:srgbClr val="FFD76B"/>
-                </a:solidFill>
-                <a:latin typeface="Cambria" pitchFamily="34" charset="0"/>
-                <a:ea typeface="Cambria" pitchFamily="34" charset="-122"/>
-                <a:cs typeface="Cambria" pitchFamily="34" charset="-120"/>
-              </a:rPr>
-              <a:t>USD 1.05B</a:t>
-            </a:r>
-            <a:endParaRPr lang="en-US" sz="3200" dirty="0"/>
-          </a:p>
-        </p:txBody>
-      </p:sp>
-      <p:sp>
-        <p:nvSpPr>
-          <p:cNvPr id="6" name="Text 4"/>
-          <p:cNvSpPr/>
-          <p:nvPr/>
-        </p:nvSpPr>
-        <p:spPr>
-          <a:xfrm>
-            <a:off x="731520" y="2651760"/>
-            <a:ext cx="3154680" cy="502920"/>
-          </a:xfrm>
-          <a:prstGeom prst="rect">
-            <a:avLst/>
-          </a:prstGeom>
-          <a:noFill/>
-          <a:ln/>
-        </p:spPr>
-        <p:txBody>
-          <a:bodyPr wrap="square" lIns="0" tIns="0" rIns="0" bIns="0" rtlCol="0" anchor="ctr"/>
-          <a:lstStyle/>
-          <a:p>
-            <a:pPr algn="ctr" indent="0" marL="0">
+          <p:cNvPr id="8" name="Shape 6"/>
+          <p:cNvSpPr/>
+          <p:nvPr/>
+        </p:nvSpPr>
+        <p:spPr>
+          <a:xfrm>
+            <a:off x="822960" y="3154680"/>
+            <a:ext cx="640080" cy="640080"/>
+          </a:xfrm>
+          <a:prstGeom prst="ellipse">
+            <a:avLst/>
+          </a:prstGeom>
+          <a:solidFill>
+            <a:srgbClr val="14172A"/>
+          </a:solidFill>
+          <a:ln w="12700">
+            <a:solidFill>
+              <a:srgbClr val="2C3252"/>
+            </a:solidFill>
+            <a:prstDash val="solid"/>
+          </a:ln>
+        </p:spPr>
+      </p:sp>
+      <p:pic>
+        <p:nvPicPr>
+          <p:cNvPr id="9" name="Image 0" descr="preencoded.png">    </p:cNvPr>
+          <p:cNvPicPr>
+            <a:picLocks noChangeAspect="1"/>
+          </p:cNvPicPr>
+          <p:nvPr/>
+        </p:nvPicPr>
+        <p:blipFill>
+          <a:blip r:embed="rId1"/>
+          <a:stretch>
+            <a:fillRect/>
+          </a:stretch>
+        </p:blipFill>
+        <p:spPr>
+          <a:xfrm>
+            <a:off x="912571" y="3244291"/>
+            <a:ext cx="460858" cy="460858"/>
+          </a:xfrm>
+          <a:prstGeom prst="rect">
+            <a:avLst/>
+          </a:prstGeom>
+        </p:spPr>
+      </p:pic>
+      <p:sp>
+        <p:nvSpPr>
+          <p:cNvPr id="10" name="Text 7"/>
+          <p:cNvSpPr/>
+          <p:nvPr/>
+        </p:nvSpPr>
+        <p:spPr>
+          <a:xfrm>
+            <a:off x="822960" y="3886200"/>
+            <a:ext cx="3063240" cy="411480"/>
+          </a:xfrm>
+          <a:prstGeom prst="rect">
+            <a:avLst/>
+          </a:prstGeom>
+          <a:noFill/>
+          <a:ln/>
+        </p:spPr>
+        <p:txBody>
+          <a:bodyPr wrap="square" lIns="0" tIns="0" rIns="0" bIns="0" rtlCol="0" anchor="ctr"/>
+          <a:lstStyle/>
+          <a:p>
+            <a:pPr indent="0" marL="0">
+              <a:buNone/>
+            </a:pPr>
+            <a:r>
+              <a:rPr lang="en-US" sz="1500" b="1" dirty="0">
+                <a:solidFill>
+                  <a:srgbClr val="FFFFFF"/>
+                </a:solidFill>
+                <a:latin typeface="Calibri" pitchFamily="34" charset="0"/>
+                <a:ea typeface="Calibri" pitchFamily="34" charset="-122"/>
+                <a:cs typeface="Calibri" pitchFamily="34" charset="-120"/>
+              </a:rPr>
+              <a:t>9a — Ask Pluto</a:t>
+            </a:r>
+            <a:endParaRPr lang="en-US" sz="1500" dirty="0"/>
+          </a:p>
+        </p:txBody>
+      </p:sp>
+      <p:sp>
+        <p:nvSpPr>
+          <p:cNvPr id="11" name="Text 8"/>
+          <p:cNvSpPr/>
+          <p:nvPr/>
+        </p:nvSpPr>
+        <p:spPr>
+          <a:xfrm>
+            <a:off x="822960" y="4315968"/>
+            <a:ext cx="3063240" cy="960120"/>
+          </a:xfrm>
+          <a:prstGeom prst="rect">
+            <a:avLst/>
+          </a:prstGeom>
+          <a:noFill/>
+          <a:ln/>
+        </p:spPr>
+        <p:txBody>
+          <a:bodyPr wrap="square" lIns="0" tIns="0" rIns="0" bIns="0" rtlCol="0" anchor="ctr"/>
+          <a:lstStyle/>
+          <a:p>
+            <a:pPr indent="0" marL="0">
+              <a:lnSpc>
+                <a:spcPct val="120000"/>
+              </a:lnSpc>
               <a:buNone/>
             </a:pPr>
             <a:r>
@@ -6051,7 +7220,7 @@
                 <a:ea typeface="Calibri" pitchFamily="34" charset="-122"/>
                 <a:cs typeface="Calibri" pitchFamily="34" charset="-120"/>
               </a:rPr>
-              <a:t>Malaysia EdTech market size, 2024</a:t>
+              <a:t>In-app tutor beside the Discovery Journal. Explains a real reaction at the depth you pick — curious explainer, real chemistry, or a teaching point.</a:t>
             </a:r>
             <a:endParaRPr lang="en-US" sz="1100" dirty="0"/>
           </a:p>
@@ -6059,18 +7228,84 @@
       </p:sp>
       <p:sp>
         <p:nvSpPr>
-          <p:cNvPr id="7" name="Shape 5"/>
-          <p:cNvSpPr/>
-          <p:nvPr/>
-        </p:nvSpPr>
-        <p:spPr>
-          <a:xfrm>
-            <a:off x="4297680" y="1828800"/>
-            <a:ext cx="3520440" cy="1417320"/>
+          <p:cNvPr id="12" name="Shape 9"/>
+          <p:cNvSpPr/>
+          <p:nvPr/>
+        </p:nvSpPr>
+        <p:spPr>
+          <a:xfrm>
+            <a:off x="822960" y="5349240"/>
+            <a:ext cx="3063240" cy="384048"/>
           </a:xfrm>
           <a:prstGeom prst="roundRect">
             <a:avLst>
-              <a:gd name="adj" fmla="val 7742"/>
+              <a:gd name="adj" fmla="val 19048"/>
+            </a:avLst>
+          </a:prstGeom>
+          <a:solidFill>
+            <a:srgbClr val="14172A"/>
+          </a:solidFill>
+          <a:ln w="12700">
+            <a:solidFill>
+              <a:srgbClr val="7EE3FF"/>
+            </a:solidFill>
+            <a:prstDash val="solid"/>
+          </a:ln>
+        </p:spPr>
+      </p:sp>
+      <p:sp>
+        <p:nvSpPr>
+          <p:cNvPr id="13" name="Text 10"/>
+          <p:cNvSpPr/>
+          <p:nvPr/>
+        </p:nvSpPr>
+        <p:spPr>
+          <a:xfrm>
+            <a:off x="868680" y="5349240"/>
+            <a:ext cx="2971800" cy="384048"/>
+          </a:xfrm>
+          <a:prstGeom prst="rect">
+            <a:avLst/>
+          </a:prstGeom>
+          <a:noFill/>
+          <a:ln/>
+        </p:spPr>
+        <p:txBody>
+          <a:bodyPr wrap="square" lIns="0" tIns="0" rIns="0" bIns="0" rtlCol="0" anchor="ctr"/>
+          <a:lstStyle/>
+          <a:p>
+            <a:pPr indent="0" marL="0">
+              <a:buNone/>
+            </a:pPr>
+            <a:r>
+              <a:rPr lang="en-US" sz="900" b="1" dirty="0">
+                <a:solidFill>
+                  <a:srgbClr val="7EE3FF"/>
+                </a:solidFill>
+                <a:latin typeface="Calibri" pitchFamily="34" charset="0"/>
+                <a:ea typeface="Calibri" pitchFamily="34" charset="-122"/>
+                <a:cs typeface="Calibri" pitchFamily="34" charset="-120"/>
+              </a:rPr>
+              <a:t>Recommended first build</a:t>
+            </a:r>
+            <a:endParaRPr lang="en-US" sz="900" dirty="0"/>
+          </a:p>
+        </p:txBody>
+      </p:sp>
+      <p:sp>
+        <p:nvSpPr>
+          <p:cNvPr id="14" name="Shape 11"/>
+          <p:cNvSpPr/>
+          <p:nvPr/>
+        </p:nvSpPr>
+        <p:spPr>
+          <a:xfrm>
+            <a:off x="4343400" y="2880360"/>
+            <a:ext cx="3611880" cy="2880360"/>
+          </a:xfrm>
+          <a:prstGeom prst="roundRect">
+            <a:avLst>
+              <a:gd name="adj" fmla="val 3810"/>
             </a:avLst>
           </a:prstGeom>
           <a:solidFill>
@@ -6093,65 +7328,117 @@
       </p:sp>
       <p:sp>
         <p:nvSpPr>
-          <p:cNvPr id="8" name="Text 6"/>
-          <p:cNvSpPr/>
-          <p:nvPr/>
-        </p:nvSpPr>
-        <p:spPr>
-          <a:xfrm>
-            <a:off x="4297680" y="1965960"/>
-            <a:ext cx="3520440" cy="685800"/>
-          </a:xfrm>
-          <a:prstGeom prst="rect">
-            <a:avLst/>
-          </a:prstGeom>
-          <a:noFill/>
-          <a:ln/>
-        </p:spPr>
-        <p:txBody>
-          <a:bodyPr wrap="square" lIns="0" tIns="0" rIns="0" bIns="0" rtlCol="0" anchor="ctr"/>
-          <a:lstStyle/>
-          <a:p>
-            <a:pPr algn="ctr" indent="0" marL="0">
-              <a:buNone/>
-            </a:pPr>
-            <a:r>
-              <a:rPr lang="en-US" sz="3200" b="1" dirty="0">
-                <a:solidFill>
-                  <a:srgbClr val="FFD76B"/>
-                </a:solidFill>
-                <a:latin typeface="Cambria" pitchFamily="34" charset="0"/>
-                <a:ea typeface="Cambria" pitchFamily="34" charset="-122"/>
-                <a:cs typeface="Cambria" pitchFamily="34" charset="-120"/>
-              </a:rPr>
-              <a:t>USD 2.88B</a:t>
-            </a:r>
-            <a:endParaRPr lang="en-US" sz="3200" dirty="0"/>
-          </a:p>
-        </p:txBody>
-      </p:sp>
-      <p:sp>
-        <p:nvSpPr>
-          <p:cNvPr id="9" name="Text 7"/>
-          <p:cNvSpPr/>
-          <p:nvPr/>
-        </p:nvSpPr>
-        <p:spPr>
-          <a:xfrm>
-            <a:off x="4480560" y="2651760"/>
-            <a:ext cx="3154680" cy="502920"/>
-          </a:xfrm>
-          <a:prstGeom prst="rect">
-            <a:avLst/>
-          </a:prstGeom>
-          <a:noFill/>
-          <a:ln/>
-        </p:spPr>
-        <p:txBody>
-          <a:bodyPr wrap="square" lIns="0" tIns="0" rIns="0" bIns="0" rtlCol="0" anchor="ctr"/>
-          <a:lstStyle/>
-          <a:p>
-            <a:pPr algn="ctr" indent="0" marL="0">
+          <p:cNvPr id="15" name="Shape 12"/>
+          <p:cNvSpPr/>
+          <p:nvPr/>
+        </p:nvSpPr>
+        <p:spPr>
+          <a:xfrm>
+            <a:off x="4617720" y="3154680"/>
+            <a:ext cx="640080" cy="640080"/>
+          </a:xfrm>
+          <a:prstGeom prst="ellipse">
+            <a:avLst/>
+          </a:prstGeom>
+          <a:solidFill>
+            <a:srgbClr val="14172A"/>
+          </a:solidFill>
+          <a:ln w="12700">
+            <a:solidFill>
+              <a:srgbClr val="2C3252"/>
+            </a:solidFill>
+            <a:prstDash val="solid"/>
+          </a:ln>
+        </p:spPr>
+      </p:sp>
+      <p:pic>
+        <p:nvPicPr>
+          <p:cNvPr id="16" name="Image 1" descr="preencoded.png">    </p:cNvPr>
+          <p:cNvPicPr>
+            <a:picLocks noChangeAspect="1"/>
+          </p:cNvPicPr>
+          <p:nvPr/>
+        </p:nvPicPr>
+        <p:blipFill>
+          <a:blip r:embed="rId2"/>
+          <a:stretch>
+            <a:fillRect/>
+          </a:stretch>
+        </p:blipFill>
+        <p:spPr>
+          <a:xfrm>
+            <a:off x="4707331" y="3244291"/>
+            <a:ext cx="460858" cy="460858"/>
+          </a:xfrm>
+          <a:prstGeom prst="rect">
+            <a:avLst/>
+          </a:prstGeom>
+        </p:spPr>
+      </p:pic>
+      <p:sp>
+        <p:nvSpPr>
+          <p:cNvPr id="17" name="Text 13"/>
+          <p:cNvSpPr/>
+          <p:nvPr/>
+        </p:nvSpPr>
+        <p:spPr>
+          <a:xfrm>
+            <a:off x="4617720" y="3886200"/>
+            <a:ext cx="3063240" cy="411480"/>
+          </a:xfrm>
+          <a:prstGeom prst="rect">
+            <a:avLst/>
+          </a:prstGeom>
+          <a:noFill/>
+          <a:ln/>
+        </p:spPr>
+        <p:txBody>
+          <a:bodyPr wrap="square" lIns="0" tIns="0" rIns="0" bIns="0" rtlCol="0" anchor="ctr"/>
+          <a:lstStyle/>
+          <a:p>
+            <a:pPr indent="0" marL="0">
+              <a:buNone/>
+            </a:pPr>
+            <a:r>
+              <a:rPr lang="en-US" sz="1500" b="1" dirty="0">
+                <a:solidFill>
+                  <a:srgbClr val="FFFFFF"/>
+                </a:solidFill>
+                <a:latin typeface="Calibri" pitchFamily="34" charset="0"/>
+                <a:ea typeface="Calibri" pitchFamily="34" charset="-122"/>
+                <a:cs typeface="Calibri" pitchFamily="34" charset="-120"/>
+              </a:rPr>
+              <a:t>9b — Authoring Copilot</a:t>
+            </a:r>
+            <a:endParaRPr lang="en-US" sz="1500" dirty="0"/>
+          </a:p>
+        </p:txBody>
+      </p:sp>
+      <p:sp>
+        <p:nvSpPr>
+          <p:cNvPr id="18" name="Text 14"/>
+          <p:cNvSpPr/>
+          <p:nvPr/>
+        </p:nvSpPr>
+        <p:spPr>
+          <a:xfrm>
+            <a:off x="4617720" y="4315968"/>
+            <a:ext cx="3063240" cy="960120"/>
+          </a:xfrm>
+          <a:prstGeom prst="rect">
+            <a:avLst/>
+          </a:prstGeom>
+          <a:noFill/>
+          <a:ln/>
+        </p:spPr>
+        <p:txBody>
+          <a:bodyPr wrap="square" lIns="0" tIns="0" rIns="0" bIns="0" rtlCol="0" anchor="ctr"/>
+          <a:lstStyle/>
+          <a:p>
+            <a:pPr indent="0" marL="0">
+              <a:lnSpc>
+                <a:spcPct val="120000"/>
+              </a:lnSpc>
               <a:buNone/>
             </a:pPr>
             <a:r>
@@ -6163,7 +7450,7 @@
                 <a:ea typeface="Calibri" pitchFamily="34" charset="-122"/>
                 <a:cs typeface="Calibri" pitchFamily="34" charset="-120"/>
               </a:rPr>
-              <a:t>Projected size by 2033 (~11.8% CAGR)</a:t>
+              <a:t>Drafts a new element's real data and citations for founder verification before it ships — speeds up the existing weekly content pipeline.</a:t>
             </a:r>
             <a:endParaRPr lang="en-US" sz="1100" dirty="0"/>
           </a:p>
@@ -6171,18 +7458,84 @@
       </p:sp>
       <p:sp>
         <p:nvSpPr>
-          <p:cNvPr id="10" name="Shape 8"/>
-          <p:cNvSpPr/>
-          <p:nvPr/>
-        </p:nvSpPr>
-        <p:spPr>
-          <a:xfrm>
-            <a:off x="8046720" y="1828800"/>
-            <a:ext cx="3520440" cy="1417320"/>
+          <p:cNvPr id="19" name="Shape 15"/>
+          <p:cNvSpPr/>
+          <p:nvPr/>
+        </p:nvSpPr>
+        <p:spPr>
+          <a:xfrm>
+            <a:off x="4617720" y="5349240"/>
+            <a:ext cx="3063240" cy="384048"/>
           </a:xfrm>
           <a:prstGeom prst="roundRect">
             <a:avLst>
-              <a:gd name="adj" fmla="val 7742"/>
+              <a:gd name="adj" fmla="val 19048"/>
+            </a:avLst>
+          </a:prstGeom>
+          <a:solidFill>
+            <a:srgbClr val="14172A"/>
+          </a:solidFill>
+          <a:ln w="12700">
+            <a:solidFill>
+              <a:srgbClr val="7EE3FF"/>
+            </a:solidFill>
+            <a:prstDash val="solid"/>
+          </a:ln>
+        </p:spPr>
+      </p:sp>
+      <p:sp>
+        <p:nvSpPr>
+          <p:cNvPr id="20" name="Text 16"/>
+          <p:cNvSpPr/>
+          <p:nvPr/>
+        </p:nvSpPr>
+        <p:spPr>
+          <a:xfrm>
+            <a:off x="4663440" y="5349240"/>
+            <a:ext cx="2971800" cy="384048"/>
+          </a:xfrm>
+          <a:prstGeom prst="rect">
+            <a:avLst/>
+          </a:prstGeom>
+          <a:noFill/>
+          <a:ln/>
+        </p:spPr>
+        <p:txBody>
+          <a:bodyPr wrap="square" lIns="0" tIns="0" rIns="0" bIns="0" rtlCol="0" anchor="ctr"/>
+          <a:lstStyle/>
+          <a:p>
+            <a:pPr indent="0" marL="0">
+              <a:buNone/>
+            </a:pPr>
+            <a:r>
+              <a:rPr lang="en-US" sz="900" b="1" dirty="0">
+                <a:solidFill>
+                  <a:srgbClr val="7EE3FF"/>
+                </a:solidFill>
+                <a:latin typeface="Calibri" pitchFamily="34" charset="0"/>
+                <a:ea typeface="Calibri" pitchFamily="34" charset="-122"/>
+                <a:cs typeface="Calibri" pitchFamily="34" charset="-120"/>
+              </a:rPr>
+              <a:t>Internal tool, dev-only</a:t>
+            </a:r>
+            <a:endParaRPr lang="en-US" sz="900" dirty="0"/>
+          </a:p>
+        </p:txBody>
+      </p:sp>
+      <p:sp>
+        <p:nvSpPr>
+          <p:cNvPr id="21" name="Shape 17"/>
+          <p:cNvSpPr/>
+          <p:nvPr/>
+        </p:nvSpPr>
+        <p:spPr>
+          <a:xfrm>
+            <a:off x="8138160" y="2880360"/>
+            <a:ext cx="3611880" cy="2880360"/>
+          </a:xfrm>
+          <a:prstGeom prst="roundRect">
+            <a:avLst>
+              <a:gd name="adj" fmla="val 3810"/>
             </a:avLst>
           </a:prstGeom>
           <a:solidFill>
@@ -6205,65 +7558,117 @@
       </p:sp>
       <p:sp>
         <p:nvSpPr>
-          <p:cNvPr id="11" name="Text 9"/>
-          <p:cNvSpPr/>
-          <p:nvPr/>
-        </p:nvSpPr>
-        <p:spPr>
-          <a:xfrm>
-            <a:off x="8046720" y="1965960"/>
-            <a:ext cx="3520440" cy="685800"/>
-          </a:xfrm>
-          <a:prstGeom prst="rect">
-            <a:avLst/>
-          </a:prstGeom>
-          <a:noFill/>
-          <a:ln/>
-        </p:spPr>
-        <p:txBody>
-          <a:bodyPr wrap="square" lIns="0" tIns="0" rIns="0" bIns="0" rtlCol="0" anchor="ctr"/>
-          <a:lstStyle/>
-          <a:p>
-            <a:pPr algn="ctr" indent="0" marL="0">
-              <a:buNone/>
-            </a:pPr>
-            <a:r>
-              <a:rPr lang="en-US" sz="3200" b="1" dirty="0">
-                <a:solidFill>
-                  <a:srgbClr val="FFD76B"/>
-                </a:solidFill>
-                <a:latin typeface="Cambria" pitchFamily="34" charset="0"/>
-                <a:ea typeface="Cambria" pitchFamily="34" charset="-122"/>
-                <a:cs typeface="Cambria" pitchFamily="34" charset="-120"/>
-              </a:rPr>
-              <a:t>44.6%</a:t>
-            </a:r>
-            <a:endParaRPr lang="en-US" sz="3200" dirty="0"/>
-          </a:p>
-        </p:txBody>
-      </p:sp>
-      <p:sp>
-        <p:nvSpPr>
-          <p:cNvPr id="12" name="Text 10"/>
-          <p:cNvSpPr/>
-          <p:nvPr/>
-        </p:nvSpPr>
-        <p:spPr>
-          <a:xfrm>
-            <a:off x="8229600" y="2651760"/>
-            <a:ext cx="3154680" cy="502920"/>
-          </a:xfrm>
-          <a:prstGeom prst="rect">
-            <a:avLst/>
-          </a:prstGeom>
-          <a:noFill/>
-          <a:ln/>
-        </p:spPr>
-        <p:txBody>
-          <a:bodyPr wrap="square" lIns="0" tIns="0" rIns="0" bIns="0" rtlCol="0" anchor="ctr"/>
-          <a:lstStyle/>
-          <a:p>
-            <a:pPr algn="ctr" indent="0" marL="0">
+          <p:cNvPr id="22" name="Shape 18"/>
+          <p:cNvSpPr/>
+          <p:nvPr/>
+        </p:nvSpPr>
+        <p:spPr>
+          <a:xfrm>
+            <a:off x="8412480" y="3154680"/>
+            <a:ext cx="640080" cy="640080"/>
+          </a:xfrm>
+          <a:prstGeom prst="ellipse">
+            <a:avLst/>
+          </a:prstGeom>
+          <a:solidFill>
+            <a:srgbClr val="14172A"/>
+          </a:solidFill>
+          <a:ln w="12700">
+            <a:solidFill>
+              <a:srgbClr val="2C3252"/>
+            </a:solidFill>
+            <a:prstDash val="solid"/>
+          </a:ln>
+        </p:spPr>
+      </p:sp>
+      <p:pic>
+        <p:nvPicPr>
+          <p:cNvPr id="23" name="Image 2" descr="preencoded.png">    </p:cNvPr>
+          <p:cNvPicPr>
+            <a:picLocks noChangeAspect="1"/>
+          </p:cNvPicPr>
+          <p:nvPr/>
+        </p:nvPicPr>
+        <p:blipFill>
+          <a:blip r:embed="rId3"/>
+          <a:stretch>
+            <a:fillRect/>
+          </a:stretch>
+        </p:blipFill>
+        <p:spPr>
+          <a:xfrm>
+            <a:off x="8502091" y="3244291"/>
+            <a:ext cx="460858" cy="460858"/>
+          </a:xfrm>
+          <a:prstGeom prst="rect">
+            <a:avLst/>
+          </a:prstGeom>
+        </p:spPr>
+      </p:pic>
+      <p:sp>
+        <p:nvSpPr>
+          <p:cNvPr id="24" name="Text 19"/>
+          <p:cNvSpPr/>
+          <p:nvPr/>
+        </p:nvSpPr>
+        <p:spPr>
+          <a:xfrm>
+            <a:off x="8412480" y="3886200"/>
+            <a:ext cx="3063240" cy="411480"/>
+          </a:xfrm>
+          <a:prstGeom prst="rect">
+            <a:avLst/>
+          </a:prstGeom>
+          <a:noFill/>
+          <a:ln/>
+        </p:spPr>
+        <p:txBody>
+          <a:bodyPr wrap="square" lIns="0" tIns="0" rIns="0" bIns="0" rtlCol="0" anchor="ctr"/>
+          <a:lstStyle/>
+          <a:p>
+            <a:pPr indent="0" marL="0">
+              <a:buNone/>
+            </a:pPr>
+            <a:r>
+              <a:rPr lang="en-US" sz="1500" b="1" dirty="0">
+                <a:solidFill>
+                  <a:srgbClr val="FFFFFF"/>
+                </a:solidFill>
+                <a:latin typeface="Calibri" pitchFamily="34" charset="0"/>
+                <a:ea typeface="Calibri" pitchFamily="34" charset="-122"/>
+                <a:cs typeface="Calibri" pitchFamily="34" charset="-120"/>
+              </a:rPr>
+              <a:t>9c — Teacher Generator</a:t>
+            </a:r>
+            <a:endParaRPr lang="en-US" sz="1500" dirty="0"/>
+          </a:p>
+        </p:txBody>
+      </p:sp>
+      <p:sp>
+        <p:nvSpPr>
+          <p:cNvPr id="25" name="Text 20"/>
+          <p:cNvSpPr/>
+          <p:nvPr/>
+        </p:nvSpPr>
+        <p:spPr>
+          <a:xfrm>
+            <a:off x="8412480" y="4315968"/>
+            <a:ext cx="3063240" cy="960120"/>
+          </a:xfrm>
+          <a:prstGeom prst="rect">
+            <a:avLst/>
+          </a:prstGeom>
+          <a:noFill/>
+          <a:ln/>
+        </p:spPr>
+        <p:txBody>
+          <a:bodyPr wrap="square" lIns="0" tIns="0" rIns="0" bIns="0" rtlCol="0" anchor="ctr"/>
+          <a:lstStyle/>
+          <a:p>
+            <a:pPr indent="0" marL="0">
+              <a:lnSpc>
+                <a:spcPct val="120000"/>
+              </a:lnSpc>
               <a:buNone/>
             </a:pPr>
             <a:r>
@@ -6275,7 +7680,7 @@
                 <a:ea typeface="Calibri" pitchFamily="34" charset="-122"/>
                 <a:cs typeface="Calibri" pitchFamily="34" charset="-120"/>
               </a:rPr>
-              <a:t>Share held by higher education alone</a:t>
+              <a:t>Drafts lesson plans and quiz questions grounded in mechanics that actually exist in the sandbox, for the teacher/professor audience.</a:t>
             </a:r>
             <a:endParaRPr lang="en-US" sz="1100" dirty="0"/>
           </a:p>
@@ -6283,30 +7688,99 @@
       </p:sp>
       <p:sp>
         <p:nvSpPr>
-          <p:cNvPr id="13" name="Text 11"/>
-          <p:cNvSpPr/>
-          <p:nvPr/>
-        </p:nvSpPr>
-        <p:spPr>
-          <a:xfrm>
-            <a:off x="548640" y="3337560"/>
-            <a:ext cx="7315200" cy="320040"/>
-          </a:xfrm>
-          <a:prstGeom prst="rect">
-            <a:avLst/>
-          </a:prstGeom>
-          <a:noFill/>
-          <a:ln/>
-        </p:spPr>
-        <p:txBody>
-          <a:bodyPr wrap="square" lIns="0" tIns="0" rIns="0" bIns="0" rtlCol="0" anchor="ctr"/>
-          <a:lstStyle/>
-          <a:p>
-            <a:pPr indent="0" marL="0">
-              <a:buNone/>
-            </a:pPr>
-            <a:r>
-              <a:rPr lang="en-US" sz="900" i="1" dirty="0">
+          <p:cNvPr id="26" name="Shape 21"/>
+          <p:cNvSpPr/>
+          <p:nvPr/>
+        </p:nvSpPr>
+        <p:spPr>
+          <a:xfrm>
+            <a:off x="8412480" y="5349240"/>
+            <a:ext cx="3063240" cy="384048"/>
+          </a:xfrm>
+          <a:prstGeom prst="roundRect">
+            <a:avLst>
+              <a:gd name="adj" fmla="val 19048"/>
+            </a:avLst>
+          </a:prstGeom>
+          <a:solidFill>
+            <a:srgbClr val="14172A"/>
+          </a:solidFill>
+          <a:ln w="12700">
+            <a:solidFill>
+              <a:srgbClr val="7EE3FF"/>
+            </a:solidFill>
+            <a:prstDash val="solid"/>
+          </a:ln>
+        </p:spPr>
+      </p:sp>
+      <p:sp>
+        <p:nvSpPr>
+          <p:cNvPr id="27" name="Text 22"/>
+          <p:cNvSpPr/>
+          <p:nvPr/>
+        </p:nvSpPr>
+        <p:spPr>
+          <a:xfrm>
+            <a:off x="8458200" y="5349240"/>
+            <a:ext cx="2971800" cy="384048"/>
+          </a:xfrm>
+          <a:prstGeom prst="rect">
+            <a:avLst/>
+          </a:prstGeom>
+          <a:noFill/>
+          <a:ln/>
+        </p:spPr>
+        <p:txBody>
+          <a:bodyPr wrap="square" lIns="0" tIns="0" rIns="0" bIns="0" rtlCol="0" anchor="ctr"/>
+          <a:lstStyle/>
+          <a:p>
+            <a:pPr indent="0" marL="0">
+              <a:buNone/>
+            </a:pPr>
+            <a:r>
+              <a:rPr lang="en-US" sz="900" b="1" dirty="0">
+                <a:solidFill>
+                  <a:srgbClr val="7EE3FF"/>
+                </a:solidFill>
+                <a:latin typeface="Calibri" pitchFamily="34" charset="0"/>
+                <a:ea typeface="Calibri" pitchFamily="34" charset="-122"/>
+                <a:cs typeface="Calibri" pitchFamily="34" charset="-120"/>
+              </a:rPr>
+              <a:t>Depends on 9a shipping first</a:t>
+            </a:r>
+            <a:endParaRPr lang="en-US" sz="900" dirty="0"/>
+          </a:p>
+        </p:txBody>
+      </p:sp>
+      <p:sp>
+        <p:nvSpPr>
+          <p:cNvPr id="28" name="Text 23"/>
+          <p:cNvSpPr/>
+          <p:nvPr/>
+        </p:nvSpPr>
+        <p:spPr>
+          <a:xfrm>
+            <a:off x="548640" y="5989320"/>
+            <a:ext cx="10881360" cy="411480"/>
+          </a:xfrm>
+          <a:prstGeom prst="rect">
+            <a:avLst/>
+          </a:prstGeom>
+          <a:noFill/>
+          <a:ln/>
+        </p:spPr>
+        <p:txBody>
+          <a:bodyPr wrap="square" lIns="0" tIns="0" rIns="0" bIns="0" rtlCol="0" anchor="ctr"/>
+          <a:lstStyle/>
+          <a:p>
+            <a:pPr indent="0" marL="0">
+              <a:lnSpc>
+                <a:spcPct val="120000"/>
+              </a:lnSpc>
+              <a:buNone/>
+            </a:pPr>
+            <a:r>
+              <a:rPr lang="en-US" sz="1050" i="1" dirty="0">
                 <a:solidFill>
                   <a:srgbClr val="9AA2BD"/>
                 </a:solidFill>
@@ -6314,288 +7788,15 @@
                 <a:ea typeface="Calibri" pitchFamily="34" charset="-122"/>
                 <a:cs typeface="Calibri" pitchFamily="34" charset="-120"/>
               </a:rPr>
-              <a:t>Source: IMARC Group, Malaysia EdTech Market Report</a:t>
-            </a:r>
-            <a:endParaRPr lang="en-US" sz="900" dirty="0"/>
-          </a:p>
-        </p:txBody>
-      </p:sp>
-      <p:sp>
-        <p:nvSpPr>
-          <p:cNvPr id="14" name="Text 12"/>
-          <p:cNvSpPr/>
-          <p:nvPr/>
-        </p:nvSpPr>
-        <p:spPr>
-          <a:xfrm>
-            <a:off x="548640" y="3886200"/>
-            <a:ext cx="7315200" cy="365760"/>
-          </a:xfrm>
-          <a:prstGeom prst="rect">
-            <a:avLst/>
-          </a:prstGeom>
-          <a:noFill/>
-          <a:ln/>
-        </p:spPr>
-        <p:txBody>
-          <a:bodyPr wrap="square" lIns="0" tIns="0" rIns="0" bIns="0" rtlCol="0" anchor="ctr"/>
-          <a:lstStyle/>
-          <a:p>
-            <a:pPr indent="0" marL="0">
-              <a:buNone/>
-            </a:pPr>
-            <a:r>
-              <a:rPr lang="en-US" sz="1500" b="1" dirty="0">
-                <a:solidFill>
-                  <a:srgbClr val="FFFFFF"/>
-                </a:solidFill>
-                <a:latin typeface="Calibri" pitchFamily="34" charset="0"/>
-                <a:ea typeface="Calibri" pitchFamily="34" charset="-122"/>
-                <a:cs typeface="Calibri" pitchFamily="34" charset="-120"/>
-              </a:rPr>
-              <a:t>Why Sandchemy fits this moment:</a:t>
-            </a:r>
-            <a:endParaRPr lang="en-US" sz="1500" dirty="0"/>
-          </a:p>
-        </p:txBody>
-      </p:sp>
-      <p:sp>
-        <p:nvSpPr>
-          <p:cNvPr id="15" name="Text 13"/>
-          <p:cNvSpPr/>
-          <p:nvPr/>
-        </p:nvSpPr>
-        <p:spPr>
-          <a:xfrm>
-            <a:off x="548640" y="4343400"/>
-            <a:ext cx="320040" cy="457200"/>
-          </a:xfrm>
-          <a:prstGeom prst="rect">
-            <a:avLst/>
-          </a:prstGeom>
-          <a:noFill/>
-          <a:ln/>
-        </p:spPr>
-        <p:txBody>
-          <a:bodyPr wrap="square" lIns="0" tIns="0" rIns="0" bIns="0" rtlCol="0" anchor="ctr"/>
-          <a:lstStyle/>
-          <a:p>
-            <a:pPr indent="0" marL="0">
-              <a:buNone/>
-            </a:pPr>
-            <a:r>
-              <a:rPr lang="en-US" sz="1300" b="1" dirty="0">
-                <a:solidFill>
-                  <a:srgbClr val="7EE3FF"/>
-                </a:solidFill>
-              </a:rPr>
-              <a:t>→</a:t>
-            </a:r>
-            <a:endParaRPr lang="en-US" sz="1300" dirty="0"/>
-          </a:p>
-        </p:txBody>
-      </p:sp>
-      <p:sp>
-        <p:nvSpPr>
-          <p:cNvPr id="16" name="Text 14"/>
-          <p:cNvSpPr/>
-          <p:nvPr/>
-        </p:nvSpPr>
-        <p:spPr>
-          <a:xfrm>
-            <a:off x="896112" y="4343400"/>
-            <a:ext cx="10515600" cy="502920"/>
-          </a:xfrm>
-          <a:prstGeom prst="rect">
-            <a:avLst/>
-          </a:prstGeom>
-          <a:noFill/>
-          <a:ln/>
-        </p:spPr>
-        <p:txBody>
-          <a:bodyPr wrap="square" lIns="0" tIns="0" rIns="0" bIns="0" rtlCol="0" anchor="ctr"/>
-          <a:lstStyle/>
-          <a:p>
-            <a:pPr indent="0" marL="0">
-              <a:lnSpc>
-                <a:spcPct val="115000"/>
-              </a:lnSpc>
-              <a:buNone/>
-            </a:pPr>
-            <a:r>
-              <a:rPr lang="en-US" sz="1250" dirty="0">
-                <a:solidFill>
-                  <a:srgbClr val="F2F2F2"/>
-                </a:solidFill>
-                <a:latin typeface="Calibri" pitchFamily="34" charset="0"/>
-                <a:ea typeface="Calibri" pitchFamily="34" charset="-122"/>
-                <a:cs typeface="Calibri" pitchFamily="34" charset="-120"/>
-              </a:rPr>
-              <a:t>Government STEM push + rising gamified/digital-classroom adoption are both named growth drivers of this market</a:t>
-            </a:r>
-            <a:endParaRPr lang="en-US" sz="1250" dirty="0"/>
-          </a:p>
-        </p:txBody>
-      </p:sp>
-      <p:sp>
-        <p:nvSpPr>
-          <p:cNvPr id="17" name="Text 15"/>
-          <p:cNvSpPr/>
-          <p:nvPr/>
-        </p:nvSpPr>
-        <p:spPr>
-          <a:xfrm>
-            <a:off x="548640" y="4910328"/>
-            <a:ext cx="320040" cy="457200"/>
-          </a:xfrm>
-          <a:prstGeom prst="rect">
-            <a:avLst/>
-          </a:prstGeom>
-          <a:noFill/>
-          <a:ln/>
-        </p:spPr>
-        <p:txBody>
-          <a:bodyPr wrap="square" lIns="0" tIns="0" rIns="0" bIns="0" rtlCol="0" anchor="ctr"/>
-          <a:lstStyle/>
-          <a:p>
-            <a:pPr indent="0" marL="0">
-              <a:buNone/>
-            </a:pPr>
-            <a:r>
-              <a:rPr lang="en-US" sz="1300" b="1" dirty="0">
-                <a:solidFill>
-                  <a:srgbClr val="7EE3FF"/>
-                </a:solidFill>
-              </a:rPr>
-              <a:t>→</a:t>
-            </a:r>
-            <a:endParaRPr lang="en-US" sz="1300" dirty="0"/>
-          </a:p>
-        </p:txBody>
-      </p:sp>
-      <p:sp>
-        <p:nvSpPr>
-          <p:cNvPr id="18" name="Text 16"/>
-          <p:cNvSpPr/>
-          <p:nvPr/>
-        </p:nvSpPr>
-        <p:spPr>
-          <a:xfrm>
-            <a:off x="896112" y="4910328"/>
-            <a:ext cx="10515600" cy="502920"/>
-          </a:xfrm>
-          <a:prstGeom prst="rect">
-            <a:avLst/>
-          </a:prstGeom>
-          <a:noFill/>
-          <a:ln/>
-        </p:spPr>
-        <p:txBody>
-          <a:bodyPr wrap="square" lIns="0" tIns="0" rIns="0" bIns="0" rtlCol="0" anchor="ctr"/>
-          <a:lstStyle/>
-          <a:p>
-            <a:pPr indent="0" marL="0">
-              <a:lnSpc>
-                <a:spcPct val="115000"/>
-              </a:lnSpc>
-              <a:buNone/>
-            </a:pPr>
-            <a:r>
-              <a:rPr lang="en-US" sz="1250" dirty="0">
-                <a:solidFill>
-                  <a:srgbClr val="F2F2F2"/>
-                </a:solidFill>
-                <a:latin typeface="Calibri" pitchFamily="34" charset="0"/>
-                <a:ea typeface="Calibri" pitchFamily="34" charset="-122"/>
-                <a:cs typeface="Calibri" pitchFamily="34" charset="-120"/>
-              </a:rPr>
-              <a:t>Zero hardware cost and zero install fits Malaysia's mixed device access in schools — runs on any browser</a:t>
-            </a:r>
-            <a:endParaRPr lang="en-US" sz="1250" dirty="0"/>
-          </a:p>
-        </p:txBody>
-      </p:sp>
-      <p:sp>
-        <p:nvSpPr>
-          <p:cNvPr id="19" name="Text 17"/>
-          <p:cNvSpPr/>
-          <p:nvPr/>
-        </p:nvSpPr>
-        <p:spPr>
-          <a:xfrm>
-            <a:off x="548640" y="5477256"/>
-            <a:ext cx="320040" cy="457200"/>
-          </a:xfrm>
-          <a:prstGeom prst="rect">
-            <a:avLst/>
-          </a:prstGeom>
-          <a:noFill/>
-          <a:ln/>
-        </p:spPr>
-        <p:txBody>
-          <a:bodyPr wrap="square" lIns="0" tIns="0" rIns="0" bIns="0" rtlCol="0" anchor="ctr"/>
-          <a:lstStyle/>
-          <a:p>
-            <a:pPr indent="0" marL="0">
-              <a:buNone/>
-            </a:pPr>
-            <a:r>
-              <a:rPr lang="en-US" sz="1300" b="1" dirty="0">
-                <a:solidFill>
-                  <a:srgbClr val="7EE3FF"/>
-                </a:solidFill>
-              </a:rPr>
-              <a:t>→</a:t>
-            </a:r>
-            <a:endParaRPr lang="en-US" sz="1300" dirty="0"/>
-          </a:p>
-        </p:txBody>
-      </p:sp>
-      <p:sp>
-        <p:nvSpPr>
-          <p:cNvPr id="20" name="Text 18"/>
-          <p:cNvSpPr/>
-          <p:nvPr/>
-        </p:nvSpPr>
-        <p:spPr>
-          <a:xfrm>
-            <a:off x="896112" y="5477256"/>
-            <a:ext cx="10515600" cy="502920"/>
-          </a:xfrm>
-          <a:prstGeom prst="rect">
-            <a:avLst/>
-          </a:prstGeom>
-          <a:noFill/>
-          <a:ln/>
-        </p:spPr>
-        <p:txBody>
-          <a:bodyPr wrap="square" lIns="0" tIns="0" rIns="0" bIns="0" rtlCol="0" anchor="ctr"/>
-          <a:lstStyle/>
-          <a:p>
-            <a:pPr indent="0" marL="0">
-              <a:lnSpc>
-                <a:spcPct val="115000"/>
-              </a:lnSpc>
-              <a:buNone/>
-            </a:pPr>
-            <a:r>
-              <a:rPr lang="en-US" sz="1250" dirty="0">
-                <a:solidFill>
-                  <a:srgbClr val="F2F2F2"/>
-                </a:solidFill>
-                <a:latin typeface="Calibri" pitchFamily="34" charset="0"/>
-                <a:ea typeface="Calibri" pitchFamily="34" charset="-122"/>
-                <a:cs typeface="Calibri" pitchFamily="34" charset="-120"/>
-              </a:rPr>
-              <a:t>Global “sandbox/creative-play” game audience (Sandspiel, Noita-likes) is a second, non-EdTech distribution channel</a:t>
-            </a:r>
-            <a:endParaRPr lang="en-US" sz="1250" dirty="0"/>
-          </a:p>
-        </p:txBody>
-      </p:sp>
-      <p:sp>
-        <p:nvSpPr>
-          <p:cNvPr id="21" name="Text 19"/>
+              <a:t>Before Pluto ships: a clear, opt-in disclosure model. Sandchemy's zero-data-collection promise stays true for the core sandbox — Pluto is an explicit, disclosed exception whenever it's used.</a:t>
+            </a:r>
+            <a:endParaRPr lang="en-US" sz="1050" dirty="0"/>
+          </a:p>
+        </p:txBody>
+      </p:sp>
+      <p:sp>
+        <p:nvSpPr>
+          <p:cNvPr id="29" name="Text 24"/>
           <p:cNvSpPr/>
           <p:nvPr/>
         </p:nvSpPr>
@@ -6634,7 +7835,7 @@
       </p:sp>
       <p:sp>
         <p:nvSpPr>
-          <p:cNvPr id="22" name="Text 20"/>
+          <p:cNvPr id="30" name="Text 25"/>
           <p:cNvSpPr/>
           <p:nvPr/>
         </p:nvSpPr>
@@ -6682,6 +7883,842 @@
 <file path=ppt/slides/slide6.xml><?xml version="1.0" encoding="utf-8"?>
 <p:sld xmlns:a="http://schemas.openxmlformats.org/drawingml/2006/main" xmlns:r="http://schemas.openxmlformats.org/officeDocument/2006/relationships" xmlns:p="http://schemas.openxmlformats.org/presentationml/2006/main">
   <p:cSld name="Slide 6">
+    <p:bg>
+      <p:bgPr>
+        <a:solidFill>
+          <a:srgbClr val="0D0F1A"/>
+        </a:solidFill>
+      </p:bgPr>
+    </p:bg>
+    <p:spTree>
+      <p:nvGrpSpPr>
+        <p:cNvPr id="1" name=""/>
+        <p:cNvGrpSpPr/>
+        <p:nvPr/>
+      </p:nvGrpSpPr>
+      <p:grpSpPr>
+        <a:xfrm>
+          <a:off x="0" y="0"/>
+          <a:ext cx="0" cy="0"/>
+          <a:chOff x="0" y="0"/>
+          <a:chExt cx="0" cy="0"/>
+        </a:xfrm>
+      </p:grpSpPr>
+      <p:sp>
+        <p:nvSpPr>
+          <p:cNvPr id="2" name="Text 0"/>
+          <p:cNvSpPr/>
+          <p:nvPr/>
+        </p:nvSpPr>
+        <p:spPr>
+          <a:xfrm>
+            <a:off x="548640" y="411480"/>
+            <a:ext cx="5486400" cy="365760"/>
+          </a:xfrm>
+          <a:prstGeom prst="rect">
+            <a:avLst/>
+          </a:prstGeom>
+          <a:noFill/>
+          <a:ln/>
+        </p:spPr>
+        <p:txBody>
+          <a:bodyPr wrap="square" lIns="0" tIns="0" rIns="0" bIns="0" rtlCol="0" anchor="ctr"/>
+          <a:lstStyle/>
+          <a:p>
+            <a:pPr indent="0" marL="0">
+              <a:buNone/>
+            </a:pPr>
+            <a:r>
+              <a:rPr lang="en-US" sz="1300" b="1" spc="200" kern="0" dirty="0">
+                <a:solidFill>
+                  <a:srgbClr val="FFD76B"/>
+                </a:solidFill>
+                <a:latin typeface="Calibri" pitchFamily="34" charset="0"/>
+                <a:ea typeface="Calibri" pitchFamily="34" charset="-122"/>
+                <a:cs typeface="Calibri" pitchFamily="34" charset="-120"/>
+              </a:rPr>
+              <a:t>MARKET</a:t>
+            </a:r>
+            <a:endParaRPr lang="en-US" sz="1300" dirty="0"/>
+          </a:p>
+        </p:txBody>
+      </p:sp>
+      <p:sp>
+        <p:nvSpPr>
+          <p:cNvPr id="3" name="Text 1"/>
+          <p:cNvSpPr/>
+          <p:nvPr/>
+        </p:nvSpPr>
+        <p:spPr>
+          <a:xfrm>
+            <a:off x="548640" y="777240"/>
+            <a:ext cx="10972800" cy="822960"/>
+          </a:xfrm>
+          <a:prstGeom prst="rect">
+            <a:avLst/>
+          </a:prstGeom>
+          <a:noFill/>
+          <a:ln/>
+        </p:spPr>
+        <p:txBody>
+          <a:bodyPr wrap="square" lIns="0" tIns="0" rIns="0" bIns="0" rtlCol="0" anchor="ctr"/>
+          <a:lstStyle/>
+          <a:p>
+            <a:pPr indent="0" marL="0">
+              <a:buNone/>
+            </a:pPr>
+            <a:r>
+              <a:rPr lang="en-US" sz="3200" b="1" dirty="0">
+                <a:solidFill>
+                  <a:srgbClr val="FFFFFF"/>
+                </a:solidFill>
+                <a:latin typeface="Cambria" pitchFamily="34" charset="0"/>
+                <a:ea typeface="Cambria" pitchFamily="34" charset="-122"/>
+                <a:cs typeface="Cambria" pitchFamily="34" charset="-120"/>
+              </a:rPr>
+              <a:t>Riding Malaysia's EdTech growth curve</a:t>
+            </a:r>
+            <a:endParaRPr lang="en-US" sz="3200" dirty="0"/>
+          </a:p>
+        </p:txBody>
+      </p:sp>
+      <p:sp>
+        <p:nvSpPr>
+          <p:cNvPr id="4" name="Shape 2"/>
+          <p:cNvSpPr/>
+          <p:nvPr/>
+        </p:nvSpPr>
+        <p:spPr>
+          <a:xfrm>
+            <a:off x="548640" y="1828800"/>
+            <a:ext cx="3520440" cy="1417320"/>
+          </a:xfrm>
+          <a:prstGeom prst="roundRect">
+            <a:avLst>
+              <a:gd name="adj" fmla="val 7742"/>
+            </a:avLst>
+          </a:prstGeom>
+          <a:solidFill>
+            <a:srgbClr val="181C33"/>
+          </a:solidFill>
+          <a:ln w="12700">
+            <a:solidFill>
+              <a:srgbClr val="2C3252"/>
+            </a:solidFill>
+            <a:prstDash val="solid"/>
+          </a:ln>
+          <a:effectLst>
+            <a:outerShdw sx="100000" sy="100000" kx="0" ky="0" algn="bl" rotWithShape="0" blurRad="127000" dist="38100" dir="5400000">
+              <a:srgbClr val="000000">
+                <a:alpha val="35000"/>
+              </a:srgbClr>
+            </a:outerShdw>
+          </a:effectLst>
+        </p:spPr>
+      </p:sp>
+      <p:sp>
+        <p:nvSpPr>
+          <p:cNvPr id="5" name="Text 3"/>
+          <p:cNvSpPr/>
+          <p:nvPr/>
+        </p:nvSpPr>
+        <p:spPr>
+          <a:xfrm>
+            <a:off x="548640" y="1965960"/>
+            <a:ext cx="3520440" cy="685800"/>
+          </a:xfrm>
+          <a:prstGeom prst="rect">
+            <a:avLst/>
+          </a:prstGeom>
+          <a:noFill/>
+          <a:ln/>
+        </p:spPr>
+        <p:txBody>
+          <a:bodyPr wrap="square" lIns="0" tIns="0" rIns="0" bIns="0" rtlCol="0" anchor="ctr"/>
+          <a:lstStyle/>
+          <a:p>
+            <a:pPr algn="ctr" indent="0" marL="0">
+              <a:buNone/>
+            </a:pPr>
+            <a:r>
+              <a:rPr lang="en-US" sz="3200" b="1" dirty="0">
+                <a:solidFill>
+                  <a:srgbClr val="FFD76B"/>
+                </a:solidFill>
+                <a:latin typeface="Cambria" pitchFamily="34" charset="0"/>
+                <a:ea typeface="Cambria" pitchFamily="34" charset="-122"/>
+                <a:cs typeface="Cambria" pitchFamily="34" charset="-120"/>
+              </a:rPr>
+              <a:t>USD 1.05B</a:t>
+            </a:r>
+            <a:endParaRPr lang="en-US" sz="3200" dirty="0"/>
+          </a:p>
+        </p:txBody>
+      </p:sp>
+      <p:sp>
+        <p:nvSpPr>
+          <p:cNvPr id="6" name="Text 4"/>
+          <p:cNvSpPr/>
+          <p:nvPr/>
+        </p:nvSpPr>
+        <p:spPr>
+          <a:xfrm>
+            <a:off x="731520" y="2651760"/>
+            <a:ext cx="3154680" cy="502920"/>
+          </a:xfrm>
+          <a:prstGeom prst="rect">
+            <a:avLst/>
+          </a:prstGeom>
+          <a:noFill/>
+          <a:ln/>
+        </p:spPr>
+        <p:txBody>
+          <a:bodyPr wrap="square" lIns="0" tIns="0" rIns="0" bIns="0" rtlCol="0" anchor="ctr"/>
+          <a:lstStyle/>
+          <a:p>
+            <a:pPr algn="ctr" indent="0" marL="0">
+              <a:buNone/>
+            </a:pPr>
+            <a:r>
+              <a:rPr lang="en-US" sz="1100" dirty="0">
+                <a:solidFill>
+                  <a:srgbClr val="9AA2BD"/>
+                </a:solidFill>
+                <a:latin typeface="Calibri" pitchFamily="34" charset="0"/>
+                <a:ea typeface="Calibri" pitchFamily="34" charset="-122"/>
+                <a:cs typeface="Calibri" pitchFamily="34" charset="-120"/>
+              </a:rPr>
+              <a:t>Malaysia EdTech market size, 2024</a:t>
+            </a:r>
+            <a:endParaRPr lang="en-US" sz="1100" dirty="0"/>
+          </a:p>
+        </p:txBody>
+      </p:sp>
+      <p:sp>
+        <p:nvSpPr>
+          <p:cNvPr id="7" name="Shape 5"/>
+          <p:cNvSpPr/>
+          <p:nvPr/>
+        </p:nvSpPr>
+        <p:spPr>
+          <a:xfrm>
+            <a:off x="4297680" y="1828800"/>
+            <a:ext cx="3520440" cy="1417320"/>
+          </a:xfrm>
+          <a:prstGeom prst="roundRect">
+            <a:avLst>
+              <a:gd name="adj" fmla="val 7742"/>
+            </a:avLst>
+          </a:prstGeom>
+          <a:solidFill>
+            <a:srgbClr val="181C33"/>
+          </a:solidFill>
+          <a:ln w="12700">
+            <a:solidFill>
+              <a:srgbClr val="2C3252"/>
+            </a:solidFill>
+            <a:prstDash val="solid"/>
+          </a:ln>
+          <a:effectLst>
+            <a:outerShdw sx="100000" sy="100000" kx="0" ky="0" algn="bl" rotWithShape="0" blurRad="127000" dist="38100" dir="5400000">
+              <a:srgbClr val="000000">
+                <a:alpha val="35000"/>
+              </a:srgbClr>
+            </a:outerShdw>
+          </a:effectLst>
+        </p:spPr>
+      </p:sp>
+      <p:sp>
+        <p:nvSpPr>
+          <p:cNvPr id="8" name="Text 6"/>
+          <p:cNvSpPr/>
+          <p:nvPr/>
+        </p:nvSpPr>
+        <p:spPr>
+          <a:xfrm>
+            <a:off x="4297680" y="1965960"/>
+            <a:ext cx="3520440" cy="685800"/>
+          </a:xfrm>
+          <a:prstGeom prst="rect">
+            <a:avLst/>
+          </a:prstGeom>
+          <a:noFill/>
+          <a:ln/>
+        </p:spPr>
+        <p:txBody>
+          <a:bodyPr wrap="square" lIns="0" tIns="0" rIns="0" bIns="0" rtlCol="0" anchor="ctr"/>
+          <a:lstStyle/>
+          <a:p>
+            <a:pPr algn="ctr" indent="0" marL="0">
+              <a:buNone/>
+            </a:pPr>
+            <a:r>
+              <a:rPr lang="en-US" sz="3200" b="1" dirty="0">
+                <a:solidFill>
+                  <a:srgbClr val="FFD76B"/>
+                </a:solidFill>
+                <a:latin typeface="Cambria" pitchFamily="34" charset="0"/>
+                <a:ea typeface="Cambria" pitchFamily="34" charset="-122"/>
+                <a:cs typeface="Cambria" pitchFamily="34" charset="-120"/>
+              </a:rPr>
+              <a:t>USD 2.88B</a:t>
+            </a:r>
+            <a:endParaRPr lang="en-US" sz="3200" dirty="0"/>
+          </a:p>
+        </p:txBody>
+      </p:sp>
+      <p:sp>
+        <p:nvSpPr>
+          <p:cNvPr id="9" name="Text 7"/>
+          <p:cNvSpPr/>
+          <p:nvPr/>
+        </p:nvSpPr>
+        <p:spPr>
+          <a:xfrm>
+            <a:off x="4480560" y="2651760"/>
+            <a:ext cx="3154680" cy="502920"/>
+          </a:xfrm>
+          <a:prstGeom prst="rect">
+            <a:avLst/>
+          </a:prstGeom>
+          <a:noFill/>
+          <a:ln/>
+        </p:spPr>
+        <p:txBody>
+          <a:bodyPr wrap="square" lIns="0" tIns="0" rIns="0" bIns="0" rtlCol="0" anchor="ctr"/>
+          <a:lstStyle/>
+          <a:p>
+            <a:pPr algn="ctr" indent="0" marL="0">
+              <a:buNone/>
+            </a:pPr>
+            <a:r>
+              <a:rPr lang="en-US" sz="1100" dirty="0">
+                <a:solidFill>
+                  <a:srgbClr val="9AA2BD"/>
+                </a:solidFill>
+                <a:latin typeface="Calibri" pitchFamily="34" charset="0"/>
+                <a:ea typeface="Calibri" pitchFamily="34" charset="-122"/>
+                <a:cs typeface="Calibri" pitchFamily="34" charset="-120"/>
+              </a:rPr>
+              <a:t>Projected size by 2033 (~11.8% CAGR)</a:t>
+            </a:r>
+            <a:endParaRPr lang="en-US" sz="1100" dirty="0"/>
+          </a:p>
+        </p:txBody>
+      </p:sp>
+      <p:sp>
+        <p:nvSpPr>
+          <p:cNvPr id="10" name="Shape 8"/>
+          <p:cNvSpPr/>
+          <p:nvPr/>
+        </p:nvSpPr>
+        <p:spPr>
+          <a:xfrm>
+            <a:off x="8046720" y="1828800"/>
+            <a:ext cx="3520440" cy="1417320"/>
+          </a:xfrm>
+          <a:prstGeom prst="roundRect">
+            <a:avLst>
+              <a:gd name="adj" fmla="val 7742"/>
+            </a:avLst>
+          </a:prstGeom>
+          <a:solidFill>
+            <a:srgbClr val="181C33"/>
+          </a:solidFill>
+          <a:ln w="12700">
+            <a:solidFill>
+              <a:srgbClr val="2C3252"/>
+            </a:solidFill>
+            <a:prstDash val="solid"/>
+          </a:ln>
+          <a:effectLst>
+            <a:outerShdw sx="100000" sy="100000" kx="0" ky="0" algn="bl" rotWithShape="0" blurRad="127000" dist="38100" dir="5400000">
+              <a:srgbClr val="000000">
+                <a:alpha val="35000"/>
+              </a:srgbClr>
+            </a:outerShdw>
+          </a:effectLst>
+        </p:spPr>
+      </p:sp>
+      <p:sp>
+        <p:nvSpPr>
+          <p:cNvPr id="11" name="Text 9"/>
+          <p:cNvSpPr/>
+          <p:nvPr/>
+        </p:nvSpPr>
+        <p:spPr>
+          <a:xfrm>
+            <a:off x="8046720" y="1965960"/>
+            <a:ext cx="3520440" cy="685800"/>
+          </a:xfrm>
+          <a:prstGeom prst="rect">
+            <a:avLst/>
+          </a:prstGeom>
+          <a:noFill/>
+          <a:ln/>
+        </p:spPr>
+        <p:txBody>
+          <a:bodyPr wrap="square" lIns="0" tIns="0" rIns="0" bIns="0" rtlCol="0" anchor="ctr"/>
+          <a:lstStyle/>
+          <a:p>
+            <a:pPr algn="ctr" indent="0" marL="0">
+              <a:buNone/>
+            </a:pPr>
+            <a:r>
+              <a:rPr lang="en-US" sz="3200" b="1" dirty="0">
+                <a:solidFill>
+                  <a:srgbClr val="FFD76B"/>
+                </a:solidFill>
+                <a:latin typeface="Cambria" pitchFamily="34" charset="0"/>
+                <a:ea typeface="Cambria" pitchFamily="34" charset="-122"/>
+                <a:cs typeface="Cambria" pitchFamily="34" charset="-120"/>
+              </a:rPr>
+              <a:t>44.6%</a:t>
+            </a:r>
+            <a:endParaRPr lang="en-US" sz="3200" dirty="0"/>
+          </a:p>
+        </p:txBody>
+      </p:sp>
+      <p:sp>
+        <p:nvSpPr>
+          <p:cNvPr id="12" name="Text 10"/>
+          <p:cNvSpPr/>
+          <p:nvPr/>
+        </p:nvSpPr>
+        <p:spPr>
+          <a:xfrm>
+            <a:off x="8229600" y="2651760"/>
+            <a:ext cx="3154680" cy="502920"/>
+          </a:xfrm>
+          <a:prstGeom prst="rect">
+            <a:avLst/>
+          </a:prstGeom>
+          <a:noFill/>
+          <a:ln/>
+        </p:spPr>
+        <p:txBody>
+          <a:bodyPr wrap="square" lIns="0" tIns="0" rIns="0" bIns="0" rtlCol="0" anchor="ctr"/>
+          <a:lstStyle/>
+          <a:p>
+            <a:pPr algn="ctr" indent="0" marL="0">
+              <a:buNone/>
+            </a:pPr>
+            <a:r>
+              <a:rPr lang="en-US" sz="1100" dirty="0">
+                <a:solidFill>
+                  <a:srgbClr val="9AA2BD"/>
+                </a:solidFill>
+                <a:latin typeface="Calibri" pitchFamily="34" charset="0"/>
+                <a:ea typeface="Calibri" pitchFamily="34" charset="-122"/>
+                <a:cs typeface="Calibri" pitchFamily="34" charset="-120"/>
+              </a:rPr>
+              <a:t>Share held by higher education alone</a:t>
+            </a:r>
+            <a:endParaRPr lang="en-US" sz="1100" dirty="0"/>
+          </a:p>
+        </p:txBody>
+      </p:sp>
+      <p:sp>
+        <p:nvSpPr>
+          <p:cNvPr id="13" name="Text 11"/>
+          <p:cNvSpPr/>
+          <p:nvPr/>
+        </p:nvSpPr>
+        <p:spPr>
+          <a:xfrm>
+            <a:off x="548640" y="3337560"/>
+            <a:ext cx="7315200" cy="320040"/>
+          </a:xfrm>
+          <a:prstGeom prst="rect">
+            <a:avLst/>
+          </a:prstGeom>
+          <a:noFill/>
+          <a:ln/>
+        </p:spPr>
+        <p:txBody>
+          <a:bodyPr wrap="square" lIns="0" tIns="0" rIns="0" bIns="0" rtlCol="0" anchor="ctr"/>
+          <a:lstStyle/>
+          <a:p>
+            <a:pPr indent="0" marL="0">
+              <a:buNone/>
+            </a:pPr>
+            <a:r>
+              <a:rPr lang="en-US" sz="900" i="1" dirty="0">
+                <a:solidFill>
+                  <a:srgbClr val="9AA2BD"/>
+                </a:solidFill>
+                <a:latin typeface="Calibri" pitchFamily="34" charset="0"/>
+                <a:ea typeface="Calibri" pitchFamily="34" charset="-122"/>
+                <a:cs typeface="Calibri" pitchFamily="34" charset="-120"/>
+              </a:rPr>
+              <a:t>Source: IMARC Group, Malaysia EdTech Market Report</a:t>
+            </a:r>
+            <a:endParaRPr lang="en-US" sz="900" dirty="0"/>
+          </a:p>
+        </p:txBody>
+      </p:sp>
+      <p:sp>
+        <p:nvSpPr>
+          <p:cNvPr id="14" name="Text 12"/>
+          <p:cNvSpPr/>
+          <p:nvPr/>
+        </p:nvSpPr>
+        <p:spPr>
+          <a:xfrm>
+            <a:off x="548640" y="3886200"/>
+            <a:ext cx="7315200" cy="365760"/>
+          </a:xfrm>
+          <a:prstGeom prst="rect">
+            <a:avLst/>
+          </a:prstGeom>
+          <a:noFill/>
+          <a:ln/>
+        </p:spPr>
+        <p:txBody>
+          <a:bodyPr wrap="square" lIns="0" tIns="0" rIns="0" bIns="0" rtlCol="0" anchor="ctr"/>
+          <a:lstStyle/>
+          <a:p>
+            <a:pPr indent="0" marL="0">
+              <a:buNone/>
+            </a:pPr>
+            <a:r>
+              <a:rPr lang="en-US" sz="1500" b="1" dirty="0">
+                <a:solidFill>
+                  <a:srgbClr val="FFFFFF"/>
+                </a:solidFill>
+                <a:latin typeface="Calibri" pitchFamily="34" charset="0"/>
+                <a:ea typeface="Calibri" pitchFamily="34" charset="-122"/>
+                <a:cs typeface="Calibri" pitchFamily="34" charset="-120"/>
+              </a:rPr>
+              <a:t>Why Sandchemy fits this moment:</a:t>
+            </a:r>
+            <a:endParaRPr lang="en-US" sz="1500" dirty="0"/>
+          </a:p>
+        </p:txBody>
+      </p:sp>
+      <p:sp>
+        <p:nvSpPr>
+          <p:cNvPr id="15" name="Text 13"/>
+          <p:cNvSpPr/>
+          <p:nvPr/>
+        </p:nvSpPr>
+        <p:spPr>
+          <a:xfrm>
+            <a:off x="548640" y="4343400"/>
+            <a:ext cx="320040" cy="457200"/>
+          </a:xfrm>
+          <a:prstGeom prst="rect">
+            <a:avLst/>
+          </a:prstGeom>
+          <a:noFill/>
+          <a:ln/>
+        </p:spPr>
+        <p:txBody>
+          <a:bodyPr wrap="square" lIns="0" tIns="0" rIns="0" bIns="0" rtlCol="0" anchor="ctr"/>
+          <a:lstStyle/>
+          <a:p>
+            <a:pPr indent="0" marL="0">
+              <a:buNone/>
+            </a:pPr>
+            <a:r>
+              <a:rPr lang="en-US" sz="1300" b="1" dirty="0">
+                <a:solidFill>
+                  <a:srgbClr val="7EE3FF"/>
+                </a:solidFill>
+              </a:rPr>
+              <a:t>→</a:t>
+            </a:r>
+            <a:endParaRPr lang="en-US" sz="1300" dirty="0"/>
+          </a:p>
+        </p:txBody>
+      </p:sp>
+      <p:sp>
+        <p:nvSpPr>
+          <p:cNvPr id="16" name="Text 14"/>
+          <p:cNvSpPr/>
+          <p:nvPr/>
+        </p:nvSpPr>
+        <p:spPr>
+          <a:xfrm>
+            <a:off x="896112" y="4343400"/>
+            <a:ext cx="10515600" cy="502920"/>
+          </a:xfrm>
+          <a:prstGeom prst="rect">
+            <a:avLst/>
+          </a:prstGeom>
+          <a:noFill/>
+          <a:ln/>
+        </p:spPr>
+        <p:txBody>
+          <a:bodyPr wrap="square" lIns="0" tIns="0" rIns="0" bIns="0" rtlCol="0" anchor="ctr"/>
+          <a:lstStyle/>
+          <a:p>
+            <a:pPr indent="0" marL="0">
+              <a:lnSpc>
+                <a:spcPct val="115000"/>
+              </a:lnSpc>
+              <a:buNone/>
+            </a:pPr>
+            <a:r>
+              <a:rPr lang="en-US" sz="1250" dirty="0">
+                <a:solidFill>
+                  <a:srgbClr val="F2F2F2"/>
+                </a:solidFill>
+                <a:latin typeface="Calibri" pitchFamily="34" charset="0"/>
+                <a:ea typeface="Calibri" pitchFamily="34" charset="-122"/>
+                <a:cs typeface="Calibri" pitchFamily="34" charset="-120"/>
+              </a:rPr>
+              <a:t>Government STEM push + rising gamified/digital-classroom adoption are both named growth drivers of this market</a:t>
+            </a:r>
+            <a:endParaRPr lang="en-US" sz="1250" dirty="0"/>
+          </a:p>
+        </p:txBody>
+      </p:sp>
+      <p:sp>
+        <p:nvSpPr>
+          <p:cNvPr id="17" name="Text 15"/>
+          <p:cNvSpPr/>
+          <p:nvPr/>
+        </p:nvSpPr>
+        <p:spPr>
+          <a:xfrm>
+            <a:off x="548640" y="4910328"/>
+            <a:ext cx="320040" cy="457200"/>
+          </a:xfrm>
+          <a:prstGeom prst="rect">
+            <a:avLst/>
+          </a:prstGeom>
+          <a:noFill/>
+          <a:ln/>
+        </p:spPr>
+        <p:txBody>
+          <a:bodyPr wrap="square" lIns="0" tIns="0" rIns="0" bIns="0" rtlCol="0" anchor="ctr"/>
+          <a:lstStyle/>
+          <a:p>
+            <a:pPr indent="0" marL="0">
+              <a:buNone/>
+            </a:pPr>
+            <a:r>
+              <a:rPr lang="en-US" sz="1300" b="1" dirty="0">
+                <a:solidFill>
+                  <a:srgbClr val="7EE3FF"/>
+                </a:solidFill>
+              </a:rPr>
+              <a:t>→</a:t>
+            </a:r>
+            <a:endParaRPr lang="en-US" sz="1300" dirty="0"/>
+          </a:p>
+        </p:txBody>
+      </p:sp>
+      <p:sp>
+        <p:nvSpPr>
+          <p:cNvPr id="18" name="Text 16"/>
+          <p:cNvSpPr/>
+          <p:nvPr/>
+        </p:nvSpPr>
+        <p:spPr>
+          <a:xfrm>
+            <a:off x="896112" y="4910328"/>
+            <a:ext cx="10515600" cy="502920"/>
+          </a:xfrm>
+          <a:prstGeom prst="rect">
+            <a:avLst/>
+          </a:prstGeom>
+          <a:noFill/>
+          <a:ln/>
+        </p:spPr>
+        <p:txBody>
+          <a:bodyPr wrap="square" lIns="0" tIns="0" rIns="0" bIns="0" rtlCol="0" anchor="ctr"/>
+          <a:lstStyle/>
+          <a:p>
+            <a:pPr indent="0" marL="0">
+              <a:lnSpc>
+                <a:spcPct val="115000"/>
+              </a:lnSpc>
+              <a:buNone/>
+            </a:pPr>
+            <a:r>
+              <a:rPr lang="en-US" sz="1250" dirty="0">
+                <a:solidFill>
+                  <a:srgbClr val="F2F2F2"/>
+                </a:solidFill>
+                <a:latin typeface="Calibri" pitchFamily="34" charset="0"/>
+                <a:ea typeface="Calibri" pitchFamily="34" charset="-122"/>
+                <a:cs typeface="Calibri" pitchFamily="34" charset="-120"/>
+              </a:rPr>
+              <a:t>Zero hardware cost and zero install fits Malaysia's mixed device access in schools — runs on any browser</a:t>
+            </a:r>
+            <a:endParaRPr lang="en-US" sz="1250" dirty="0"/>
+          </a:p>
+        </p:txBody>
+      </p:sp>
+      <p:sp>
+        <p:nvSpPr>
+          <p:cNvPr id="19" name="Text 17"/>
+          <p:cNvSpPr/>
+          <p:nvPr/>
+        </p:nvSpPr>
+        <p:spPr>
+          <a:xfrm>
+            <a:off x="548640" y="5477256"/>
+            <a:ext cx="320040" cy="457200"/>
+          </a:xfrm>
+          <a:prstGeom prst="rect">
+            <a:avLst/>
+          </a:prstGeom>
+          <a:noFill/>
+          <a:ln/>
+        </p:spPr>
+        <p:txBody>
+          <a:bodyPr wrap="square" lIns="0" tIns="0" rIns="0" bIns="0" rtlCol="0" anchor="ctr"/>
+          <a:lstStyle/>
+          <a:p>
+            <a:pPr indent="0" marL="0">
+              <a:buNone/>
+            </a:pPr>
+            <a:r>
+              <a:rPr lang="en-US" sz="1300" b="1" dirty="0">
+                <a:solidFill>
+                  <a:srgbClr val="7EE3FF"/>
+                </a:solidFill>
+              </a:rPr>
+              <a:t>→</a:t>
+            </a:r>
+            <a:endParaRPr lang="en-US" sz="1300" dirty="0"/>
+          </a:p>
+        </p:txBody>
+      </p:sp>
+      <p:sp>
+        <p:nvSpPr>
+          <p:cNvPr id="20" name="Text 18"/>
+          <p:cNvSpPr/>
+          <p:nvPr/>
+        </p:nvSpPr>
+        <p:spPr>
+          <a:xfrm>
+            <a:off x="896112" y="5477256"/>
+            <a:ext cx="10515600" cy="502920"/>
+          </a:xfrm>
+          <a:prstGeom prst="rect">
+            <a:avLst/>
+          </a:prstGeom>
+          <a:noFill/>
+          <a:ln/>
+        </p:spPr>
+        <p:txBody>
+          <a:bodyPr wrap="square" lIns="0" tIns="0" rIns="0" bIns="0" rtlCol="0" anchor="ctr"/>
+          <a:lstStyle/>
+          <a:p>
+            <a:pPr indent="0" marL="0">
+              <a:lnSpc>
+                <a:spcPct val="115000"/>
+              </a:lnSpc>
+              <a:buNone/>
+            </a:pPr>
+            <a:r>
+              <a:rPr lang="en-US" sz="1250" dirty="0">
+                <a:solidFill>
+                  <a:srgbClr val="F2F2F2"/>
+                </a:solidFill>
+                <a:latin typeface="Calibri" pitchFamily="34" charset="0"/>
+                <a:ea typeface="Calibri" pitchFamily="34" charset="-122"/>
+                <a:cs typeface="Calibri" pitchFamily="34" charset="-120"/>
+              </a:rPr>
+              <a:t>Global “sandbox/creative-play” game audience (Sandspiel, Noita-likes) is a second, non-EdTech distribution channel</a:t>
+            </a:r>
+            <a:endParaRPr lang="en-US" sz="1250" dirty="0"/>
+          </a:p>
+        </p:txBody>
+      </p:sp>
+      <p:sp>
+        <p:nvSpPr>
+          <p:cNvPr id="21" name="Text 19"/>
+          <p:cNvSpPr/>
+          <p:nvPr/>
+        </p:nvSpPr>
+        <p:spPr>
+          <a:xfrm>
+            <a:off x="11430000" y="6446520"/>
+            <a:ext cx="548640" cy="274320"/>
+          </a:xfrm>
+          <a:prstGeom prst="rect">
+            <a:avLst/>
+          </a:prstGeom>
+          <a:noFill/>
+          <a:ln/>
+        </p:spPr>
+        <p:txBody>
+          <a:bodyPr wrap="square" lIns="0" tIns="0" rIns="0" bIns="0" rtlCol="0" anchor="ctr"/>
+          <a:lstStyle/>
+          <a:p>
+            <a:pPr algn="r" indent="0" marL="0">
+              <a:buNone/>
+            </a:pPr>
+            <a:r>
+              <a:rPr lang="en-US" sz="1000" dirty="0">
+                <a:solidFill>
+                  <a:srgbClr val="9AA2BD"/>
+                </a:solidFill>
+                <a:latin typeface="Calibri" pitchFamily="34" charset="0"/>
+                <a:ea typeface="Calibri" pitchFamily="34" charset="-122"/>
+                <a:cs typeface="Calibri" pitchFamily="34" charset="-120"/>
+              </a:rPr>
+              <a:t>06</a:t>
+            </a:r>
+            <a:endParaRPr lang="en-US" sz="1000" dirty="0"/>
+          </a:p>
+        </p:txBody>
+      </p:sp>
+      <p:sp>
+        <p:nvSpPr>
+          <p:cNvPr id="22" name="Text 20"/>
+          <p:cNvSpPr/>
+          <p:nvPr/>
+        </p:nvSpPr>
+        <p:spPr>
+          <a:xfrm>
+            <a:off x="548640" y="6446520"/>
+            <a:ext cx="2743200" cy="274320"/>
+          </a:xfrm>
+          <a:prstGeom prst="rect">
+            <a:avLst/>
+          </a:prstGeom>
+          <a:noFill/>
+          <a:ln/>
+        </p:spPr>
+        <p:txBody>
+          <a:bodyPr wrap="square" lIns="0" tIns="0" rIns="0" bIns="0" rtlCol="0" anchor="ctr"/>
+          <a:lstStyle/>
+          <a:p>
+            <a:pPr indent="0" marL="0">
+              <a:buNone/>
+            </a:pPr>
+            <a:r>
+              <a:rPr lang="en-US" sz="1000" spc="100" kern="0" dirty="0">
+                <a:solidFill>
+                  <a:srgbClr val="9AA2BD"/>
+                </a:solidFill>
+                <a:latin typeface="Calibri" pitchFamily="34" charset="0"/>
+                <a:ea typeface="Calibri" pitchFamily="34" charset="-122"/>
+                <a:cs typeface="Calibri" pitchFamily="34" charset="-120"/>
+              </a:rPr>
+              <a:t>SANDCHEMY</a:t>
+            </a:r>
+            <a:endParaRPr lang="en-US" sz="1000" dirty="0"/>
+          </a:p>
+        </p:txBody>
+      </p:sp>
+    </p:spTree>
+  </p:cSld>
+  <p:clrMapOvr>
+    <a:masterClrMapping/>
+  </p:clrMapOvr>
+</p:sld>
+</file>
+
+<file path=ppt/slides/slide7.xml><?xml version="1.0" encoding="utf-8"?>
+<p:sld xmlns:a="http://schemas.openxmlformats.org/drawingml/2006/main" xmlns:r="http://schemas.openxmlformats.org/officeDocument/2006/relationships" xmlns:p="http://schemas.openxmlformats.org/presentationml/2006/main">
+  <p:cSld name="Slide 7">
     <p:bg>
       <p:bgPr>
         <a:solidFill>
@@ -7543,7 +9580,7 @@
                 <a:ea typeface="Calibri" pitchFamily="34" charset="-122"/>
                 <a:cs typeface="Calibri" pitchFamily="34" charset="-120"/>
               </a:rPr>
-              <a:t>06</a:t>
+              <a:t>07</a:t>
             </a:r>
             <a:endParaRPr lang="en-US" sz="1000" dirty="0"/>
           </a:p>
@@ -7596,9 +9633,9 @@
 </p:sld>
 </file>
 
-<file path=ppt/slides/slide7.xml><?xml version="1.0" encoding="utf-8"?>
+<file path=ppt/slides/slide8.xml><?xml version="1.0" encoding="utf-8"?>
 <p:sld xmlns:a="http://schemas.openxmlformats.org/drawingml/2006/main" xmlns:r="http://schemas.openxmlformats.org/officeDocument/2006/relationships" xmlns:p="http://schemas.openxmlformats.org/presentationml/2006/main">
-  <p:cSld name="Slide 7">
+  <p:cSld name="Slide 8">
     <p:bg>
       <p:bgPr>
         <a:solidFill>
@@ -8206,7 +10243,7 @@
                 <a:ea typeface="Calibri" pitchFamily="34" charset="-122"/>
                 <a:cs typeface="Calibri" pitchFamily="34" charset="-120"/>
               </a:rPr>
-              <a:t>Curriculum-aligned worksheet packs; first 3 school pilots</a:t>
+              <a:t>Ask Pluto (AI tutor) MVP ships; first 3 school pilots begin</a:t>
             </a:r>
             <a:endParaRPr lang="en-US" sz="1050" dirty="0"/>
           </a:p>
@@ -8330,7 +10367,7 @@
                 <a:ea typeface="Calibri" pitchFamily="34" charset="-122"/>
                 <a:cs typeface="Calibri" pitchFamily="34" charset="-120"/>
               </a:rPr>
-              <a:t>Teacher dashboard + classroom accounts (still zero student PII)</a:t>
+              <a:t>Teacher dashboard + curriculum worksheet packs (zero student PII)</a:t>
             </a:r>
             <a:endParaRPr lang="en-US" sz="1050" dirty="0"/>
           </a:p>
@@ -8594,7 +10631,7 @@
                 <a:ea typeface="Calibri" pitchFamily="34" charset="-122"/>
                 <a:cs typeface="Calibri" pitchFamily="34" charset="-120"/>
               </a:rPr>
-              <a:t>07</a:t>
+              <a:t>08</a:t>
             </a:r>
             <a:endParaRPr lang="en-US" sz="1000" dirty="0"/>
           </a:p>
@@ -8647,9 +10684,9 @@
 </p:sld>
 </file>
 
-<file path=ppt/slides/slide8.xml><?xml version="1.0" encoding="utf-8"?>
+<file path=ppt/slides/slide9.xml><?xml version="1.0" encoding="utf-8"?>
 <p:sld xmlns:a="http://schemas.openxmlformats.org/drawingml/2006/main" xmlns:r="http://schemas.openxmlformats.org/officeDocument/2006/relationships" xmlns:p="http://schemas.openxmlformats.org/presentationml/2006/main">
-  <p:cSld name="Slide 8">
+  <p:cSld name="Slide 9">
     <p:bg>
       <p:bgPr>
         <a:solidFill>
@@ -9507,7 +11544,7 @@
                 <a:ea typeface="Calibri" pitchFamily="34" charset="-122"/>
                 <a:cs typeface="Calibri" pitchFamily="34" charset="-120"/>
               </a:rPr>
-              <a:t>08</a:t>
+              <a:t>09</a:t>
             </a:r>
             <a:endParaRPr lang="en-US" sz="1000" dirty="0"/>
           </a:p>
@@ -9516,848 +11553,6 @@
       <p:sp>
         <p:nvSpPr>
           <p:cNvPr id="25" name="Text 22"/>
-          <p:cNvSpPr/>
-          <p:nvPr/>
-        </p:nvSpPr>
-        <p:spPr>
-          <a:xfrm>
-            <a:off x="548640" y="6446520"/>
-            <a:ext cx="2743200" cy="274320"/>
-          </a:xfrm>
-          <a:prstGeom prst="rect">
-            <a:avLst/>
-          </a:prstGeom>
-          <a:noFill/>
-          <a:ln/>
-        </p:spPr>
-        <p:txBody>
-          <a:bodyPr wrap="square" lIns="0" tIns="0" rIns="0" bIns="0" rtlCol="0" anchor="ctr"/>
-          <a:lstStyle/>
-          <a:p>
-            <a:pPr indent="0" marL="0">
-              <a:buNone/>
-            </a:pPr>
-            <a:r>
-              <a:rPr lang="en-US" sz="1000" spc="100" kern="0" dirty="0">
-                <a:solidFill>
-                  <a:srgbClr val="9AA2BD"/>
-                </a:solidFill>
-                <a:latin typeface="Calibri" pitchFamily="34" charset="0"/>
-                <a:ea typeface="Calibri" pitchFamily="34" charset="-122"/>
-                <a:cs typeface="Calibri" pitchFamily="34" charset="-120"/>
-              </a:rPr>
-              <a:t>SANDCHEMY</a:t>
-            </a:r>
-            <a:endParaRPr lang="en-US" sz="1000" dirty="0"/>
-          </a:p>
-        </p:txBody>
-      </p:sp>
-    </p:spTree>
-  </p:cSld>
-  <p:clrMapOvr>
-    <a:masterClrMapping/>
-  </p:clrMapOvr>
-</p:sld>
-</file>
-
-<file path=ppt/slides/slide9.xml><?xml version="1.0" encoding="utf-8"?>
-<p:sld xmlns:a="http://schemas.openxmlformats.org/drawingml/2006/main" xmlns:r="http://schemas.openxmlformats.org/officeDocument/2006/relationships" xmlns:p="http://schemas.openxmlformats.org/presentationml/2006/main">
-  <p:cSld name="Slide 9">
-    <p:bg>
-      <p:bgPr>
-        <a:solidFill>
-          <a:srgbClr val="0D0F1A"/>
-        </a:solidFill>
-      </p:bgPr>
-    </p:bg>
-    <p:spTree>
-      <p:nvGrpSpPr>
-        <p:cNvPr id="1" name=""/>
-        <p:cNvGrpSpPr/>
-        <p:nvPr/>
-      </p:nvGrpSpPr>
-      <p:grpSpPr>
-        <a:xfrm>
-          <a:off x="0" y="0"/>
-          <a:ext cx="0" cy="0"/>
-          <a:chOff x="0" y="0"/>
-          <a:chExt cx="0" cy="0"/>
-        </a:xfrm>
-      </p:grpSpPr>
-      <p:sp>
-        <p:nvSpPr>
-          <p:cNvPr id="2" name="Text 0"/>
-          <p:cNvSpPr/>
-          <p:nvPr/>
-        </p:nvSpPr>
-        <p:spPr>
-          <a:xfrm>
-            <a:off x="548640" y="411480"/>
-            <a:ext cx="5486400" cy="365760"/>
-          </a:xfrm>
-          <a:prstGeom prst="rect">
-            <a:avLst/>
-          </a:prstGeom>
-          <a:noFill/>
-          <a:ln/>
-        </p:spPr>
-        <p:txBody>
-          <a:bodyPr wrap="square" lIns="0" tIns="0" rIns="0" bIns="0" rtlCol="0" anchor="ctr"/>
-          <a:lstStyle/>
-          <a:p>
-            <a:pPr indent="0" marL="0">
-              <a:buNone/>
-            </a:pPr>
-            <a:r>
-              <a:rPr lang="en-US" sz="1300" b="1" spc="200" kern="0" dirty="0">
-                <a:solidFill>
-                  <a:srgbClr val="FFD76B"/>
-                </a:solidFill>
-                <a:latin typeface="Calibri" pitchFamily="34" charset="0"/>
-                <a:ea typeface="Calibri" pitchFamily="34" charset="-122"/>
-                <a:cs typeface="Calibri" pitchFamily="34" charset="-120"/>
-              </a:rPr>
-              <a:t>THE ASK</a:t>
-            </a:r>
-            <a:endParaRPr lang="en-US" sz="1300" dirty="0"/>
-          </a:p>
-        </p:txBody>
-      </p:sp>
-      <p:sp>
-        <p:nvSpPr>
-          <p:cNvPr id="3" name="Text 1"/>
-          <p:cNvSpPr/>
-          <p:nvPr/>
-        </p:nvSpPr>
-        <p:spPr>
-          <a:xfrm>
-            <a:off x="548640" y="777240"/>
-            <a:ext cx="10972800" cy="822960"/>
-          </a:xfrm>
-          <a:prstGeom prst="rect">
-            <a:avLst/>
-          </a:prstGeom>
-          <a:noFill/>
-          <a:ln/>
-        </p:spPr>
-        <p:txBody>
-          <a:bodyPr wrap="square" lIns="0" tIns="0" rIns="0" bIns="0" rtlCol="0" anchor="ctr"/>
-          <a:lstStyle/>
-          <a:p>
-            <a:pPr indent="0" marL="0">
-              <a:buNone/>
-            </a:pPr>
-            <a:r>
-              <a:rPr lang="en-US" sz="3200" b="1" dirty="0">
-                <a:solidFill>
-                  <a:srgbClr val="FFFFFF"/>
-                </a:solidFill>
-                <a:latin typeface="Cambria" pitchFamily="34" charset="0"/>
-                <a:ea typeface="Cambria" pitchFamily="34" charset="-122"/>
-                <a:cs typeface="Cambria" pitchFamily="34" charset="-120"/>
-              </a:rPr>
-              <a:t>RM150,000 — CIP Spark, pre-seed</a:t>
-            </a:r>
-            <a:endParaRPr lang="en-US" sz="3200" dirty="0"/>
-          </a:p>
-        </p:txBody>
-      </p:sp>
-      <p:sp>
-        <p:nvSpPr>
-          <p:cNvPr id="4" name="Text 2"/>
-          <p:cNvSpPr/>
-          <p:nvPr/>
-        </p:nvSpPr>
-        <p:spPr>
-          <a:xfrm>
-            <a:off x="548640" y="1463040"/>
-            <a:ext cx="10515600" cy="365760"/>
-          </a:xfrm>
-          <a:prstGeom prst="rect">
-            <a:avLst/>
-          </a:prstGeom>
-          <a:noFill/>
-          <a:ln/>
-        </p:spPr>
-        <p:txBody>
-          <a:bodyPr wrap="square" lIns="0" tIns="0" rIns="0" bIns="0" rtlCol="0" anchor="ctr"/>
-          <a:lstStyle/>
-          <a:p>
-            <a:pPr indent="0" marL="0">
-              <a:buNone/>
-            </a:pPr>
-            <a:r>
-              <a:rPr lang="en-US" sz="1250" i="1" dirty="0">
-                <a:solidFill>
-                  <a:srgbClr val="9AA2BD"/>
-                </a:solidFill>
-                <a:latin typeface="Calibri" pitchFamily="34" charset="0"/>
-                <a:ea typeface="Calibri" pitchFamily="34" charset="-122"/>
-                <a:cs typeface="Calibri" pitchFamily="34" charset="-120"/>
-              </a:rPr>
-              <a:t>Full pre-seed cap requested, split per CIP Spark's own 60/40 developmental-vs-commercialisation rule.</a:t>
-            </a:r>
-            <a:endParaRPr lang="en-US" sz="1250" dirty="0"/>
-          </a:p>
-        </p:txBody>
-      </p:sp>
-      <p:sp>
-        <p:nvSpPr>
-          <p:cNvPr id="5" name="Shape 3"/>
-          <p:cNvSpPr/>
-          <p:nvPr/>
-        </p:nvSpPr>
-        <p:spPr>
-          <a:xfrm>
-            <a:off x="548640" y="2011680"/>
-            <a:ext cx="6492240" cy="960120"/>
-          </a:xfrm>
-          <a:prstGeom prst="roundRect">
-            <a:avLst>
-              <a:gd name="adj" fmla="val 11429"/>
-            </a:avLst>
-          </a:prstGeom>
-          <a:solidFill>
-            <a:srgbClr val="241B00"/>
-          </a:solidFill>
-          <a:ln w="12700">
-            <a:solidFill>
-              <a:srgbClr val="FFD76B"/>
-            </a:solidFill>
-            <a:prstDash val="solid"/>
-          </a:ln>
-          <a:effectLst>
-            <a:outerShdw sx="100000" sy="100000" kx="0" ky="0" algn="bl" rotWithShape="0" blurRad="127000" dist="38100" dir="5400000">
-              <a:srgbClr val="000000">
-                <a:alpha val="35000"/>
-              </a:srgbClr>
-            </a:outerShdw>
-          </a:effectLst>
-        </p:spPr>
-      </p:sp>
-      <p:sp>
-        <p:nvSpPr>
-          <p:cNvPr id="6" name="Text 4"/>
-          <p:cNvSpPr/>
-          <p:nvPr/>
-        </p:nvSpPr>
-        <p:spPr>
-          <a:xfrm>
-            <a:off x="822960" y="2011680"/>
-            <a:ext cx="2377440" cy="960120"/>
-          </a:xfrm>
-          <a:prstGeom prst="rect">
-            <a:avLst/>
-          </a:prstGeom>
-          <a:noFill/>
-          <a:ln/>
-        </p:spPr>
-        <p:txBody>
-          <a:bodyPr wrap="square" lIns="0" tIns="0" rIns="0" bIns="0" rtlCol="0" anchor="ctr"/>
-          <a:lstStyle/>
-          <a:p>
-            <a:pPr indent="0" marL="0">
-              <a:buNone/>
-            </a:pPr>
-            <a:r>
-              <a:rPr lang="en-US" sz="2200" b="1" dirty="0">
-                <a:solidFill>
-                  <a:srgbClr val="FFD76B"/>
-                </a:solidFill>
-                <a:latin typeface="Cambria" pitchFamily="34" charset="0"/>
-                <a:ea typeface="Cambria" pitchFamily="34" charset="-122"/>
-                <a:cs typeface="Cambria" pitchFamily="34" charset="-120"/>
-              </a:rPr>
-              <a:t>60%  ·  RM90,000</a:t>
-            </a:r>
-            <a:endParaRPr lang="en-US" sz="2200" dirty="0"/>
-          </a:p>
-        </p:txBody>
-      </p:sp>
-      <p:sp>
-        <p:nvSpPr>
-          <p:cNvPr id="7" name="Text 5"/>
-          <p:cNvSpPr/>
-          <p:nvPr/>
-        </p:nvSpPr>
-        <p:spPr>
-          <a:xfrm>
-            <a:off x="3291840" y="2011680"/>
-            <a:ext cx="3657600" cy="960120"/>
-          </a:xfrm>
-          <a:prstGeom prst="rect">
-            <a:avLst/>
-          </a:prstGeom>
-          <a:noFill/>
-          <a:ln/>
-        </p:spPr>
-        <p:txBody>
-          <a:bodyPr wrap="square" lIns="0" tIns="0" rIns="0" bIns="0" rtlCol="0" anchor="ctr"/>
-          <a:lstStyle/>
-          <a:p>
-            <a:pPr indent="0" marL="0">
-              <a:lnSpc>
-                <a:spcPct val="120000"/>
-              </a:lnSpc>
-              <a:buNone/>
-            </a:pPr>
-            <a:r>
-              <a:rPr lang="en-US" sz="1050" dirty="0">
-                <a:solidFill>
-                  <a:srgbClr val="F2F2F2"/>
-                </a:solidFill>
-                <a:latin typeface="Calibri" pitchFamily="34" charset="0"/>
-                <a:ea typeface="Calibri" pitchFamily="34" charset="-122"/>
-                <a:cs typeface="Calibri" pitchFamily="34" charset="-120"/>
-              </a:rPr>
-              <a:t>Development — mobile app wrapper, teacher dashboard, curriculum content pipeline, new element/reaction batches</a:t>
-            </a:r>
-            <a:endParaRPr lang="en-US" sz="1050" dirty="0"/>
-          </a:p>
-        </p:txBody>
-      </p:sp>
-      <p:sp>
-        <p:nvSpPr>
-          <p:cNvPr id="8" name="Shape 6"/>
-          <p:cNvSpPr/>
-          <p:nvPr/>
-        </p:nvSpPr>
-        <p:spPr>
-          <a:xfrm>
-            <a:off x="548640" y="3108960"/>
-            <a:ext cx="6492240" cy="960120"/>
-          </a:xfrm>
-          <a:prstGeom prst="roundRect">
-            <a:avLst>
-              <a:gd name="adj" fmla="val 11429"/>
-            </a:avLst>
-          </a:prstGeom>
-          <a:solidFill>
-            <a:srgbClr val="0E2A2E"/>
-          </a:solidFill>
-          <a:ln w="12700">
-            <a:solidFill>
-              <a:srgbClr val="7EE3FF"/>
-            </a:solidFill>
-            <a:prstDash val="solid"/>
-          </a:ln>
-          <a:effectLst>
-            <a:outerShdw sx="100000" sy="100000" kx="0" ky="0" algn="bl" rotWithShape="0" blurRad="127000" dist="38100" dir="5400000">
-              <a:srgbClr val="000000">
-                <a:alpha val="35000"/>
-              </a:srgbClr>
-            </a:outerShdw>
-          </a:effectLst>
-        </p:spPr>
-      </p:sp>
-      <p:sp>
-        <p:nvSpPr>
-          <p:cNvPr id="9" name="Text 7"/>
-          <p:cNvSpPr/>
-          <p:nvPr/>
-        </p:nvSpPr>
-        <p:spPr>
-          <a:xfrm>
-            <a:off x="822960" y="3108960"/>
-            <a:ext cx="2377440" cy="960120"/>
-          </a:xfrm>
-          <a:prstGeom prst="rect">
-            <a:avLst/>
-          </a:prstGeom>
-          <a:noFill/>
-          <a:ln/>
-        </p:spPr>
-        <p:txBody>
-          <a:bodyPr wrap="square" lIns="0" tIns="0" rIns="0" bIns="0" rtlCol="0" anchor="ctr"/>
-          <a:lstStyle/>
-          <a:p>
-            <a:pPr indent="0" marL="0">
-              <a:buNone/>
-            </a:pPr>
-            <a:r>
-              <a:rPr lang="en-US" sz="2200" b="1" dirty="0">
-                <a:solidFill>
-                  <a:srgbClr val="7EE3FF"/>
-                </a:solidFill>
-                <a:latin typeface="Cambria" pitchFamily="34" charset="0"/>
-                <a:ea typeface="Cambria" pitchFamily="34" charset="-122"/>
-                <a:cs typeface="Cambria" pitchFamily="34" charset="-120"/>
-              </a:rPr>
-              <a:t>40%  ·  RM60,000</a:t>
-            </a:r>
-            <a:endParaRPr lang="en-US" sz="2200" dirty="0"/>
-          </a:p>
-        </p:txBody>
-      </p:sp>
-      <p:sp>
-        <p:nvSpPr>
-          <p:cNvPr id="10" name="Text 8"/>
-          <p:cNvSpPr/>
-          <p:nvPr/>
-        </p:nvSpPr>
-        <p:spPr>
-          <a:xfrm>
-            <a:off x="3291840" y="3108960"/>
-            <a:ext cx="3657600" cy="960120"/>
-          </a:xfrm>
-          <a:prstGeom prst="rect">
-            <a:avLst/>
-          </a:prstGeom>
-          <a:noFill/>
-          <a:ln/>
-        </p:spPr>
-        <p:txBody>
-          <a:bodyPr wrap="square" lIns="0" tIns="0" rIns="0" bIns="0" rtlCol="0" anchor="ctr"/>
-          <a:lstStyle/>
-          <a:p>
-            <a:pPr indent="0" marL="0">
-              <a:lnSpc>
-                <a:spcPct val="120000"/>
-              </a:lnSpc>
-              <a:buNone/>
-            </a:pPr>
-            <a:r>
-              <a:rPr lang="en-US" sz="1050" dirty="0">
-                <a:solidFill>
-                  <a:srgbClr val="F2F2F2"/>
-                </a:solidFill>
-                <a:latin typeface="Calibri" pitchFamily="34" charset="0"/>
-                <a:ea typeface="Calibri" pitchFamily="34" charset="-122"/>
-                <a:cs typeface="Calibri" pitchFamily="34" charset="-120"/>
-              </a:rPr>
-              <a:t>Commercialisation — school pilot rollouts, teacher training materials, IP/legal setup, marketing for launch</a:t>
-            </a:r>
-            <a:endParaRPr lang="en-US" sz="1050" dirty="0"/>
-          </a:p>
-        </p:txBody>
-      </p:sp>
-      <p:sp>
-        <p:nvSpPr>
-          <p:cNvPr id="11" name="Shape 9"/>
-          <p:cNvSpPr/>
-          <p:nvPr/>
-        </p:nvSpPr>
-        <p:spPr>
-          <a:xfrm>
-            <a:off x="7315200" y="2011680"/>
-            <a:ext cx="4343400" cy="4023360"/>
-          </a:xfrm>
-          <a:prstGeom prst="roundRect">
-            <a:avLst>
-              <a:gd name="adj" fmla="val 2727"/>
-            </a:avLst>
-          </a:prstGeom>
-          <a:solidFill>
-            <a:srgbClr val="181C33"/>
-          </a:solidFill>
-          <a:ln w="12700">
-            <a:solidFill>
-              <a:srgbClr val="2C3252"/>
-            </a:solidFill>
-            <a:prstDash val="solid"/>
-          </a:ln>
-          <a:effectLst>
-            <a:outerShdw sx="100000" sy="100000" kx="0" ky="0" algn="bl" rotWithShape="0" blurRad="127000" dist="38100" dir="5400000">
-              <a:srgbClr val="000000">
-                <a:alpha val="35000"/>
-              </a:srgbClr>
-            </a:outerShdw>
-          </a:effectLst>
-        </p:spPr>
-      </p:sp>
-      <p:sp>
-        <p:nvSpPr>
-          <p:cNvPr id="12" name="Text 10"/>
-          <p:cNvSpPr/>
-          <p:nvPr/>
-        </p:nvSpPr>
-        <p:spPr>
-          <a:xfrm>
-            <a:off x="7589520" y="2194560"/>
-            <a:ext cx="3840480" cy="365760"/>
-          </a:xfrm>
-          <a:prstGeom prst="rect">
-            <a:avLst/>
-          </a:prstGeom>
-          <a:noFill/>
-          <a:ln/>
-        </p:spPr>
-        <p:txBody>
-          <a:bodyPr wrap="square" lIns="0" tIns="0" rIns="0" bIns="0" rtlCol="0" anchor="ctr"/>
-          <a:lstStyle/>
-          <a:p>
-            <a:pPr indent="0" marL="0">
-              <a:buNone/>
-            </a:pPr>
-            <a:r>
-              <a:rPr lang="en-US" sz="1300" b="1" dirty="0">
-                <a:solidFill>
-                  <a:srgbClr val="FFFFFF"/>
-                </a:solidFill>
-                <a:latin typeface="Calibri" pitchFamily="34" charset="0"/>
-                <a:ea typeface="Calibri" pitchFamily="34" charset="-122"/>
-                <a:cs typeface="Calibri" pitchFamily="34" charset="-120"/>
-              </a:rPr>
-              <a:t>Milestones this funds</a:t>
-            </a:r>
-            <a:endParaRPr lang="en-US" sz="1300" dirty="0"/>
-          </a:p>
-        </p:txBody>
-      </p:sp>
-      <p:sp>
-        <p:nvSpPr>
-          <p:cNvPr id="13" name="Text 11"/>
-          <p:cNvSpPr/>
-          <p:nvPr/>
-        </p:nvSpPr>
-        <p:spPr>
-          <a:xfrm>
-            <a:off x="7589520" y="2651760"/>
-            <a:ext cx="274320" cy="365760"/>
-          </a:xfrm>
-          <a:prstGeom prst="rect">
-            <a:avLst/>
-          </a:prstGeom>
-          <a:noFill/>
-          <a:ln/>
-        </p:spPr>
-        <p:txBody>
-          <a:bodyPr wrap="square" lIns="0" tIns="0" rIns="0" bIns="0" rtlCol="0" anchor="ctr"/>
-          <a:lstStyle/>
-          <a:p>
-            <a:pPr indent="0" marL="0">
-              <a:buNone/>
-            </a:pPr>
-            <a:r>
-              <a:rPr lang="en-US" sz="1200" b="1" dirty="0">
-                <a:solidFill>
-                  <a:srgbClr val="FFD76B"/>
-                </a:solidFill>
-              </a:rPr>
-              <a:t>→</a:t>
-            </a:r>
-            <a:endParaRPr lang="en-US" sz="1200" dirty="0"/>
-          </a:p>
-        </p:txBody>
-      </p:sp>
-      <p:sp>
-        <p:nvSpPr>
-          <p:cNvPr id="14" name="Text 12"/>
-          <p:cNvSpPr/>
-          <p:nvPr/>
-        </p:nvSpPr>
-        <p:spPr>
-          <a:xfrm>
-            <a:off x="7909560" y="2651760"/>
-            <a:ext cx="3566160" cy="502920"/>
-          </a:xfrm>
-          <a:prstGeom prst="rect">
-            <a:avLst/>
-          </a:prstGeom>
-          <a:noFill/>
-          <a:ln/>
-        </p:spPr>
-        <p:txBody>
-          <a:bodyPr wrap="square" lIns="0" tIns="0" rIns="0" bIns="0" rtlCol="0" anchor="ctr"/>
-          <a:lstStyle/>
-          <a:p>
-            <a:pPr indent="0" marL="0">
-              <a:lnSpc>
-                <a:spcPct val="115000"/>
-              </a:lnSpc>
-              <a:buNone/>
-            </a:pPr>
-            <a:r>
-              <a:rPr lang="en-US" sz="1100" dirty="0">
-                <a:solidFill>
-                  <a:srgbClr val="9AA2BD"/>
-                </a:solidFill>
-                <a:latin typeface="Calibri" pitchFamily="34" charset="0"/>
-                <a:ea typeface="Calibri" pitchFamily="34" charset="-122"/>
-                <a:cs typeface="Calibri" pitchFamily="34" charset="-120"/>
-              </a:rPr>
-              <a:t>3 signed school pilots</a:t>
-            </a:r>
-            <a:endParaRPr lang="en-US" sz="1100" dirty="0"/>
-          </a:p>
-        </p:txBody>
-      </p:sp>
-      <p:sp>
-        <p:nvSpPr>
-          <p:cNvPr id="15" name="Text 13"/>
-          <p:cNvSpPr/>
-          <p:nvPr/>
-        </p:nvSpPr>
-        <p:spPr>
-          <a:xfrm>
-            <a:off x="7589520" y="3310128"/>
-            <a:ext cx="274320" cy="365760"/>
-          </a:xfrm>
-          <a:prstGeom prst="rect">
-            <a:avLst/>
-          </a:prstGeom>
-          <a:noFill/>
-          <a:ln/>
-        </p:spPr>
-        <p:txBody>
-          <a:bodyPr wrap="square" lIns="0" tIns="0" rIns="0" bIns="0" rtlCol="0" anchor="ctr"/>
-          <a:lstStyle/>
-          <a:p>
-            <a:pPr indent="0" marL="0">
-              <a:buNone/>
-            </a:pPr>
-            <a:r>
-              <a:rPr lang="en-US" sz="1200" b="1" dirty="0">
-                <a:solidFill>
-                  <a:srgbClr val="FFD76B"/>
-                </a:solidFill>
-              </a:rPr>
-              <a:t>→</a:t>
-            </a:r>
-            <a:endParaRPr lang="en-US" sz="1200" dirty="0"/>
-          </a:p>
-        </p:txBody>
-      </p:sp>
-      <p:sp>
-        <p:nvSpPr>
-          <p:cNvPr id="16" name="Text 14"/>
-          <p:cNvSpPr/>
-          <p:nvPr/>
-        </p:nvSpPr>
-        <p:spPr>
-          <a:xfrm>
-            <a:off x="7909560" y="3310128"/>
-            <a:ext cx="3566160" cy="502920"/>
-          </a:xfrm>
-          <a:prstGeom prst="rect">
-            <a:avLst/>
-          </a:prstGeom>
-          <a:noFill/>
-          <a:ln/>
-        </p:spPr>
-        <p:txBody>
-          <a:bodyPr wrap="square" lIns="0" tIns="0" rIns="0" bIns="0" rtlCol="0" anchor="ctr"/>
-          <a:lstStyle/>
-          <a:p>
-            <a:pPr indent="0" marL="0">
-              <a:lnSpc>
-                <a:spcPct val="115000"/>
-              </a:lnSpc>
-              <a:buNone/>
-            </a:pPr>
-            <a:r>
-              <a:rPr lang="en-US" sz="1100" dirty="0">
-                <a:solidFill>
-                  <a:srgbClr val="9AA2BD"/>
-                </a:solidFill>
-                <a:latin typeface="Calibri" pitchFamily="34" charset="0"/>
-                <a:ea typeface="Calibri" pitchFamily="34" charset="-122"/>
-                <a:cs typeface="Calibri" pitchFamily="34" charset="-120"/>
-              </a:rPr>
-              <a:t>Teacher dashboard MVP live</a:t>
-            </a:r>
-            <a:endParaRPr lang="en-US" sz="1100" dirty="0"/>
-          </a:p>
-        </p:txBody>
-      </p:sp>
-      <p:sp>
-        <p:nvSpPr>
-          <p:cNvPr id="17" name="Text 15"/>
-          <p:cNvSpPr/>
-          <p:nvPr/>
-        </p:nvSpPr>
-        <p:spPr>
-          <a:xfrm>
-            <a:off x="7589520" y="3968496"/>
-            <a:ext cx="274320" cy="365760"/>
-          </a:xfrm>
-          <a:prstGeom prst="rect">
-            <a:avLst/>
-          </a:prstGeom>
-          <a:noFill/>
-          <a:ln/>
-        </p:spPr>
-        <p:txBody>
-          <a:bodyPr wrap="square" lIns="0" tIns="0" rIns="0" bIns="0" rtlCol="0" anchor="ctr"/>
-          <a:lstStyle/>
-          <a:p>
-            <a:pPr indent="0" marL="0">
-              <a:buNone/>
-            </a:pPr>
-            <a:r>
-              <a:rPr lang="en-US" sz="1200" b="1" dirty="0">
-                <a:solidFill>
-                  <a:srgbClr val="FFD76B"/>
-                </a:solidFill>
-              </a:rPr>
-              <a:t>→</a:t>
-            </a:r>
-            <a:endParaRPr lang="en-US" sz="1200" dirty="0"/>
-          </a:p>
-        </p:txBody>
-      </p:sp>
-      <p:sp>
-        <p:nvSpPr>
-          <p:cNvPr id="18" name="Text 16"/>
-          <p:cNvSpPr/>
-          <p:nvPr/>
-        </p:nvSpPr>
-        <p:spPr>
-          <a:xfrm>
-            <a:off x="7909560" y="3968496"/>
-            <a:ext cx="3566160" cy="502920"/>
-          </a:xfrm>
-          <a:prstGeom prst="rect">
-            <a:avLst/>
-          </a:prstGeom>
-          <a:noFill/>
-          <a:ln/>
-        </p:spPr>
-        <p:txBody>
-          <a:bodyPr wrap="square" lIns="0" tIns="0" rIns="0" bIns="0" rtlCol="0" anchor="ctr"/>
-          <a:lstStyle/>
-          <a:p>
-            <a:pPr indent="0" marL="0">
-              <a:lnSpc>
-                <a:spcPct val="115000"/>
-              </a:lnSpc>
-              <a:buNone/>
-            </a:pPr>
-            <a:r>
-              <a:rPr lang="en-US" sz="1100" dirty="0">
-                <a:solidFill>
-                  <a:srgbClr val="9AA2BD"/>
-                </a:solidFill>
-                <a:latin typeface="Calibri" pitchFamily="34" charset="0"/>
-                <a:ea typeface="Calibri" pitchFamily="34" charset="-122"/>
-                <a:cs typeface="Calibri" pitchFamily="34" charset="-120"/>
-              </a:rPr>
-              <a:t>Chosen business model validated with real paying users</a:t>
-            </a:r>
-            <a:endParaRPr lang="en-US" sz="1100" dirty="0"/>
-          </a:p>
-        </p:txBody>
-      </p:sp>
-      <p:sp>
-        <p:nvSpPr>
-          <p:cNvPr id="19" name="Text 17"/>
-          <p:cNvSpPr/>
-          <p:nvPr/>
-        </p:nvSpPr>
-        <p:spPr>
-          <a:xfrm>
-            <a:off x="7589520" y="4626864"/>
-            <a:ext cx="274320" cy="365760"/>
-          </a:xfrm>
-          <a:prstGeom prst="rect">
-            <a:avLst/>
-          </a:prstGeom>
-          <a:noFill/>
-          <a:ln/>
-        </p:spPr>
-        <p:txBody>
-          <a:bodyPr wrap="square" lIns="0" tIns="0" rIns="0" bIns="0" rtlCol="0" anchor="ctr"/>
-          <a:lstStyle/>
-          <a:p>
-            <a:pPr indent="0" marL="0">
-              <a:buNone/>
-            </a:pPr>
-            <a:r>
-              <a:rPr lang="en-US" sz="1200" b="1" dirty="0">
-                <a:solidFill>
-                  <a:srgbClr val="FFD76B"/>
-                </a:solidFill>
-              </a:rPr>
-              <a:t>→</a:t>
-            </a:r>
-            <a:endParaRPr lang="en-US" sz="1200" dirty="0"/>
-          </a:p>
-        </p:txBody>
-      </p:sp>
-      <p:sp>
-        <p:nvSpPr>
-          <p:cNvPr id="20" name="Text 18"/>
-          <p:cNvSpPr/>
-          <p:nvPr/>
-        </p:nvSpPr>
-        <p:spPr>
-          <a:xfrm>
-            <a:off x="7909560" y="4626864"/>
-            <a:ext cx="3566160" cy="502920"/>
-          </a:xfrm>
-          <a:prstGeom prst="rect">
-            <a:avLst/>
-          </a:prstGeom>
-          <a:noFill/>
-          <a:ln/>
-        </p:spPr>
-        <p:txBody>
-          <a:bodyPr wrap="square" lIns="0" tIns="0" rIns="0" bIns="0" rtlCol="0" anchor="ctr"/>
-          <a:lstStyle/>
-          <a:p>
-            <a:pPr indent="0" marL="0">
-              <a:lnSpc>
-                <a:spcPct val="115000"/>
-              </a:lnSpc>
-              <a:buNone/>
-            </a:pPr>
-            <a:r>
-              <a:rPr lang="en-US" sz="1100" dirty="0">
-                <a:solidFill>
-                  <a:srgbClr val="9AA2BD"/>
-                </a:solidFill>
-                <a:latin typeface="Calibri" pitchFamily="34" charset="0"/>
-                <a:ea typeface="Calibri" pitchFamily="34" charset="-122"/>
-                <a:cs typeface="Calibri" pitchFamily="34" charset="-120"/>
-              </a:rPr>
-              <a:t>Ready for CIP Sprint (seed) follow-on</a:t>
-            </a:r>
-            <a:endParaRPr lang="en-US" sz="1100" dirty="0"/>
-          </a:p>
-        </p:txBody>
-      </p:sp>
-      <p:sp>
-        <p:nvSpPr>
-          <p:cNvPr id="21" name="Text 19"/>
-          <p:cNvSpPr/>
-          <p:nvPr/>
-        </p:nvSpPr>
-        <p:spPr>
-          <a:xfrm>
-            <a:off x="11430000" y="6446520"/>
-            <a:ext cx="548640" cy="274320"/>
-          </a:xfrm>
-          <a:prstGeom prst="rect">
-            <a:avLst/>
-          </a:prstGeom>
-          <a:noFill/>
-          <a:ln/>
-        </p:spPr>
-        <p:txBody>
-          <a:bodyPr wrap="square" lIns="0" tIns="0" rIns="0" bIns="0" rtlCol="0" anchor="ctr"/>
-          <a:lstStyle/>
-          <a:p>
-            <a:pPr algn="r" indent="0" marL="0">
-              <a:buNone/>
-            </a:pPr>
-            <a:r>
-              <a:rPr lang="en-US" sz="1000" dirty="0">
-                <a:solidFill>
-                  <a:srgbClr val="9AA2BD"/>
-                </a:solidFill>
-                <a:latin typeface="Calibri" pitchFamily="34" charset="0"/>
-                <a:ea typeface="Calibri" pitchFamily="34" charset="-122"/>
-                <a:cs typeface="Calibri" pitchFamily="34" charset="-120"/>
-              </a:rPr>
-              <a:t>09</a:t>
-            </a:r>
-            <a:endParaRPr lang="en-US" sz="1000" dirty="0"/>
-          </a:p>
-        </p:txBody>
-      </p:sp>
-      <p:sp>
-        <p:nvSpPr>
-          <p:cNvPr id="22" name="Text 20"/>
           <p:cNvSpPr/>
           <p:nvPr/>
         </p:nvSpPr>

--- a/pitch/Sandchemy_CIP_Spark_Pitch_Deck.pptx
+++ b/pitch/Sandchemy_CIP_Spark_Pitch_Deck.pptx
@@ -11,10 +11,12 @@
     <p:sldId id="259" r:id="rId5"/>
     <p:sldId id="260" r:id="rId6"/>
     <p:sldId id="261" r:id="rId7"/>
+    <p:sldId id="268" r:id="rId19"/>
     <p:sldId id="262" r:id="rId8"/>
     <p:sldId id="263" r:id="rId9"/>
     <p:sldId id="264" r:id="rId10"/>
     <p:sldId id="265" r:id="rId11"/>
+    <p:sldId id="269" r:id="rId20"/>
     <p:sldId id="266" r:id="rId12"/>
     <p:sldId id="267" r:id="rId13"/>
   </p:sldIdLst>
@@ -2139,7 +2141,7 @@
                 <a:ea typeface="Calibri" pitchFamily="34" charset="-122"/>
                 <a:cs typeface="Calibri" pitchFamily="34" charset="-120"/>
               </a:rPr>
-              <a:t>July 2026  ·  sandchemy.app  ·  cookingwithcattitude@gmail.com</a:t>
+              <a:t>July 2026  ·  sandchemy.app  ·  aliff@sheikhhussien.com</a:t>
             </a:r>
             <a:endParaRPr lang="en-US" sz="1100" dirty="0"/>
           </a:p>
@@ -3020,7 +3022,7 @@
                 <a:ea typeface="Calibri" pitchFamily="34" charset="-122"/>
                 <a:cs typeface="Calibri" pitchFamily="34" charset="-120"/>
               </a:rPr>
-              <a:t>10</a:t>
+              <a:t>11</a:t>
             </a:r>
             <a:endParaRPr lang="en-US" sz="1000" dirty="0"/>
           </a:p>
@@ -3812,7 +3814,7 @@
                 <a:ea typeface="Calibri" pitchFamily="34" charset="-122"/>
                 <a:cs typeface="Calibri" pitchFamily="34" charset="-120"/>
               </a:rPr>
-              <a:t>11</a:t>
+              <a:t>13</a:t>
             </a:r>
             <a:endParaRPr lang="en-US" sz="1000" dirty="0"/>
           </a:p>
@@ -4107,7 +4109,7 @@
                 <a:ea typeface="Calibri" pitchFamily="34" charset="-122"/>
                 <a:cs typeface="Calibri" pitchFamily="34" charset="-120"/>
               </a:rPr>
-              <a:t>Aliff Hussien  ·  cookingwithcattitude@gmail.com</a:t>
+              <a:t>Aliff Hussien  ·  aliff@sheikhhussien.com</a:t>
             </a:r>
             <a:endParaRPr lang="en-US" sz="1200" dirty="0"/>
           </a:p>
@@ -4149,6 +4151,1553 @@
               <a:t>Thank you</a:t>
             </a:r>
             <a:endParaRPr lang="en-US" sz="1600" dirty="0"/>
+          </a:p>
+        </p:txBody>
+      </p:sp>
+    </p:spTree>
+  </p:cSld>
+  <p:clrMapOvr>
+    <a:masterClrMapping/>
+  </p:clrMapOvr>
+</p:sld>
+</file>
+
+<file path=ppt/slides/slide13.xml><?xml version="1.0" encoding="utf-8"?>
+<p:sld xmlns:a="http://schemas.openxmlformats.org/drawingml/2006/main" xmlns:r="http://schemas.openxmlformats.org/officeDocument/2006/relationships" xmlns:p="http://schemas.openxmlformats.org/presentationml/2006/main">
+  <p:cSld name="Slide 13">
+    <p:bg>
+      <p:bgPr>
+        <a:solidFill>
+          <a:srgbClr val="0D0F1A"/>
+        </a:solidFill>
+      </p:bgPr>
+    </p:bg>
+    <p:spTree>
+      <p:nvGrpSpPr>
+        <p:cNvPr id="1" name=""/>
+        <p:cNvGrpSpPr/>
+        <p:nvPr/>
+      </p:nvGrpSpPr>
+      <p:grpSpPr>
+        <a:xfrm>
+          <a:off x="0" y="0"/>
+          <a:ext cx="0" cy="0"/>
+          <a:chOff x="0" y="0"/>
+          <a:chExt cx="0" cy="0"/>
+        </a:xfrm>
+      </p:grpSpPr>
+      <p:sp>
+        <p:nvSpPr>
+          <p:cNvPr id="2" name="Text 0"/>
+          <p:cNvSpPr/>
+          <p:nvPr/>
+        </p:nvSpPr>
+        <p:spPr>
+          <a:xfrm>
+            <a:off x="548640" y="411480"/>
+            <a:ext cx="5486400" cy="365760"/>
+          </a:xfrm>
+          <a:prstGeom prst="rect">
+            <a:avLst/>
+          </a:prstGeom>
+          <a:noFill/>
+          <a:ln/>
+        </p:spPr>
+        <p:txBody>
+          <a:bodyPr wrap="square" lIns="0" tIns="0" rIns="0" bIns="0" rtlCol="0" anchor="ctr"/>
+          <a:lstStyle/>
+          <a:p>
+            <a:pPr indent="0" marL="0">
+              <a:buNone/>
+            </a:pPr>
+            <a:r>
+              <a:rPr lang="en-US" sz="1300" b="1" spc="200" kern="0" dirty="0">
+                <a:solidFill>
+                  <a:srgbClr val="FFD76B"/>
+                </a:solidFill>
+                <a:latin typeface="Calibri" pitchFamily="34" charset="0"/>
+                <a:ea typeface="Calibri" pitchFamily="34" charset="-122"/>
+                <a:cs typeface="Calibri" pitchFamily="34" charset="-120"/>
+              </a:rPr>
+              <a:t>CATEGORY</a:t>
+            </a:r>
+            <a:endParaRPr lang="en-US" sz="1300" dirty="0"/>
+          </a:p>
+        </p:txBody>
+      </p:sp>
+      <p:sp>
+        <p:nvSpPr>
+          <p:cNvPr id="3" name="Text 1"/>
+          <p:cNvSpPr/>
+          <p:nvPr/>
+        </p:nvSpPr>
+        <p:spPr>
+          <a:xfrm>
+            <a:off x="548640" y="777240"/>
+            <a:ext cx="10972800" cy="822960"/>
+          </a:xfrm>
+          <a:prstGeom prst="rect">
+            <a:avLst/>
+          </a:prstGeom>
+          <a:noFill/>
+          <a:ln/>
+        </p:spPr>
+        <p:txBody>
+          <a:bodyPr wrap="square" lIns="0" tIns="0" rIns="0" bIns="0" rtlCol="0" anchor="ctr"/>
+          <a:lstStyle/>
+          <a:p>
+            <a:pPr indent="0" marL="0">
+              <a:buNone/>
+            </a:pPr>
+            <a:r>
+              <a:rPr lang="en-US" sz="3200" b="1" dirty="0">
+                <a:solidFill>
+                  <a:srgbClr val="FFFFFF"/>
+                </a:solidFill>
+                <a:latin typeface="Cambria" pitchFamily="34" charset="0"/>
+                <a:ea typeface="Cambria" pitchFamily="34" charset="-122"/>
+                <a:cs typeface="Cambria" pitchFamily="34" charset="-120"/>
+              </a:rPr>
+              <a:t>Not just "edtech" — a named category</a:t>
+            </a:r>
+            <a:endParaRPr lang="en-US" sz="3200" dirty="0"/>
+          </a:p>
+        </p:txBody>
+      </p:sp>
+      <p:sp>
+        <p:nvSpPr>
+          <p:cNvPr id="4" name="Shape 2"/>
+          <p:cNvSpPr/>
+          <p:nvPr/>
+        </p:nvSpPr>
+        <p:spPr>
+          <a:xfrm>
+            <a:off x="548640" y="1828800"/>
+            <a:ext cx="3520440" cy="1417320"/>
+          </a:xfrm>
+          <a:prstGeom prst="roundRect">
+            <a:avLst>
+              <a:gd name="adj" fmla="val 7742"/>
+            </a:avLst>
+          </a:prstGeom>
+          <a:solidFill>
+            <a:srgbClr val="181C33"/>
+          </a:solidFill>
+          <a:ln w="12700">
+            <a:solidFill>
+              <a:srgbClr val="2C3252"/>
+            </a:solidFill>
+            <a:prstDash val="solid"/>
+          </a:ln>
+          <a:effectLst>
+            <a:outerShdw sx="100000" sy="100000" kx="0" ky="0" algn="bl" rotWithShape="0" blurRad="127000" dist="38100" dir="5400000">
+              <a:srgbClr val="000000">
+                <a:alpha val="35000"/>
+              </a:srgbClr>
+            </a:outerShdw>
+          </a:effectLst>
+        </p:spPr>
+      </p:sp>
+      <p:sp>
+        <p:nvSpPr>
+          <p:cNvPr id="5" name="Text 3"/>
+          <p:cNvSpPr/>
+          <p:nvPr/>
+        </p:nvSpPr>
+        <p:spPr>
+          <a:xfrm>
+            <a:off x="548640" y="1965960"/>
+            <a:ext cx="3520440" cy="685800"/>
+          </a:xfrm>
+          <a:prstGeom prst="rect">
+            <a:avLst/>
+          </a:prstGeom>
+          <a:noFill/>
+          <a:ln/>
+        </p:spPr>
+        <p:txBody>
+          <a:bodyPr wrap="square" lIns="0" tIns="0" rIns="0" bIns="0" rtlCol="0" anchor="ctr"/>
+          <a:lstStyle/>
+          <a:p>
+            <a:pPr algn="ctr" indent="0" marL="0">
+              <a:buNone/>
+            </a:pPr>
+            <a:r>
+              <a:rPr lang="en-US" sz="3200" b="1" dirty="0">
+                <a:solidFill>
+                  <a:srgbClr val="FFD76B"/>
+                </a:solidFill>
+                <a:latin typeface="Cambria" pitchFamily="34" charset="0"/>
+                <a:ea typeface="Cambria" pitchFamily="34" charset="-122"/>
+                <a:cs typeface="Cambria" pitchFamily="34" charset="-120"/>
+              </a:rPr>
+              <a:t>USD 1.5B</a:t>
+            </a:r>
+            <a:endParaRPr lang="en-US" sz="3200" dirty="0"/>
+          </a:p>
+        </p:txBody>
+      </p:sp>
+      <p:sp>
+        <p:nvSpPr>
+          <p:cNvPr id="6" name="Text 4"/>
+          <p:cNvSpPr/>
+          <p:nvPr/>
+        </p:nvSpPr>
+        <p:spPr>
+          <a:xfrm>
+            <a:off x="731520" y="2651760"/>
+            <a:ext cx="3154680" cy="502920"/>
+          </a:xfrm>
+          <a:prstGeom prst="rect">
+            <a:avLst/>
+          </a:prstGeom>
+          <a:noFill/>
+          <a:ln/>
+        </p:spPr>
+        <p:txBody>
+          <a:bodyPr wrap="square" lIns="0" tIns="0" rIns="0" bIns="0" rtlCol="0" anchor="ctr"/>
+          <a:lstStyle/>
+          <a:p>
+            <a:pPr algn="ctr" indent="0" marL="0">
+              <a:buNone/>
+            </a:pPr>
+            <a:r>
+              <a:rPr lang="en-US" sz="1100" dirty="0">
+                <a:solidFill>
+                  <a:srgbClr val="9AA2BD"/>
+                </a:solidFill>
+                <a:latin typeface="Calibri" pitchFamily="34" charset="0"/>
+                <a:ea typeface="Calibri" pitchFamily="34" charset="-122"/>
+                <a:cs typeface="Calibri" pitchFamily="34" charset="-120"/>
+              </a:rPr>
+              <a:t>Global virtual-lab / STEM-sim market, 2024</a:t>
+            </a:r>
+            <a:endParaRPr lang="en-US" sz="1100" dirty="0"/>
+          </a:p>
+        </p:txBody>
+      </p:sp>
+      <p:sp>
+        <p:nvSpPr>
+          <p:cNvPr id="7" name="Shape 5"/>
+          <p:cNvSpPr/>
+          <p:nvPr/>
+        </p:nvSpPr>
+        <p:spPr>
+          <a:xfrm>
+            <a:off x="4297680" y="1828800"/>
+            <a:ext cx="3520440" cy="1417320"/>
+          </a:xfrm>
+          <a:prstGeom prst="roundRect">
+            <a:avLst>
+              <a:gd name="adj" fmla="val 7742"/>
+            </a:avLst>
+          </a:prstGeom>
+          <a:solidFill>
+            <a:srgbClr val="181C33"/>
+          </a:solidFill>
+          <a:ln w="12700">
+            <a:solidFill>
+              <a:srgbClr val="2C3252"/>
+            </a:solidFill>
+            <a:prstDash val="solid"/>
+          </a:ln>
+          <a:effectLst>
+            <a:outerShdw sx="100000" sy="100000" kx="0" ky="0" algn="bl" rotWithShape="0" blurRad="127000" dist="38100" dir="5400000">
+              <a:srgbClr val="000000">
+                <a:alpha val="35000"/>
+              </a:srgbClr>
+            </a:outerShdw>
+          </a:effectLst>
+        </p:spPr>
+      </p:sp>
+      <p:sp>
+        <p:nvSpPr>
+          <p:cNvPr id="8" name="Text 6"/>
+          <p:cNvSpPr/>
+          <p:nvPr/>
+        </p:nvSpPr>
+        <p:spPr>
+          <a:xfrm>
+            <a:off x="4297680" y="1965960"/>
+            <a:ext cx="3520440" cy="685800"/>
+          </a:xfrm>
+          <a:prstGeom prst="rect">
+            <a:avLst/>
+          </a:prstGeom>
+          <a:noFill/>
+          <a:ln/>
+        </p:spPr>
+        <p:txBody>
+          <a:bodyPr wrap="square" lIns="0" tIns="0" rIns="0" bIns="0" rtlCol="0" anchor="ctr"/>
+          <a:lstStyle/>
+          <a:p>
+            <a:pPr algn="ctr" indent="0" marL="0">
+              <a:buNone/>
+            </a:pPr>
+            <a:r>
+              <a:rPr lang="en-US" sz="3200" b="1" dirty="0">
+                <a:solidFill>
+                  <a:srgbClr val="FFD76B"/>
+                </a:solidFill>
+                <a:latin typeface="Cambria" pitchFamily="34" charset="0"/>
+                <a:ea typeface="Cambria" pitchFamily="34" charset="-122"/>
+                <a:cs typeface="Cambria" pitchFamily="34" charset="-120"/>
+              </a:rPr>
+              <a:t>USD 4.2B</a:t>
+            </a:r>
+            <a:endParaRPr lang="en-US" sz="3200" dirty="0"/>
+          </a:p>
+        </p:txBody>
+      </p:sp>
+      <p:sp>
+        <p:nvSpPr>
+          <p:cNvPr id="9" name="Text 7"/>
+          <p:cNvSpPr/>
+          <p:nvPr/>
+        </p:nvSpPr>
+        <p:spPr>
+          <a:xfrm>
+            <a:off x="4480560" y="2651760"/>
+            <a:ext cx="3154680" cy="502920"/>
+          </a:xfrm>
+          <a:prstGeom prst="rect">
+            <a:avLst/>
+          </a:prstGeom>
+          <a:noFill/>
+          <a:ln/>
+        </p:spPr>
+        <p:txBody>
+          <a:bodyPr wrap="square" lIns="0" tIns="0" rIns="0" bIns="0" rtlCol="0" anchor="ctr"/>
+          <a:lstStyle/>
+          <a:p>
+            <a:pPr algn="ctr" indent="0" marL="0">
+              <a:buNone/>
+            </a:pPr>
+            <a:r>
+              <a:rPr lang="en-US" sz="1100" dirty="0">
+                <a:solidFill>
+                  <a:srgbClr val="9AA2BD"/>
+                </a:solidFill>
+                <a:latin typeface="Calibri" pitchFamily="34" charset="0"/>
+                <a:ea typeface="Calibri" pitchFamily="34" charset="-122"/>
+                <a:cs typeface="Calibri" pitchFamily="34" charset="-120"/>
+              </a:rPr>
+              <a:t>Projected size by 2033</a:t>
+            </a:r>
+            <a:endParaRPr lang="en-US" sz="1100" dirty="0"/>
+          </a:p>
+        </p:txBody>
+      </p:sp>
+      <p:sp>
+        <p:nvSpPr>
+          <p:cNvPr id="10" name="Shape 8"/>
+          <p:cNvSpPr/>
+          <p:nvPr/>
+        </p:nvSpPr>
+        <p:spPr>
+          <a:xfrm>
+            <a:off x="8046720" y="1828800"/>
+            <a:ext cx="3520440" cy="1417320"/>
+          </a:xfrm>
+          <a:prstGeom prst="roundRect">
+            <a:avLst>
+              <a:gd name="adj" fmla="val 7742"/>
+            </a:avLst>
+          </a:prstGeom>
+          <a:solidFill>
+            <a:srgbClr val="181C33"/>
+          </a:solidFill>
+          <a:ln w="12700">
+            <a:solidFill>
+              <a:srgbClr val="2C3252"/>
+            </a:solidFill>
+            <a:prstDash val="solid"/>
+          </a:ln>
+          <a:effectLst>
+            <a:outerShdw sx="100000" sy="100000" kx="0" ky="0" algn="bl" rotWithShape="0" blurRad="127000" dist="38100" dir="5400000">
+              <a:srgbClr val="000000">
+                <a:alpha val="35000"/>
+              </a:srgbClr>
+            </a:outerShdw>
+          </a:effectLst>
+        </p:spPr>
+      </p:sp>
+      <p:sp>
+        <p:nvSpPr>
+          <p:cNvPr id="11" name="Text 9"/>
+          <p:cNvSpPr/>
+          <p:nvPr/>
+        </p:nvSpPr>
+        <p:spPr>
+          <a:xfrm>
+            <a:off x="8046720" y="1965960"/>
+            <a:ext cx="3520440" cy="685800"/>
+          </a:xfrm>
+          <a:prstGeom prst="rect">
+            <a:avLst/>
+          </a:prstGeom>
+          <a:noFill/>
+          <a:ln/>
+        </p:spPr>
+        <p:txBody>
+          <a:bodyPr wrap="square" lIns="0" tIns="0" rIns="0" bIns="0" rtlCol="0" anchor="ctr"/>
+          <a:lstStyle/>
+          <a:p>
+            <a:pPr algn="ctr" indent="0" marL="0">
+              <a:buNone/>
+            </a:pPr>
+            <a:r>
+              <a:rPr lang="en-US" sz="3200" b="1" dirty="0">
+                <a:solidFill>
+                  <a:srgbClr val="FFD76B"/>
+                </a:solidFill>
+                <a:latin typeface="Cambria" pitchFamily="34" charset="0"/>
+                <a:ea typeface="Cambria" pitchFamily="34" charset="-122"/>
+                <a:cs typeface="Cambria" pitchFamily="34" charset="-120"/>
+              </a:rPr>
+              <a:t>3</a:t>
+            </a:r>
+            <a:endParaRPr lang="en-US" sz="3200" dirty="0"/>
+          </a:p>
+        </p:txBody>
+      </p:sp>
+      <p:sp>
+        <p:nvSpPr>
+          <p:cNvPr id="12" name="Text 10"/>
+          <p:cNvSpPr/>
+          <p:nvPr/>
+        </p:nvSpPr>
+        <p:spPr>
+          <a:xfrm>
+            <a:off x="8229600" y="2651760"/>
+            <a:ext cx="3154680" cy="502920"/>
+          </a:xfrm>
+          <a:prstGeom prst="rect">
+            <a:avLst/>
+          </a:prstGeom>
+          <a:noFill/>
+          <a:ln/>
+        </p:spPr>
+        <p:txBody>
+          <a:bodyPr wrap="square" lIns="0" tIns="0" rIns="0" bIns="0" rtlCol="0" anchor="ctr"/>
+          <a:lstStyle/>
+          <a:p>
+            <a:pPr algn="ctr" indent="0" marL="0">
+              <a:buNone/>
+            </a:pPr>
+            <a:r>
+              <a:rPr lang="en-US" sz="1100" dirty="0">
+                <a:solidFill>
+                  <a:srgbClr val="9AA2BD"/>
+                </a:solidFill>
+                <a:latin typeface="Calibri" pitchFamily="34" charset="0"/>
+                <a:ea typeface="Calibri" pitchFamily="34" charset="-122"/>
+                <a:cs typeface="Calibri" pitchFamily="34" charset="-120"/>
+              </a:rPr>
+              <a:t>Named global comparables (PhET, Labster/PraxiLabs, Minecraft Education)</a:t>
+            </a:r>
+            <a:endParaRPr lang="en-US" sz="1100" dirty="0"/>
+          </a:p>
+        </p:txBody>
+      </p:sp>
+      <p:sp>
+        <p:nvSpPr>
+          <p:cNvPr id="13" name="Text 11"/>
+          <p:cNvSpPr/>
+          <p:nvPr/>
+        </p:nvSpPr>
+        <p:spPr>
+          <a:xfrm>
+            <a:off x="548640" y="3337560"/>
+            <a:ext cx="7315200" cy="320040"/>
+          </a:xfrm>
+          <a:prstGeom prst="rect">
+            <a:avLst/>
+          </a:prstGeom>
+          <a:noFill/>
+          <a:ln/>
+        </p:spPr>
+        <p:txBody>
+          <a:bodyPr wrap="square" lIns="0" tIns="0" rIns="0" bIns="0" rtlCol="0" anchor="ctr"/>
+          <a:lstStyle/>
+          <a:p>
+            <a:pPr indent="0" marL="0">
+              <a:buNone/>
+            </a:pPr>
+            <a:r>
+              <a:rPr lang="en-US" sz="900" i="1" dirty="0">
+                <a:solidFill>
+                  <a:srgbClr val="9AA2BD"/>
+                </a:solidFill>
+                <a:latin typeface="Calibri" pitchFamily="34" charset="0"/>
+                <a:ea typeface="Calibri" pitchFamily="34" charset="-122"/>
+                <a:cs typeface="Calibri" pitchFamily="34" charset="-120"/>
+              </a:rPr>
+              <a:t>Source: Business Research Insights, STEM Education Market Report; comparables per each product's own public description</a:t>
+            </a:r>
+            <a:endParaRPr lang="en-US" sz="900" dirty="0"/>
+          </a:p>
+        </p:txBody>
+      </p:sp>
+      <p:sp>
+        <p:nvSpPr>
+          <p:cNvPr id="14" name="Text 12"/>
+          <p:cNvSpPr/>
+          <p:nvPr/>
+        </p:nvSpPr>
+        <p:spPr>
+          <a:xfrm>
+            <a:off x="548640" y="3886200"/>
+            <a:ext cx="7315200" cy="365760"/>
+          </a:xfrm>
+          <a:prstGeom prst="rect">
+            <a:avLst/>
+          </a:prstGeom>
+          <a:noFill/>
+          <a:ln/>
+        </p:spPr>
+        <p:txBody>
+          <a:bodyPr wrap="square" lIns="0" tIns="0" rIns="0" bIns="0" rtlCol="0" anchor="ctr"/>
+          <a:lstStyle/>
+          <a:p>
+            <a:pPr indent="0" marL="0">
+              <a:buNone/>
+            </a:pPr>
+            <a:r>
+              <a:rPr lang="en-US" sz="1500" b="1" dirty="0">
+                <a:solidFill>
+                  <a:srgbClr val="FFFFFF"/>
+                </a:solidFill>
+                <a:latin typeface="Calibri" pitchFamily="34" charset="0"/>
+                <a:ea typeface="Calibri" pitchFamily="34" charset="-122"/>
+                <a:cs typeface="Calibri" pitchFamily="34" charset="-120"/>
+              </a:rPr>
+              <a:t>Where Sandchemy sits:</a:t>
+            </a:r>
+            <a:endParaRPr lang="en-US" sz="1500" dirty="0"/>
+          </a:p>
+        </p:txBody>
+      </p:sp>
+      <p:sp>
+        <p:nvSpPr>
+          <p:cNvPr id="15" name="Text 13"/>
+          <p:cNvSpPr/>
+          <p:nvPr/>
+        </p:nvSpPr>
+        <p:spPr>
+          <a:xfrm>
+            <a:off x="548640" y="4343400"/>
+            <a:ext cx="320040" cy="457200"/>
+          </a:xfrm>
+          <a:prstGeom prst="rect">
+            <a:avLst/>
+          </a:prstGeom>
+          <a:noFill/>
+          <a:ln/>
+        </p:spPr>
+        <p:txBody>
+          <a:bodyPr wrap="square" lIns="0" tIns="0" rIns="0" bIns="0" rtlCol="0" anchor="ctr"/>
+          <a:lstStyle/>
+          <a:p>
+            <a:pPr indent="0" marL="0">
+              <a:buNone/>
+            </a:pPr>
+            <a:r>
+              <a:rPr lang="en-US" sz="1300" b="1" dirty="0">
+                <a:solidFill>
+                  <a:srgbClr val="7EE3FF"/>
+                </a:solidFill>
+              </a:rPr>
+              <a:t>→</a:t>
+            </a:r>
+            <a:endParaRPr lang="en-US" sz="1300" dirty="0"/>
+          </a:p>
+        </p:txBody>
+      </p:sp>
+      <p:sp>
+        <p:nvSpPr>
+          <p:cNvPr id="16" name="Text 14"/>
+          <p:cNvSpPr/>
+          <p:nvPr/>
+        </p:nvSpPr>
+        <p:spPr>
+          <a:xfrm>
+            <a:off x="896112" y="4343400"/>
+            <a:ext cx="10515600" cy="502920"/>
+          </a:xfrm>
+          <a:prstGeom prst="rect">
+            <a:avLst/>
+          </a:prstGeom>
+          <a:noFill/>
+          <a:ln/>
+        </p:spPr>
+        <p:txBody>
+          <a:bodyPr wrap="square" lIns="0" tIns="0" rIns="0" bIns="0" rtlCol="0" anchor="ctr"/>
+          <a:lstStyle/>
+          <a:p>
+            <a:pPr indent="0" marL="0">
+              <a:lnSpc>
+                <a:spcPct val="115000"/>
+              </a:lnSpc>
+              <a:buNone/>
+            </a:pPr>
+            <a:r>
+              <a:rPr lang="en-US" sz="1250" dirty="0">
+                <a:solidFill>
+                  <a:srgbClr val="F2F2F2"/>
+                </a:solidFill>
+                <a:latin typeface="Calibri" pitchFamily="34" charset="0"/>
+                <a:ea typeface="Calibri" pitchFamily="34" charset="-122"/>
+                <a:cs typeface="Calibri" pitchFamily="34" charset="-120"/>
+              </a:rPr>
+              <a:t>Category: Virtual Lab / Simulation-Based STEM Learning — a defined sub-segment of the EdTech market on the prior slide, not a vague "education game"</a:t>
+            </a:r>
+            <a:endParaRPr lang="en-US" sz="1250" dirty="0"/>
+          </a:p>
+        </p:txBody>
+      </p:sp>
+      <p:sp>
+        <p:nvSpPr>
+          <p:cNvPr id="17" name="Text 15"/>
+          <p:cNvSpPr/>
+          <p:nvPr/>
+        </p:nvSpPr>
+        <p:spPr>
+          <a:xfrm>
+            <a:off x="548640" y="4910328"/>
+            <a:ext cx="320040" cy="457200"/>
+          </a:xfrm>
+          <a:prstGeom prst="rect">
+            <a:avLst/>
+          </a:prstGeom>
+          <a:noFill/>
+          <a:ln/>
+        </p:spPr>
+        <p:txBody>
+          <a:bodyPr wrap="square" lIns="0" tIns="0" rIns="0" bIns="0" rtlCol="0" anchor="ctr"/>
+          <a:lstStyle/>
+          <a:p>
+            <a:pPr indent="0" marL="0">
+              <a:buNone/>
+            </a:pPr>
+            <a:r>
+              <a:rPr lang="en-US" sz="1300" b="1" dirty="0">
+                <a:solidFill>
+                  <a:srgbClr val="7EE3FF"/>
+                </a:solidFill>
+              </a:rPr>
+              <a:t>→</a:t>
+            </a:r>
+            <a:endParaRPr lang="en-US" sz="1300" dirty="0"/>
+          </a:p>
+        </p:txBody>
+      </p:sp>
+      <p:sp>
+        <p:nvSpPr>
+          <p:cNvPr id="18" name="Text 16"/>
+          <p:cNvSpPr/>
+          <p:nvPr/>
+        </p:nvSpPr>
+        <p:spPr>
+          <a:xfrm>
+            <a:off x="896112" y="4910328"/>
+            <a:ext cx="10515600" cy="502920"/>
+          </a:xfrm>
+          <a:prstGeom prst="rect">
+            <a:avLst/>
+          </a:prstGeom>
+          <a:noFill/>
+          <a:ln/>
+        </p:spPr>
+        <p:txBody>
+          <a:bodyPr wrap="square" lIns="0" tIns="0" rIns="0" bIns="0" rtlCol="0" anchor="ctr"/>
+          <a:lstStyle/>
+          <a:p>
+            <a:pPr indent="0" marL="0">
+              <a:lnSpc>
+                <a:spcPct val="115000"/>
+              </a:lnSpc>
+              <a:buNone/>
+            </a:pPr>
+            <a:r>
+              <a:rPr lang="en-US" sz="1250" dirty="0">
+                <a:solidFill>
+                  <a:srgbClr val="F2F2F2"/>
+                </a:solidFill>
+                <a:latin typeface="Calibri" pitchFamily="34" charset="0"/>
+                <a:ea typeface="Calibri" pitchFamily="34" charset="-122"/>
+                <a:cs typeface="Calibri" pitchFamily="34" charset="-120"/>
+              </a:rPr>
+              <a:t>PhET (free, university-backed) and Labster/PraxiLabs (paid, institutional) both ship fixed, single-concept simulations — neither is an open, discovery-driven sandbox</a:t>
+            </a:r>
+            <a:endParaRPr lang="en-US" sz="1250" dirty="0"/>
+          </a:p>
+        </p:txBody>
+      </p:sp>
+      <p:sp>
+        <p:nvSpPr>
+          <p:cNvPr id="19" name="Text 17"/>
+          <p:cNvSpPr/>
+          <p:nvPr/>
+        </p:nvSpPr>
+        <p:spPr>
+          <a:xfrm>
+            <a:off x="548640" y="5477256"/>
+            <a:ext cx="320040" cy="457200"/>
+          </a:xfrm>
+          <a:prstGeom prst="rect">
+            <a:avLst/>
+          </a:prstGeom>
+          <a:noFill/>
+          <a:ln/>
+        </p:spPr>
+        <p:txBody>
+          <a:bodyPr wrap="square" lIns="0" tIns="0" rIns="0" bIns="0" rtlCol="0" anchor="ctr"/>
+          <a:lstStyle/>
+          <a:p>
+            <a:pPr indent="0" marL="0">
+              <a:buNone/>
+            </a:pPr>
+            <a:r>
+              <a:rPr lang="en-US" sz="1300" b="1" dirty="0">
+                <a:solidFill>
+                  <a:srgbClr val="7EE3FF"/>
+                </a:solidFill>
+              </a:rPr>
+              <a:t>→</a:t>
+            </a:r>
+            <a:endParaRPr lang="en-US" sz="1300" dirty="0"/>
+          </a:p>
+        </p:txBody>
+      </p:sp>
+      <p:sp>
+        <p:nvSpPr>
+          <p:cNvPr id="20" name="Text 18"/>
+          <p:cNvSpPr/>
+          <p:nvPr/>
+        </p:nvSpPr>
+        <p:spPr>
+          <a:xfrm>
+            <a:off x="896112" y="5477256"/>
+            <a:ext cx="10515600" cy="502920"/>
+          </a:xfrm>
+          <a:prstGeom prst="rect">
+            <a:avLst/>
+          </a:prstGeom>
+          <a:noFill/>
+          <a:ln/>
+        </p:spPr>
+        <p:txBody>
+          <a:bodyPr wrap="square" lIns="0" tIns="0" rIns="0" bIns="0" rtlCol="0" anchor="ctr"/>
+          <a:lstStyle/>
+          <a:p>
+            <a:pPr indent="0" marL="0">
+              <a:lnSpc>
+                <a:spcPct val="115000"/>
+              </a:lnSpc>
+              <a:buNone/>
+            </a:pPr>
+            <a:r>
+              <a:rPr lang="en-US" sz="1250" dirty="0">
+                <a:solidFill>
+                  <a:srgbClr val="F2F2F2"/>
+                </a:solidFill>
+                <a:latin typeface="Calibri" pitchFamily="34" charset="0"/>
+                <a:ea typeface="Calibri" pitchFamily="34" charset="-122"/>
+                <a:cs typeface="Calibri" pitchFamily="34" charset="-120"/>
+              </a:rPr>
+              <a:t>Minecraft Education is the closest sandbox by shape, but its blocks aren't scientifically modelled — Sandchemy is the only one built on real, sourced thermodynamics and chemistry</a:t>
+            </a:r>
+            <a:endParaRPr lang="en-US" sz="1250" dirty="0"/>
+          </a:p>
+        </p:txBody>
+      </p:sp>
+      <p:sp>
+        <p:nvSpPr>
+          <p:cNvPr id="21" name="Text 19"/>
+          <p:cNvSpPr/>
+          <p:nvPr/>
+        </p:nvSpPr>
+        <p:spPr>
+          <a:xfrm>
+            <a:off x="11430000" y="6446520"/>
+            <a:ext cx="548640" cy="274320"/>
+          </a:xfrm>
+          <a:prstGeom prst="rect">
+            <a:avLst/>
+          </a:prstGeom>
+          <a:noFill/>
+          <a:ln/>
+        </p:spPr>
+        <p:txBody>
+          <a:bodyPr wrap="square" lIns="0" tIns="0" rIns="0" bIns="0" rtlCol="0" anchor="ctr"/>
+          <a:lstStyle/>
+          <a:p>
+            <a:pPr algn="r" indent="0" marL="0">
+              <a:buNone/>
+            </a:pPr>
+            <a:r>
+              <a:rPr lang="en-US" sz="1000" dirty="0">
+                <a:solidFill>
+                  <a:srgbClr val="9AA2BD"/>
+                </a:solidFill>
+                <a:latin typeface="Calibri" pitchFamily="34" charset="0"/>
+                <a:ea typeface="Calibri" pitchFamily="34" charset="-122"/>
+                <a:cs typeface="Calibri" pitchFamily="34" charset="-120"/>
+              </a:rPr>
+              <a:t>07</a:t>
+            </a:r>
+            <a:endParaRPr lang="en-US" sz="1000" dirty="0"/>
+          </a:p>
+        </p:txBody>
+      </p:sp>
+      <p:sp>
+        <p:nvSpPr>
+          <p:cNvPr id="22" name="Text 20"/>
+          <p:cNvSpPr/>
+          <p:nvPr/>
+        </p:nvSpPr>
+        <p:spPr>
+          <a:xfrm>
+            <a:off x="548640" y="6446520"/>
+            <a:ext cx="2743200" cy="274320"/>
+          </a:xfrm>
+          <a:prstGeom prst="rect">
+            <a:avLst/>
+          </a:prstGeom>
+          <a:noFill/>
+          <a:ln/>
+        </p:spPr>
+        <p:txBody>
+          <a:bodyPr wrap="square" lIns="0" tIns="0" rIns="0" bIns="0" rtlCol="0" anchor="ctr"/>
+          <a:lstStyle/>
+          <a:p>
+            <a:pPr indent="0" marL="0">
+              <a:buNone/>
+            </a:pPr>
+            <a:r>
+              <a:rPr lang="en-US" sz="1000" spc="100" kern="0" dirty="0">
+                <a:solidFill>
+                  <a:srgbClr val="9AA2BD"/>
+                </a:solidFill>
+                <a:latin typeface="Calibri" pitchFamily="34" charset="0"/>
+                <a:ea typeface="Calibri" pitchFamily="34" charset="-122"/>
+                <a:cs typeface="Calibri" pitchFamily="34" charset="-120"/>
+              </a:rPr>
+              <a:t>SANDCHEMY</a:t>
+            </a:r>
+            <a:endParaRPr lang="en-US" sz="1000" dirty="0"/>
+          </a:p>
+        </p:txBody>
+      </p:sp>
+    </p:spTree>
+  </p:cSld>
+  <p:clrMapOvr>
+    <a:masterClrMapping/>
+  </p:clrMapOvr>
+</p:sld>
+</file>
+
+<file path=ppt/slides/slide14.xml><?xml version="1.0" encoding="utf-8"?>
+<p:sld xmlns:a="http://schemas.openxmlformats.org/drawingml/2006/main" xmlns:r="http://schemas.openxmlformats.org/officeDocument/2006/relationships" xmlns:p="http://schemas.openxmlformats.org/presentationml/2006/main">
+  <p:cSld name="Slide 14">
+    <p:bg>
+      <p:bgPr>
+        <a:solidFill>
+          <a:srgbClr val="0D0F1A"/>
+        </a:solidFill>
+      </p:bgPr>
+    </p:bg>
+    <p:spTree>
+      <p:nvGrpSpPr>
+        <p:cNvPr id="1" name=""/>
+        <p:cNvGrpSpPr/>
+        <p:nvPr/>
+      </p:nvGrpSpPr>
+      <p:grpSpPr>
+        <a:xfrm>
+          <a:off x="0" y="0"/>
+          <a:ext cx="0" cy="0"/>
+          <a:chOff x="0" y="0"/>
+          <a:chExt cx="0" cy="0"/>
+        </a:xfrm>
+      </p:grpSpPr>
+      <p:sp>
+        <p:nvSpPr>
+          <p:cNvPr id="2" name="Text 0"/>
+          <p:cNvSpPr/>
+          <p:nvPr/>
+        </p:nvSpPr>
+        <p:spPr>
+          <a:xfrm>
+            <a:off x="548640" y="411480"/>
+            <a:ext cx="8000000" cy="365760"/>
+          </a:xfrm>
+          <a:prstGeom prst="rect">
+            <a:avLst/>
+          </a:prstGeom>
+          <a:noFill/>
+          <a:ln/>
+        </p:spPr>
+        <p:txBody>
+          <a:bodyPr wrap="square" lIns="0" tIns="0" rIns="0" bIns="0" rtlCol="0" anchor="ctr"/>
+          <a:lstStyle/>
+          <a:p>
+            <a:pPr indent="0" marL="0">
+              <a:buNone/>
+            </a:pPr>
+            <a:r>
+              <a:rPr lang="en-US" sz="1300" b="1" spc="200" kern="0" dirty="0">
+                <a:solidFill>
+                  <a:srgbClr val="FFD76B"/>
+                </a:solidFill>
+                <a:latin typeface="Calibri" pitchFamily="34" charset="0"/>
+                <a:ea typeface="Calibri" pitchFamily="34" charset="-122"/>
+                <a:cs typeface="Calibri" pitchFamily="34" charset="-120"/>
+              </a:rPr>
+              <a:t>FUNDING ROADMAP</a:t>
+            </a:r>
+            <a:endParaRPr lang="en-US" sz="1300" dirty="0"/>
+          </a:p>
+        </p:txBody>
+      </p:sp>
+      <p:sp>
+        <p:nvSpPr>
+          <p:cNvPr id="3" name="Text 1"/>
+          <p:cNvSpPr/>
+          <p:nvPr/>
+        </p:nvSpPr>
+        <p:spPr>
+          <a:xfrm>
+            <a:off x="548640" y="777240"/>
+            <a:ext cx="10972800" cy="640080"/>
+          </a:xfrm>
+          <a:prstGeom prst="rect">
+            <a:avLst/>
+          </a:prstGeom>
+          <a:noFill/>
+          <a:ln/>
+        </p:spPr>
+        <p:txBody>
+          <a:bodyPr wrap="square" lIns="0" tIns="0" rIns="0" bIns="0" rtlCol="0" anchor="ctr"/>
+          <a:lstStyle/>
+          <a:p>
+            <a:pPr indent="0" marL="0">
+              <a:buNone/>
+            </a:pPr>
+            <a:r>
+              <a:rPr lang="en-US" sz="3200" b="1" dirty="0">
+                <a:solidFill>
+                  <a:srgbClr val="FFFFFF"/>
+                </a:solidFill>
+                <a:latin typeface="Cambria" pitchFamily="34" charset="0"/>
+                <a:ea typeface="Cambria" pitchFamily="34" charset="-122"/>
+                <a:cs typeface="Cambria" pitchFamily="34" charset="-120"/>
+              </a:rPr>
+              <a:t>Beyond CIP Spark: a funding roadmap</a:t>
+            </a:r>
+            <a:endParaRPr lang="en-US" sz="3200" dirty="0"/>
+          </a:p>
+        </p:txBody>
+      </p:sp>
+      <p:sp>
+        <p:nvSpPr>
+          <p:cNvPr id="4" name="Text 2"/>
+          <p:cNvSpPr/>
+          <p:nvPr/>
+        </p:nvSpPr>
+        <p:spPr>
+          <a:xfrm>
+            <a:off x="548640" y="1440000"/>
+            <a:ext cx="10972800" cy="457200"/>
+          </a:xfrm>
+          <a:prstGeom prst="rect">
+            <a:avLst/>
+          </a:prstGeom>
+          <a:noFill/>
+          <a:ln/>
+        </p:spPr>
+        <p:txBody>
+          <a:bodyPr wrap="square" lIns="0" tIns="0" rIns="0" bIns="0" rtlCol="0" anchor="ctr"/>
+          <a:lstStyle/>
+          <a:p>
+            <a:pPr indent="0" marL="0">
+              <a:buNone/>
+            </a:pPr>
+            <a:r>
+              <a:rPr lang="en-US" sz="1400" i="1" dirty="0">
+                <a:solidFill>
+                  <a:srgbClr val="9AA2BD"/>
+                </a:solidFill>
+                <a:latin typeface="Calibri" pitchFamily="34" charset="0"/>
+                <a:ea typeface="Calibri" pitchFamily="34" charset="-122"/>
+                <a:cs typeface="Calibri" pitchFamily="34" charset="-120"/>
+              </a:rPr>
+              <a:t>CIP Spark is the lead application. These are the parallel and follow-on grants being pursued alongside it.</a:t>
+            </a:r>
+            <a:endParaRPr lang="en-US" sz="1400" dirty="0"/>
+          </a:p>
+        </p:txBody>
+      </p:sp>
+      <p:sp>
+        <p:nvSpPr>
+          <p:cNvPr id="29" name="SourceTop"/>
+          <p:cNvSpPr/>
+          <p:nvPr/>
+        </p:nvSpPr>
+        <p:spPr>
+          <a:xfrm>
+            <a:off x="548640" y="1930000"/>
+            <a:ext cx="10972800" cy="200000"/>
+          </a:xfrm>
+          <a:prstGeom prst="rect">
+            <a:avLst/>
+          </a:prstGeom>
+          <a:noFill/>
+          <a:ln/>
+        </p:spPr>
+        <p:txBody>
+          <a:bodyPr wrap="square" lIns="0" tIns="0" rIns="0" bIns="0" rtlCol="0" anchor="ctr"/>
+          <a:lstStyle/>
+          <a:p>
+            <a:pPr indent="0" marL="0">
+              <a:buNone/>
+            </a:pPr>
+            <a:r>
+              <a:rPr lang="en-US" sz="900" i="1" dirty="0">
+                <a:solidFill>
+                  <a:srgbClr val="9AA2BD"/>
+                </a:solidFill>
+                <a:latin typeface="Calibri" pitchFamily="34" charset="0"/>
+                <a:ea typeface="Calibri" pitchFamily="34" charset="-122"/>
+                <a:cs typeface="Calibri" pitchFamily="34" charset="-120"/>
+              </a:rPr>
+              <a:t>Sources: Cradle Fund, MRANTI, MDEC, TalentCorp, Yayasan PETRONAS — public eligibility pages, self-assessed as of July 2026</a:t>
+            </a:r>
+            <a:endParaRPr lang="en-US" sz="900" dirty="0"/>
+          </a:p>
+        </p:txBody>
+      </p:sp>
+      <p:sp>
+        <p:nvSpPr>
+          <p:cNvPr id="30" name="Arrow 0"/>
+          <p:cNvSpPr/>
+          <p:nvPr/>
+        </p:nvSpPr>
+        <p:spPr>
+          <a:xfrm>
+            <a:off x="548640" y="2230000"/>
+            <a:ext cx="320040" cy="457200"/>
+          </a:xfrm>
+          <a:prstGeom prst="rect">
+            <a:avLst/>
+          </a:prstGeom>
+          <a:noFill/>
+          <a:ln/>
+        </p:spPr>
+        <p:txBody>
+          <a:bodyPr wrap="square" lIns="0" tIns="0" rIns="0" bIns="0" rtlCol="0" anchor="ctr"/>
+          <a:lstStyle/>
+          <a:p>
+            <a:pPr indent="0" marL="0">
+              <a:buNone/>
+            </a:pPr>
+            <a:r>
+              <a:rPr lang="en-US" sz="1300" b="1" dirty="0">
+                <a:solidFill>
+                  <a:srgbClr val="7EE3FF"/>
+                </a:solidFill>
+              </a:rPr>
+              <a:t>→</a:t>
+            </a:r>
+            <a:endParaRPr lang="en-US" sz="1300" dirty="0"/>
+          </a:p>
+        </p:txBody>
+      </p:sp>
+      <p:sp>
+        <p:nvSpPr>
+          <p:cNvPr id="31" name="Row 0"/>
+          <p:cNvSpPr/>
+          <p:nvPr/>
+        </p:nvSpPr>
+        <p:spPr>
+          <a:xfrm>
+            <a:off x="896112" y="2230000"/>
+            <a:ext cx="10515600" cy="700000"/>
+          </a:xfrm>
+          <a:prstGeom prst="rect">
+            <a:avLst/>
+          </a:prstGeom>
+          <a:noFill/>
+          <a:ln/>
+        </p:spPr>
+        <p:txBody>
+          <a:bodyPr wrap="square" lIns="0" tIns="0" rIns="0" bIns="0" rtlCol="0" anchor="t"/>
+          <a:lstStyle/>
+          <a:p>
+            <a:pPr indent="0" marL="0">
+              <a:lnSpc>
+                <a:spcPct val="115000"/>
+              </a:lnSpc>
+              <a:buNone/>
+            </a:pPr>
+            <a:r>
+              <a:rPr lang="en-US" sz="1200" b="1" dirty="0">
+                <a:solidFill>
+                  <a:srgbClr val="FFD76B"/>
+                </a:solidFill>
+                <a:latin typeface="Calibri" pitchFamily="34" charset="0"/>
+                <a:ea typeface="Calibri" pitchFamily="34" charset="-122"/>
+                <a:cs typeface="Calibri" pitchFamily="34" charset="-120"/>
+              </a:rPr>
+              <a:t xml:space="preserve">Yayasan PETRONAS — STEM Education Grant, up to RM1M over 3 years — NOW: </a:t>
+            </a:r>
+            <a:r>
+              <a:rPr lang="en-US" sz="1200" dirty="0">
+                <a:solidFill>
+                  <a:srgbClr val="F2F2F2"/>
+                </a:solidFill>
+                <a:latin typeface="Calibri" pitchFamily="34" charset="0"/>
+                <a:ea typeface="Calibri" pitchFamily="34" charset="-122"/>
+                <a:cs typeface="Calibri" pitchFamily="34" charset="-120"/>
+              </a:rPr>
+              <a:t xml:space="preserve">CSR-style grant, no paid-up capital or company-age requirement — apply in parallel with CIP Spark.</a:t>
+            </a:r>
+            <a:endParaRPr lang="en-US" sz="1200" dirty="0"/>
+          </a:p>
+        </p:txBody>
+      </p:sp>
+      <p:sp>
+        <p:nvSpPr>
+          <p:cNvPr id="32" name="Arrow 1"/>
+          <p:cNvSpPr/>
+          <p:nvPr/>
+        </p:nvSpPr>
+        <p:spPr>
+          <a:xfrm>
+            <a:off x="548640" y="3090000"/>
+            <a:ext cx="320040" cy="457200"/>
+          </a:xfrm>
+          <a:prstGeom prst="rect">
+            <a:avLst/>
+          </a:prstGeom>
+          <a:noFill/>
+          <a:ln/>
+        </p:spPr>
+        <p:txBody>
+          <a:bodyPr wrap="square" lIns="0" tIns="0" rIns="0" bIns="0" rtlCol="0" anchor="ctr"/>
+          <a:lstStyle/>
+          <a:p>
+            <a:pPr indent="0" marL="0">
+              <a:buNone/>
+            </a:pPr>
+            <a:r>
+              <a:rPr lang="en-US" sz="1300" b="1" dirty="0">
+                <a:solidFill>
+                  <a:srgbClr val="7EE3FF"/>
+                </a:solidFill>
+              </a:rPr>
+              <a:t>→</a:t>
+            </a:r>
+            <a:endParaRPr lang="en-US" sz="1300" dirty="0"/>
+          </a:p>
+        </p:txBody>
+      </p:sp>
+      <p:sp>
+        <p:nvSpPr>
+          <p:cNvPr id="33" name="Row 1"/>
+          <p:cNvSpPr/>
+          <p:nvPr/>
+        </p:nvSpPr>
+        <p:spPr>
+          <a:xfrm>
+            <a:off x="896112" y="3090000"/>
+            <a:ext cx="10515600" cy="700000"/>
+          </a:xfrm>
+          <a:prstGeom prst="rect">
+            <a:avLst/>
+          </a:prstGeom>
+          <a:noFill/>
+          <a:ln/>
+        </p:spPr>
+        <p:txBody>
+          <a:bodyPr wrap="square" lIns="0" tIns="0" rIns="0" bIns="0" rtlCol="0" anchor="t"/>
+          <a:lstStyle/>
+          <a:p>
+            <a:pPr indent="0" marL="0">
+              <a:lnSpc>
+                <a:spcPct val="115000"/>
+              </a:lnSpc>
+              <a:buNone/>
+            </a:pPr>
+            <a:r>
+              <a:rPr lang="en-US" sz="1200" b="1" dirty="0">
+                <a:solidFill>
+                  <a:srgbClr val="FFD76B"/>
+                </a:solidFill>
+                <a:latin typeface="Calibri" pitchFamily="34" charset="0"/>
+                <a:ea typeface="Calibri" pitchFamily="34" charset="-122"/>
+                <a:cs typeface="Calibri" pitchFamily="34" charset="-120"/>
+              </a:rPr>
+              <a:t xml:space="preserve">Cradle CIP Sprint — up to RM600,000 — FOLLOW-ON: </a:t>
+            </a:r>
+            <a:r>
+              <a:rPr lang="en-US" sz="1200" dirty="0">
+                <a:solidFill>
+                  <a:srgbClr val="F2F2F2"/>
+                </a:solidFill>
+                <a:latin typeface="Calibri" pitchFamily="34" charset="0"/>
+                <a:ea typeface="Calibri" pitchFamily="34" charset="-122"/>
+                <a:cs typeface="Calibri" pitchFamily="34" charset="-120"/>
+              </a:rPr>
+              <a:t xml:space="preserve">Cradle’s own next stage after CIP Spark; natural seed-stage step once the company is incorporated.</a:t>
+            </a:r>
+            <a:endParaRPr lang="en-US" sz="1200" dirty="0"/>
+          </a:p>
+        </p:txBody>
+      </p:sp>
+      <p:sp>
+        <p:nvSpPr>
+          <p:cNvPr id="34" name="Arrow 2"/>
+          <p:cNvSpPr/>
+          <p:nvPr/>
+        </p:nvSpPr>
+        <p:spPr>
+          <a:xfrm>
+            <a:off x="548640" y="3950000"/>
+            <a:ext cx="320040" cy="457200"/>
+          </a:xfrm>
+          <a:prstGeom prst="rect">
+            <a:avLst/>
+          </a:prstGeom>
+          <a:noFill/>
+          <a:ln/>
+        </p:spPr>
+        <p:txBody>
+          <a:bodyPr wrap="square" lIns="0" tIns="0" rIns="0" bIns="0" rtlCol="0" anchor="ctr"/>
+          <a:lstStyle/>
+          <a:p>
+            <a:pPr indent="0" marL="0">
+              <a:buNone/>
+            </a:pPr>
+            <a:r>
+              <a:rPr lang="en-US" sz="1300" b="1" dirty="0">
+                <a:solidFill>
+                  <a:srgbClr val="7EE3FF"/>
+                </a:solidFill>
+              </a:rPr>
+              <a:t>→</a:t>
+            </a:r>
+            <a:endParaRPr lang="en-US" sz="1300" dirty="0"/>
+          </a:p>
+        </p:txBody>
+      </p:sp>
+      <p:sp>
+        <p:nvSpPr>
+          <p:cNvPr id="35" name="Row 2"/>
+          <p:cNvSpPr/>
+          <p:nvPr/>
+        </p:nvSpPr>
+        <p:spPr>
+          <a:xfrm>
+            <a:off x="896112" y="3950000"/>
+            <a:ext cx="10515600" cy="700000"/>
+          </a:xfrm>
+          <a:prstGeom prst="rect">
+            <a:avLst/>
+          </a:prstGeom>
+          <a:noFill/>
+          <a:ln/>
+        </p:spPr>
+        <p:txBody>
+          <a:bodyPr wrap="square" lIns="0" tIns="0" rIns="0" bIns="0" rtlCol="0" anchor="t"/>
+          <a:lstStyle/>
+          <a:p>
+            <a:pPr indent="0" marL="0">
+              <a:lnSpc>
+                <a:spcPct val="115000"/>
+              </a:lnSpc>
+              <a:buNone/>
+            </a:pPr>
+            <a:r>
+              <a:rPr lang="en-US" sz="1200" b="1" dirty="0">
+                <a:solidFill>
+                  <a:srgbClr val="FFD76B"/>
+                </a:solidFill>
+                <a:latin typeface="Calibri" pitchFamily="34" charset="0"/>
+                <a:ea typeface="Calibri" pitchFamily="34" charset="-122"/>
+                <a:cs typeface="Calibri" pitchFamily="34" charset="-120"/>
+              </a:rPr>
+              <a:t xml:space="preserve">MRANTI Strategic Research Fund — R&amp;D grant — FOLLOW-ON: </a:t>
+            </a:r>
+            <a:r>
+              <a:rPr lang="en-US" sz="1200" dirty="0">
+                <a:solidFill>
+                  <a:srgbClr val="F2F2F2"/>
+                </a:solidFill>
+                <a:latin typeface="Calibri" pitchFamily="34" charset="0"/>
+                <a:ea typeface="Calibri" pitchFamily="34" charset="-122"/>
+                <a:cs typeface="Calibri" pitchFamily="34" charset="-120"/>
+              </a:rPr>
+              <a:t xml:space="preserve">Needs SSM registration, RM10,000 paid-up capital, and 2 directors — pursue right after incorporation.</a:t>
+            </a:r>
+            <a:endParaRPr lang="en-US" sz="1200" dirty="0"/>
+          </a:p>
+        </p:txBody>
+      </p:sp>
+      <p:sp>
+        <p:nvSpPr>
+          <p:cNvPr id="36" name="Arrow 3"/>
+          <p:cNvSpPr/>
+          <p:nvPr/>
+        </p:nvSpPr>
+        <p:spPr>
+          <a:xfrm>
+            <a:off x="548640" y="4810000"/>
+            <a:ext cx="320040" cy="457200"/>
+          </a:xfrm>
+          <a:prstGeom prst="rect">
+            <a:avLst/>
+          </a:prstGeom>
+          <a:noFill/>
+          <a:ln/>
+        </p:spPr>
+        <p:txBody>
+          <a:bodyPr wrap="square" lIns="0" tIns="0" rIns="0" bIns="0" rtlCol="0" anchor="ctr"/>
+          <a:lstStyle/>
+          <a:p>
+            <a:pPr indent="0" marL="0">
+              <a:buNone/>
+            </a:pPr>
+            <a:r>
+              <a:rPr lang="en-US" sz="1300" b="1" dirty="0">
+                <a:solidFill>
+                  <a:srgbClr val="7EE3FF"/>
+                </a:solidFill>
+              </a:rPr>
+              <a:t>→</a:t>
+            </a:r>
+            <a:endParaRPr lang="en-US" sz="1300" dirty="0"/>
+          </a:p>
+        </p:txBody>
+      </p:sp>
+      <p:sp>
+        <p:nvSpPr>
+          <p:cNvPr id="37" name="Row 3"/>
+          <p:cNvSpPr/>
+          <p:nvPr/>
+        </p:nvSpPr>
+        <p:spPr>
+          <a:xfrm>
+            <a:off x="896112" y="4810000"/>
+            <a:ext cx="10515600" cy="700000"/>
+          </a:xfrm>
+          <a:prstGeom prst="rect">
+            <a:avLst/>
+          </a:prstGeom>
+          <a:noFill/>
+          <a:ln/>
+        </p:spPr>
+        <p:txBody>
+          <a:bodyPr wrap="square" lIns="0" tIns="0" rIns="0" bIns="0" rtlCol="0" anchor="t"/>
+          <a:lstStyle/>
+          <a:p>
+            <a:pPr indent="0" marL="0">
+              <a:lnSpc>
+                <a:spcPct val="115000"/>
+              </a:lnSpc>
+              <a:buNone/>
+            </a:pPr>
+            <a:r>
+              <a:rPr lang="en-US" sz="1200" b="1" dirty="0">
+                <a:solidFill>
+                  <a:srgbClr val="FFD76B"/>
+                </a:solidFill>
+                <a:latin typeface="Calibri" pitchFamily="34" charset="0"/>
+                <a:ea typeface="Calibri" pitchFamily="34" charset="-122"/>
+                <a:cs typeface="Calibri" pitchFamily="34" charset="-120"/>
+              </a:rPr>
+              <a:t xml:space="preserve">TalentCorp LiKES — RM2,000 per intern — LATER: </a:t>
+            </a:r>
+            <a:r>
+              <a:rPr lang="en-US" sz="1200" dirty="0">
+                <a:solidFill>
+                  <a:srgbClr val="F2F2F2"/>
+                </a:solidFill>
+                <a:latin typeface="Calibri" pitchFamily="34" charset="0"/>
+                <a:ea typeface="Calibri" pitchFamily="34" charset="-122"/>
+                <a:cs typeface="Calibri" pitchFamily="34" charset="-120"/>
+              </a:rPr>
+              <a:t xml:space="preserve">Internship hiring grant; relevant once curriculum/content work needs paid interns.</a:t>
+            </a:r>
+            <a:endParaRPr lang="en-US" sz="1200" dirty="0"/>
+          </a:p>
+        </p:txBody>
+      </p:sp>
+      <p:sp>
+        <p:nvSpPr>
+          <p:cNvPr id="38" name="Arrow 4"/>
+          <p:cNvSpPr/>
+          <p:nvPr/>
+        </p:nvSpPr>
+        <p:spPr>
+          <a:xfrm>
+            <a:off x="548640" y="5670000"/>
+            <a:ext cx="320040" cy="457200"/>
+          </a:xfrm>
+          <a:prstGeom prst="rect">
+            <a:avLst/>
+          </a:prstGeom>
+          <a:noFill/>
+          <a:ln/>
+        </p:spPr>
+        <p:txBody>
+          <a:bodyPr wrap="square" lIns="0" tIns="0" rIns="0" bIns="0" rtlCol="0" anchor="ctr"/>
+          <a:lstStyle/>
+          <a:p>
+            <a:pPr indent="0" marL="0">
+              <a:buNone/>
+            </a:pPr>
+            <a:r>
+              <a:rPr lang="en-US" sz="1300" b="1" dirty="0">
+                <a:solidFill>
+                  <a:srgbClr val="7EE3FF"/>
+                </a:solidFill>
+              </a:rPr>
+              <a:t>→</a:t>
+            </a:r>
+            <a:endParaRPr lang="en-US" sz="1300" dirty="0"/>
+          </a:p>
+        </p:txBody>
+      </p:sp>
+      <p:sp>
+        <p:nvSpPr>
+          <p:cNvPr id="39" name="Row 4"/>
+          <p:cNvSpPr/>
+          <p:nvPr/>
+        </p:nvSpPr>
+        <p:spPr>
+          <a:xfrm>
+            <a:off x="896112" y="5670000"/>
+            <a:ext cx="10515600" cy="700000"/>
+          </a:xfrm>
+          <a:prstGeom prst="rect">
+            <a:avLst/>
+          </a:prstGeom>
+          <a:noFill/>
+          <a:ln/>
+        </p:spPr>
+        <p:txBody>
+          <a:bodyPr wrap="square" lIns="0" tIns="0" rIns="0" bIns="0" rtlCol="0" anchor="t"/>
+          <a:lstStyle/>
+          <a:p>
+            <a:pPr indent="0" marL="0">
+              <a:lnSpc>
+                <a:spcPct val="115000"/>
+              </a:lnSpc>
+              <a:buNone/>
+            </a:pPr>
+            <a:r>
+              <a:rPr lang="en-US" sz="1200" b="1" dirty="0">
+                <a:solidFill>
+                  <a:srgbClr val="FFD76B"/>
+                </a:solidFill>
+                <a:latin typeface="Calibri" pitchFamily="34" charset="0"/>
+                <a:ea typeface="Calibri" pitchFamily="34" charset="-122"/>
+                <a:cs typeface="Calibri" pitchFamily="34" charset="-120"/>
+              </a:rPr>
+              <a:t xml:space="preserve">MDEC Malaysia Digital Catalyst Grant — up to RM1M — LATER: </a:t>
+            </a:r>
+            <a:r>
+              <a:rPr lang="en-US" sz="1200" dirty="0">
+                <a:solidFill>
+                  <a:srgbClr val="F2F2F2"/>
+                </a:solidFill>
+                <a:latin typeface="Calibri" pitchFamily="34" charset="0"/>
+                <a:ea typeface="Calibri" pitchFamily="34" charset="-122"/>
+                <a:cs typeface="Calibri" pitchFamily="34" charset="-120"/>
+              </a:rPr>
+              <a:t xml:space="preserve">Needs RM500,000 paid-up capital and 1 year of operating history — a growth-stage target, not pre-seed.</a:t>
+            </a:r>
+            <a:endParaRPr lang="en-US" sz="1200" dirty="0"/>
+          </a:p>
+        </p:txBody>
+      </p:sp>
+      <p:sp>
+        <p:nvSpPr>
+          <p:cNvPr id="41" name="Page"/>
+          <p:cNvSpPr/>
+          <p:nvPr/>
+        </p:nvSpPr>
+        <p:spPr>
+          <a:xfrm>
+            <a:off x="11430000" y="6446520"/>
+            <a:ext cx="548640" cy="274320"/>
+          </a:xfrm>
+          <a:prstGeom prst="rect">
+            <a:avLst/>
+          </a:prstGeom>
+          <a:noFill/>
+          <a:ln/>
+        </p:spPr>
+        <p:txBody>
+          <a:bodyPr wrap="square" lIns="0" tIns="0" rIns="0" bIns="0" rtlCol="0" anchor="ctr"/>
+          <a:lstStyle/>
+          <a:p>
+            <a:pPr algn="r" indent="0" marL="0">
+              <a:buNone/>
+            </a:pPr>
+            <a:r>
+              <a:rPr lang="en-US" sz="1000" dirty="0">
+                <a:solidFill>
+                  <a:srgbClr val="9AA2BD"/>
+                </a:solidFill>
+                <a:latin typeface="Calibri" pitchFamily="34" charset="0"/>
+                <a:ea typeface="Calibri" pitchFamily="34" charset="-122"/>
+                <a:cs typeface="Calibri" pitchFamily="34" charset="-120"/>
+              </a:rPr>
+              <a:t>12</a:t>
+            </a:r>
+            <a:endParaRPr lang="en-US" sz="1000" dirty="0"/>
+          </a:p>
+        </p:txBody>
+      </p:sp>
+      <p:sp>
+        <p:nvSpPr>
+          <p:cNvPr id="42" name="Brand"/>
+          <p:cNvSpPr/>
+          <p:nvPr/>
+        </p:nvSpPr>
+        <p:spPr>
+          <a:xfrm>
+            <a:off x="548640" y="6446520"/>
+            <a:ext cx="2743200" cy="274320"/>
+          </a:xfrm>
+          <a:prstGeom prst="rect">
+            <a:avLst/>
+          </a:prstGeom>
+          <a:noFill/>
+          <a:ln/>
+        </p:spPr>
+        <p:txBody>
+          <a:bodyPr wrap="square" lIns="0" tIns="0" rIns="0" bIns="0" rtlCol="0" anchor="ctr"/>
+          <a:lstStyle/>
+          <a:p>
+            <a:pPr indent="0" marL="0">
+              <a:buNone/>
+            </a:pPr>
+            <a:r>
+              <a:rPr lang="en-US" sz="1000" spc="100" kern="0" dirty="0">
+                <a:solidFill>
+                  <a:srgbClr val="9AA2BD"/>
+                </a:solidFill>
+                <a:latin typeface="Calibri" pitchFamily="34" charset="0"/>
+                <a:ea typeface="Calibri" pitchFamily="34" charset="-122"/>
+                <a:cs typeface="Calibri" pitchFamily="34" charset="-120"/>
+              </a:rPr>
+              <a:t>SANDCHEMY</a:t>
+            </a:r>
+            <a:endParaRPr lang="en-US" sz="1000" dirty="0"/>
           </a:p>
         </p:txBody>
       </p:sp>
@@ -9580,7 +11129,7 @@
                 <a:ea typeface="Calibri" pitchFamily="34" charset="-122"/>
                 <a:cs typeface="Calibri" pitchFamily="34" charset="-120"/>
               </a:rPr>
-              <a:t>07</a:t>
+              <a:t>08</a:t>
             </a:r>
             <a:endParaRPr lang="en-US" sz="1000" dirty="0"/>
           </a:p>
@@ -10631,7 +12180,7 @@
                 <a:ea typeface="Calibri" pitchFamily="34" charset="-122"/>
                 <a:cs typeface="Calibri" pitchFamily="34" charset="-120"/>
               </a:rPr>
-              <a:t>08</a:t>
+              <a:t>09</a:t>
             </a:r>
             <a:endParaRPr lang="en-US" sz="1000" dirty="0"/>
           </a:p>
@@ -11544,7 +13093,7 @@
                 <a:ea typeface="Calibri" pitchFamily="34" charset="-122"/>
                 <a:cs typeface="Calibri" pitchFamily="34" charset="-120"/>
               </a:rPr>
-              <a:t>09</a:t>
+              <a:t>10</a:t>
             </a:r>
             <a:endParaRPr lang="en-US" sz="1000" dirty="0"/>
           </a:p>
